--- a/output/wordlabs-stick-3day.pptx
+++ b/output/wordlabs-stick-3day.pptx
@@ -4240,7 +4240,7 @@
                 <a:ea typeface="Calibri" pitchFamily="34" charset="-122"/>
                 <a:cs typeface="Calibri" pitchFamily="34" charset="-120"/>
               </a:rPr>
-              <a:t>"to adhere, fasten, or pierce"</a:t>
+              <a:t>"a thin piece of wood; to attach"</a:t>
             </a:r>
             <a:endParaRPr lang="en-US" sz="2200" dirty="0"/>
           </a:p>
@@ -4279,7 +4279,7 @@
                 <a:ea typeface="Calibri" pitchFamily="34" charset="-122"/>
                 <a:cs typeface="Calibri" pitchFamily="34" charset="-120"/>
               </a:rPr>
-              <a:t>Origin: Latin: stingere</a:t>
+              <a:t>Origin: Core English root</a:t>
             </a:r>
             <a:endParaRPr lang="en-US" sz="1300" dirty="0"/>
           </a:p>
@@ -5288,7 +5288,7 @@
                 <a:ea typeface="Calibri" pitchFamily="34" charset="-122"/>
                 <a:cs typeface="Calibri" pitchFamily="34" charset="-120"/>
               </a:rPr>
-              <a:t>Word Labs  •  wordlabs.app  •  Root: 'stick' = to adhere, fasten, or pierce</a:t>
+              <a:t>Word Labs  •  wordlabs.app  •  Root: 'stick' = a thin piece of wood; to attach</a:t>
             </a:r>
             <a:endParaRPr lang="en-US" sz="800" dirty="0"/>
           </a:p>
@@ -5622,7 +5622,7 @@
                 <a:ea typeface="Trebuchet MS" pitchFamily="34" charset="-122"/>
                 <a:cs typeface="Trebuchet MS" pitchFamily="34" charset="-120"/>
               </a:rPr>
-              <a:t>1</a:t>
+              <a:t>0</a:t>
             </a:r>
             <a:pPr algn="ctr" indent="0" marL="0">
               <a:buNone/>
@@ -5928,7 +5928,7 @@
                 <a:ea typeface="Calibri" pitchFamily="34" charset="-122"/>
                 <a:cs typeface="Calibri" pitchFamily="34" charset="-120"/>
               </a:rPr>
-              <a:t>Word Labs  •  wordlabs.app  •  Root: 'stick' = to adhere, fasten, or pierce</a:t>
+              <a:t>Word Labs  •  wordlabs.app  •  Root: 'stick' = a thin piece of wood; to attach</a:t>
             </a:r>
             <a:endParaRPr lang="en-US" sz="800" dirty="0"/>
           </a:p>
@@ -6040,7 +6040,7 @@
                 <a:ea typeface="Calibri" pitchFamily="34" charset="-122"/>
                 <a:cs typeface="Calibri" pitchFamily="34" charset="-120"/>
               </a:rPr>
-              <a:t>The </a:t>
+              <a:t>My hands were </a:t>
             </a:r>
             <a:pPr algn="l" indent="0" marL="0">
               <a:buNone/>
@@ -6057,7 +6057,7 @@
                 <a:ea typeface="Calibri" pitchFamily="34" charset="-122"/>
                 <a:cs typeface="Calibri" pitchFamily="34" charset="-120"/>
               </a:rPr>
-              <a:t>nonstick</a:t>
+              <a:t>sticky</a:t>
             </a:r>
             <a:pPr algn="l" indent="0" marL="0">
               <a:buNone/>
@@ -6071,7 +6071,7 @@
                 <a:ea typeface="Calibri" pitchFamily="34" charset="-122"/>
                 <a:cs typeface="Calibri" pitchFamily="34" charset="-120"/>
               </a:rPr>
-              <a:t> pan was perfect for cooking, but the </a:t>
+              <a:t> after eating the toffee. She put a shiny </a:t>
             </a:r>
             <a:pPr algn="l" indent="0" marL="0">
               <a:buNone/>
@@ -6102,7 +6102,7 @@
                 <a:ea typeface="Calibri" pitchFamily="34" charset="-122"/>
                 <a:cs typeface="Calibri" pitchFamily="34" charset="-120"/>
               </a:rPr>
-              <a:t> on its handle warned us not to overheat it.</a:t>
+              <a:t> on her homework book.</a:t>
             </a:r>
             <a:endParaRPr lang="en-US" sz="1800" dirty="0"/>
           </a:p>
@@ -6257,7 +6257,7 @@
                 <a:ea typeface="Trebuchet MS" pitchFamily="34" charset="-122"/>
                 <a:cs typeface="Trebuchet MS" pitchFamily="34" charset="-120"/>
               </a:rPr>
-              <a:t>nonstick</a:t>
+              <a:t>sticky</a:t>
             </a:r>
             <a:endParaRPr lang="en-US" sz="1400" dirty="0"/>
           </a:p>
@@ -6716,7 +6716,7 @@
                 <a:ea typeface="Calibri" pitchFamily="34" charset="-122"/>
                 <a:cs typeface="Calibri" pitchFamily="34" charset="-120"/>
               </a:rPr>
-              <a:t>Word Labs  •  wordlabs.app  •  Root: 'stick' = to adhere, fasten, or pierce</a:t>
+              <a:t>Word Labs  •  wordlabs.app  •  Root: 'stick' = a thin piece of wood; to attach</a:t>
             </a:r>
             <a:endParaRPr lang="en-US" sz="800" dirty="0"/>
           </a:p>
@@ -6855,7 +6855,7 @@
                 <a:ea typeface="Trebuchet MS" pitchFamily="34" charset="-122"/>
                 <a:cs typeface="Trebuchet MS" pitchFamily="34" charset="-120"/>
               </a:rPr>
-              <a:t>nonstick</a:t>
+              <a:t>sticky</a:t>
             </a:r>
             <a:endParaRPr lang="en-US" sz="2800" dirty="0"/>
           </a:p>
@@ -7543,7 +7543,7 @@
                 <a:ea typeface="Calibri" pitchFamily="34" charset="-122"/>
                 <a:cs typeface="Calibri" pitchFamily="34" charset="-120"/>
               </a:rPr>
-              <a:t>Word Labs  •  wordlabs.app  •  Root: 'stick' = to adhere, fasten, or pierce</a:t>
+              <a:t>Word Labs  •  wordlabs.app  •  Root: 'stick' = a thin piece of wood; to attach</a:t>
             </a:r>
             <a:endParaRPr lang="en-US" sz="800" dirty="0"/>
           </a:p>
@@ -7682,7 +7682,7 @@
                 <a:ea typeface="Trebuchet MS" pitchFamily="34" charset="-122"/>
                 <a:cs typeface="Trebuchet MS" pitchFamily="34" charset="-120"/>
               </a:rPr>
-              <a:t>nonstick</a:t>
+              <a:t>sticky</a:t>
             </a:r>
             <a:endParaRPr lang="en-US" sz="2800" dirty="0"/>
           </a:p>
@@ -7771,11 +7771,11 @@
             </a:avLst>
           </a:prstGeom>
           <a:solidFill>
-            <a:srgbClr val="DDD6FE"/>
+            <a:srgbClr val="CCFBF1"/>
           </a:solidFill>
           <a:ln w="19050">
             <a:solidFill>
-              <a:srgbClr val="7C3AED"/>
+              <a:srgbClr val="0D9488"/>
             </a:solidFill>
             <a:prstDash val="solid"/>
           </a:ln>
@@ -7815,13 +7815,13 @@
             <a:r>
               <a:rPr lang="en-US" sz="1300" b="1" dirty="0">
                 <a:solidFill>
-                  <a:srgbClr val="4C1D95"/>
+                  <a:srgbClr val="0F766E"/>
                 </a:solidFill>
                 <a:latin typeface="Trebuchet MS" pitchFamily="34" charset="0"/>
                 <a:ea typeface="Trebuchet MS" pitchFamily="34" charset="-122"/>
                 <a:cs typeface="Trebuchet MS" pitchFamily="34" charset="-120"/>
               </a:rPr>
-              <a:t>non</a:t>
+              <a:t>stick</a:t>
             </a:r>
             <a:endParaRPr lang="en-US" sz="1300" dirty="0"/>
           </a:p>
@@ -7860,7 +7860,7 @@
                 <a:ea typeface="Calibri" pitchFamily="34" charset="-122"/>
                 <a:cs typeface="Calibri" pitchFamily="34" charset="-120"/>
               </a:rPr>
-              <a:t>not</a:t>
+              <a:t>a thin piece of wood; to attach</a:t>
             </a:r>
             <a:endParaRPr lang="en-US" sz="850" dirty="0"/>
           </a:p>
@@ -7883,11 +7883,11 @@
             </a:avLst>
           </a:prstGeom>
           <a:solidFill>
-            <a:srgbClr val="CCFBF1"/>
+            <a:srgbClr val="FCE7F3"/>
           </a:solidFill>
           <a:ln w="19050">
             <a:solidFill>
-              <a:srgbClr val="0D9488"/>
+              <a:srgbClr val="DB2777"/>
             </a:solidFill>
             <a:prstDash val="solid"/>
           </a:ln>
@@ -7927,13 +7927,13 @@
             <a:r>
               <a:rPr lang="en-US" sz="1300" b="1" dirty="0">
                 <a:solidFill>
-                  <a:srgbClr val="0F766E"/>
+                  <a:srgbClr val="9D174D"/>
                 </a:solidFill>
                 <a:latin typeface="Trebuchet MS" pitchFamily="34" charset="0"/>
                 <a:ea typeface="Trebuchet MS" pitchFamily="34" charset="-122"/>
                 <a:cs typeface="Trebuchet MS" pitchFamily="34" charset="-120"/>
               </a:rPr>
-              <a:t>stick</a:t>
+              <a:t>y</a:t>
             </a:r>
             <a:endParaRPr lang="en-US" sz="1300" dirty="0"/>
           </a:p>
@@ -7972,7 +7972,7 @@
                 <a:ea typeface="Calibri" pitchFamily="34" charset="-122"/>
                 <a:cs typeface="Calibri" pitchFamily="34" charset="-120"/>
               </a:rPr>
-              <a:t>to adhere or cling</a:t>
+              <a:t>characterised by</a:t>
             </a:r>
             <a:endParaRPr lang="en-US" sz="850" dirty="0"/>
           </a:p>
@@ -8528,7 +8528,7 @@
                 <a:ea typeface="Calibri" pitchFamily="34" charset="-122"/>
                 <a:cs typeface="Calibri" pitchFamily="34" charset="-120"/>
               </a:rPr>
-              <a:t>Word Labs  •  wordlabs.app  •  Root: 'stick' = to adhere, fasten, or pierce</a:t>
+              <a:t>Word Labs  •  wordlabs.app  •  Root: 'stick' = a thin piece of wood; to attach</a:t>
             </a:r>
             <a:endParaRPr lang="en-US" sz="800" dirty="0"/>
           </a:p>
@@ -8667,7 +8667,7 @@
                 <a:ea typeface="Trebuchet MS" pitchFamily="34" charset="-122"/>
                 <a:cs typeface="Trebuchet MS" pitchFamily="34" charset="-120"/>
               </a:rPr>
-              <a:t>nonstick</a:t>
+              <a:t>sticky</a:t>
             </a:r>
             <a:endParaRPr lang="en-US" sz="2800" dirty="0"/>
           </a:p>
@@ -8756,11 +8756,11 @@
             </a:avLst>
           </a:prstGeom>
           <a:solidFill>
-            <a:srgbClr val="DDD6FE"/>
+            <a:srgbClr val="CCFBF1"/>
           </a:solidFill>
           <a:ln w="19050">
             <a:solidFill>
-              <a:srgbClr val="7C3AED"/>
+              <a:srgbClr val="0D9488"/>
             </a:solidFill>
             <a:prstDash val="solid"/>
           </a:ln>
@@ -8800,13 +8800,13 @@
             <a:r>
               <a:rPr lang="en-US" sz="1300" b="1" dirty="0">
                 <a:solidFill>
-                  <a:srgbClr val="4C1D95"/>
+                  <a:srgbClr val="0F766E"/>
                 </a:solidFill>
                 <a:latin typeface="Trebuchet MS" pitchFamily="34" charset="0"/>
                 <a:ea typeface="Trebuchet MS" pitchFamily="34" charset="-122"/>
                 <a:cs typeface="Trebuchet MS" pitchFamily="34" charset="-120"/>
               </a:rPr>
-              <a:t>non</a:t>
+              <a:t>stick</a:t>
             </a:r>
             <a:endParaRPr lang="en-US" sz="1300" dirty="0"/>
           </a:p>
@@ -8845,7 +8845,7 @@
                 <a:ea typeface="Calibri" pitchFamily="34" charset="-122"/>
                 <a:cs typeface="Calibri" pitchFamily="34" charset="-120"/>
               </a:rPr>
-              <a:t>not</a:t>
+              <a:t>a thin piece of wood; to attach</a:t>
             </a:r>
             <a:endParaRPr lang="en-US" sz="850" dirty="0"/>
           </a:p>
@@ -8868,11 +8868,11 @@
             </a:avLst>
           </a:prstGeom>
           <a:solidFill>
-            <a:srgbClr val="CCFBF1"/>
+            <a:srgbClr val="FCE7F3"/>
           </a:solidFill>
           <a:ln w="19050">
             <a:solidFill>
-              <a:srgbClr val="0D9488"/>
+              <a:srgbClr val="DB2777"/>
             </a:solidFill>
             <a:prstDash val="solid"/>
           </a:ln>
@@ -8912,13 +8912,13 @@
             <a:r>
               <a:rPr lang="en-US" sz="1300" b="1" dirty="0">
                 <a:solidFill>
-                  <a:srgbClr val="0F766E"/>
+                  <a:srgbClr val="9D174D"/>
                 </a:solidFill>
                 <a:latin typeface="Trebuchet MS" pitchFamily="34" charset="0"/>
                 <a:ea typeface="Trebuchet MS" pitchFamily="34" charset="-122"/>
                 <a:cs typeface="Trebuchet MS" pitchFamily="34" charset="-120"/>
               </a:rPr>
-              <a:t>stick</a:t>
+              <a:t>y</a:t>
             </a:r>
             <a:endParaRPr lang="en-US" sz="1300" dirty="0"/>
           </a:p>
@@ -8957,7 +8957,7 @@
                 <a:ea typeface="Calibri" pitchFamily="34" charset="-122"/>
                 <a:cs typeface="Calibri" pitchFamily="34" charset="-120"/>
               </a:rPr>
-              <a:t>to adhere or cling</a:t>
+              <a:t>characterised by</a:t>
             </a:r>
             <a:endParaRPr lang="en-US" sz="850" dirty="0"/>
           </a:p>
@@ -9116,7 +9116,7 @@
                 <a:ea typeface="Trebuchet MS" pitchFamily="34" charset="-122"/>
                 <a:cs typeface="Trebuchet MS" pitchFamily="34" charset="-120"/>
               </a:rPr>
-              <a:t>non</a:t>
+              <a:t>stick</a:t>
             </a:r>
             <a:endParaRPr lang="en-US" sz="1400" dirty="0"/>
           </a:p>
@@ -9221,7 +9221,7 @@
                 <a:ea typeface="Trebuchet MS" pitchFamily="34" charset="-122"/>
                 <a:cs typeface="Trebuchet MS" pitchFamily="34" charset="-120"/>
               </a:rPr>
-              <a:t>stick</a:t>
+              <a:t>y</a:t>
             </a:r>
             <a:endParaRPr lang="en-US" sz="1400" dirty="0"/>
           </a:p>
@@ -9645,7 +9645,7 @@
                 <a:ea typeface="Calibri" pitchFamily="34" charset="-122"/>
                 <a:cs typeface="Calibri" pitchFamily="34" charset="-120"/>
               </a:rPr>
-              <a:t>Word Labs  •  wordlabs.app  •  Root: 'stick' = to adhere, fasten, or pierce</a:t>
+              <a:t>Word Labs  •  wordlabs.app  •  Root: 'stick' = a thin piece of wood; to attach</a:t>
             </a:r>
             <a:endParaRPr lang="en-US" sz="800" dirty="0"/>
           </a:p>
@@ -9784,7 +9784,7 @@
                 <a:ea typeface="Trebuchet MS" pitchFamily="34" charset="-122"/>
                 <a:cs typeface="Trebuchet MS" pitchFamily="34" charset="-120"/>
               </a:rPr>
-              <a:t>nonstick</a:t>
+              <a:t>sticky</a:t>
             </a:r>
             <a:endParaRPr lang="en-US" sz="2800" dirty="0"/>
           </a:p>
@@ -9873,11 +9873,11 @@
             </a:avLst>
           </a:prstGeom>
           <a:solidFill>
-            <a:srgbClr val="DDD6FE"/>
+            <a:srgbClr val="CCFBF1"/>
           </a:solidFill>
           <a:ln w="19050">
             <a:solidFill>
-              <a:srgbClr val="7C3AED"/>
+              <a:srgbClr val="0D9488"/>
             </a:solidFill>
             <a:prstDash val="solid"/>
           </a:ln>
@@ -9917,13 +9917,13 @@
             <a:r>
               <a:rPr lang="en-US" sz="1300" b="1" dirty="0">
                 <a:solidFill>
-                  <a:srgbClr val="4C1D95"/>
+                  <a:srgbClr val="0F766E"/>
                 </a:solidFill>
                 <a:latin typeface="Trebuchet MS" pitchFamily="34" charset="0"/>
                 <a:ea typeface="Trebuchet MS" pitchFamily="34" charset="-122"/>
                 <a:cs typeface="Trebuchet MS" pitchFamily="34" charset="-120"/>
               </a:rPr>
-              <a:t>non</a:t>
+              <a:t>stick</a:t>
             </a:r>
             <a:endParaRPr lang="en-US" sz="1300" dirty="0"/>
           </a:p>
@@ -9962,7 +9962,7 @@
                 <a:ea typeface="Calibri" pitchFamily="34" charset="-122"/>
                 <a:cs typeface="Calibri" pitchFamily="34" charset="-120"/>
               </a:rPr>
-              <a:t>not</a:t>
+              <a:t>a thin piece of wood; to attach</a:t>
             </a:r>
             <a:endParaRPr lang="en-US" sz="850" dirty="0"/>
           </a:p>
@@ -9985,11 +9985,11 @@
             </a:avLst>
           </a:prstGeom>
           <a:solidFill>
-            <a:srgbClr val="CCFBF1"/>
+            <a:srgbClr val="FCE7F3"/>
           </a:solidFill>
           <a:ln w="19050">
             <a:solidFill>
-              <a:srgbClr val="0D9488"/>
+              <a:srgbClr val="DB2777"/>
             </a:solidFill>
             <a:prstDash val="solid"/>
           </a:ln>
@@ -10029,13 +10029,13 @@
             <a:r>
               <a:rPr lang="en-US" sz="1300" b="1" dirty="0">
                 <a:solidFill>
-                  <a:srgbClr val="0F766E"/>
+                  <a:srgbClr val="9D174D"/>
                 </a:solidFill>
                 <a:latin typeface="Trebuchet MS" pitchFamily="34" charset="0"/>
                 <a:ea typeface="Trebuchet MS" pitchFamily="34" charset="-122"/>
                 <a:cs typeface="Trebuchet MS" pitchFamily="34" charset="-120"/>
               </a:rPr>
-              <a:t>stick</a:t>
+              <a:t>y</a:t>
             </a:r>
             <a:endParaRPr lang="en-US" sz="1300" dirty="0"/>
           </a:p>
@@ -10074,7 +10074,7 @@
                 <a:ea typeface="Calibri" pitchFamily="34" charset="-122"/>
                 <a:cs typeface="Calibri" pitchFamily="34" charset="-120"/>
               </a:rPr>
-              <a:t>to adhere or cling</a:t>
+              <a:t>characterised by</a:t>
             </a:r>
             <a:endParaRPr lang="en-US" sz="850" dirty="0"/>
           </a:p>
@@ -10233,7 +10233,7 @@
                 <a:ea typeface="Trebuchet MS" pitchFamily="34" charset="-122"/>
                 <a:cs typeface="Trebuchet MS" pitchFamily="34" charset="-120"/>
               </a:rPr>
-              <a:t>non</a:t>
+              <a:t>stick</a:t>
             </a:r>
             <a:endParaRPr lang="en-US" sz="1400" dirty="0"/>
           </a:p>
@@ -10338,7 +10338,7 @@
                 <a:ea typeface="Trebuchet MS" pitchFamily="34" charset="-122"/>
                 <a:cs typeface="Trebuchet MS" pitchFamily="34" charset="-120"/>
               </a:rPr>
-              <a:t>stick</a:t>
+              <a:t>y</a:t>
             </a:r>
             <a:endParaRPr lang="en-US" sz="1400" dirty="0"/>
           </a:p>
@@ -10445,7 +10445,7 @@
         </p:nvSpPr>
         <p:spPr>
           <a:xfrm>
-            <a:off x="2124837" y="4169664"/>
+            <a:off x="2427732" y="4169664"/>
             <a:ext cx="685800" cy="475488"/>
           </a:xfrm>
           <a:prstGeom prst="rect">
@@ -10472,7 +10472,7 @@
         </p:nvSpPr>
         <p:spPr>
           <a:xfrm>
-            <a:off x="2124837" y="4169664"/>
+            <a:off x="2427732" y="4169664"/>
             <a:ext cx="685800" cy="475488"/>
           </a:xfrm>
           <a:prstGeom prst="rect">
@@ -10497,7 +10497,7 @@
                 <a:ea typeface="Trebuchet MS" pitchFamily="34" charset="-122"/>
                 <a:cs typeface="Trebuchet MS" pitchFamily="34" charset="-120"/>
               </a:rPr>
-              <a:t>n</a:t>
+              <a:t>s</a:t>
             </a:r>
             <a:endParaRPr lang="en-US" sz="900" dirty="0"/>
           </a:p>
@@ -10511,7 +10511,7 @@
         </p:nvSpPr>
         <p:spPr>
           <a:xfrm>
-            <a:off x="3033522" y="4169664"/>
+            <a:off x="3639312" y="4169664"/>
             <a:ext cx="685800" cy="475488"/>
           </a:xfrm>
           <a:prstGeom prst="rect">
@@ -10538,7 +10538,7 @@
         </p:nvSpPr>
         <p:spPr>
           <a:xfrm>
-            <a:off x="3033522" y="4169664"/>
+            <a:off x="3639312" y="4169664"/>
             <a:ext cx="685800" cy="475488"/>
           </a:xfrm>
           <a:prstGeom prst="rect">
@@ -10563,7 +10563,7 @@
                 <a:ea typeface="Trebuchet MS" pitchFamily="34" charset="-122"/>
                 <a:cs typeface="Trebuchet MS" pitchFamily="34" charset="-120"/>
               </a:rPr>
-              <a:t>o</a:t>
+              <a:t>t</a:t>
             </a:r>
             <a:endParaRPr lang="en-US" sz="900" dirty="0"/>
           </a:p>
@@ -10577,7 +10577,7 @@
         </p:nvSpPr>
         <p:spPr>
           <a:xfrm>
-            <a:off x="3942207" y="4169664"/>
+            <a:off x="4850892" y="4169664"/>
             <a:ext cx="685800" cy="475488"/>
           </a:xfrm>
           <a:prstGeom prst="rect">
@@ -10604,7 +10604,7 @@
         </p:nvSpPr>
         <p:spPr>
           <a:xfrm>
-            <a:off x="3942207" y="4169664"/>
+            <a:off x="4850892" y="4169664"/>
             <a:ext cx="685800" cy="475488"/>
           </a:xfrm>
           <a:prstGeom prst="rect">
@@ -10629,7 +10629,7 @@
                 <a:ea typeface="Trebuchet MS" pitchFamily="34" charset="-122"/>
                 <a:cs typeface="Trebuchet MS" pitchFamily="34" charset="-120"/>
               </a:rPr>
-              <a:t>n</a:t>
+              <a:t>i</a:t>
             </a:r>
             <a:endParaRPr lang="en-US" sz="900" dirty="0"/>
           </a:p>
@@ -10643,7 +10643,7 @@
         </p:nvSpPr>
         <p:spPr>
           <a:xfrm>
-            <a:off x="4850892" y="4169664"/>
+            <a:off x="6062472" y="4169664"/>
             <a:ext cx="685800" cy="475488"/>
           </a:xfrm>
           <a:prstGeom prst="rect">
@@ -10670,7 +10670,7 @@
         </p:nvSpPr>
         <p:spPr>
           <a:xfrm>
-            <a:off x="4850892" y="4169664"/>
+            <a:off x="6062472" y="4169664"/>
             <a:ext cx="685800" cy="475488"/>
           </a:xfrm>
           <a:prstGeom prst="rect">
@@ -10695,7 +10695,7 @@
                 <a:ea typeface="Trebuchet MS" pitchFamily="34" charset="-122"/>
                 <a:cs typeface="Trebuchet MS" pitchFamily="34" charset="-120"/>
               </a:rPr>
-              <a:t>s</a:t>
+              <a:t>ck</a:t>
             </a:r>
             <a:endParaRPr lang="en-US" sz="900" dirty="0"/>
           </a:p>
@@ -10709,7 +10709,7 @@
         </p:nvSpPr>
         <p:spPr>
           <a:xfrm>
-            <a:off x="5759577" y="4169664"/>
+            <a:off x="7274052" y="4169664"/>
             <a:ext cx="685800" cy="475488"/>
           </a:xfrm>
           <a:prstGeom prst="rect">
@@ -10736,7 +10736,7 @@
         </p:nvSpPr>
         <p:spPr>
           <a:xfrm>
-            <a:off x="5759577" y="4169664"/>
+            <a:off x="7274052" y="4169664"/>
             <a:ext cx="685800" cy="475488"/>
           </a:xfrm>
           <a:prstGeom prst="rect">
@@ -10761,139 +10761,7 @@
                 <a:ea typeface="Trebuchet MS" pitchFamily="34" charset="-122"/>
                 <a:cs typeface="Trebuchet MS" pitchFamily="34" charset="-120"/>
               </a:rPr>
-              <a:t>t</a:t>
-            </a:r>
-            <a:endParaRPr lang="en-US" sz="900" dirty="0"/>
-          </a:p>
-        </p:txBody>
-      </p:sp>
-      <p:sp>
-        <p:nvSpPr>
-          <p:cNvPr id="43" name="Shape 41"/>
-          <p:cNvSpPr/>
-          <p:nvPr/>
-        </p:nvSpPr>
-        <p:spPr>
-          <a:xfrm>
-            <a:off x="6668262" y="4169664"/>
-            <a:ext cx="685800" cy="475488"/>
-          </a:xfrm>
-          <a:prstGeom prst="rect">
-            <a:avLst>
-              <a:gd name="adj" fmla="val 7692"/>
-            </a:avLst>
-          </a:prstGeom>
-          <a:solidFill>
-            <a:srgbClr val="FFFFFF"/>
-          </a:solidFill>
-          <a:ln w="12700">
-            <a:solidFill>
-              <a:srgbClr val="DB2777"/>
-            </a:solidFill>
-            <a:prstDash val="solid"/>
-          </a:ln>
-        </p:spPr>
-      </p:sp>
-      <p:sp>
-        <p:nvSpPr>
-          <p:cNvPr id="44" name="Text 42"/>
-          <p:cNvSpPr/>
-          <p:nvPr/>
-        </p:nvSpPr>
-        <p:spPr>
-          <a:xfrm>
-            <a:off x="6668262" y="4169664"/>
-            <a:ext cx="685800" cy="475488"/>
-          </a:xfrm>
-          <a:prstGeom prst="rect">
-            <a:avLst/>
-          </a:prstGeom>
-          <a:noFill/>
-          <a:ln/>
-        </p:spPr>
-        <p:txBody>
-          <a:bodyPr wrap="square" lIns="0" tIns="0" rIns="0" bIns="0" rtlCol="0" anchor="ctr"/>
-          <a:lstStyle/>
-          <a:p>
-            <a:pPr algn="ctr" indent="0" marL="0">
-              <a:buNone/>
-            </a:pPr>
-            <a:r>
-              <a:rPr lang="en-US" sz="900" b="1" dirty="0">
-                <a:solidFill>
-                  <a:srgbClr val="9D174D"/>
-                </a:solidFill>
-                <a:latin typeface="Trebuchet MS" pitchFamily="34" charset="0"/>
-                <a:ea typeface="Trebuchet MS" pitchFamily="34" charset="-122"/>
-                <a:cs typeface="Trebuchet MS" pitchFamily="34" charset="-120"/>
-              </a:rPr>
-              <a:t>i</a:t>
-            </a:r>
-            <a:endParaRPr lang="en-US" sz="900" dirty="0"/>
-          </a:p>
-        </p:txBody>
-      </p:sp>
-      <p:sp>
-        <p:nvSpPr>
-          <p:cNvPr id="45" name="Shape 43"/>
-          <p:cNvSpPr/>
-          <p:nvPr/>
-        </p:nvSpPr>
-        <p:spPr>
-          <a:xfrm>
-            <a:off x="7576947" y="4169664"/>
-            <a:ext cx="685800" cy="475488"/>
-          </a:xfrm>
-          <a:prstGeom prst="rect">
-            <a:avLst>
-              <a:gd name="adj" fmla="val 7692"/>
-            </a:avLst>
-          </a:prstGeom>
-          <a:solidFill>
-            <a:srgbClr val="FFFFFF"/>
-          </a:solidFill>
-          <a:ln w="12700">
-            <a:solidFill>
-              <a:srgbClr val="DB2777"/>
-            </a:solidFill>
-            <a:prstDash val="solid"/>
-          </a:ln>
-        </p:spPr>
-      </p:sp>
-      <p:sp>
-        <p:nvSpPr>
-          <p:cNvPr id="46" name="Text 44"/>
-          <p:cNvSpPr/>
-          <p:nvPr/>
-        </p:nvSpPr>
-        <p:spPr>
-          <a:xfrm>
-            <a:off x="7576947" y="4169664"/>
-            <a:ext cx="685800" cy="475488"/>
-          </a:xfrm>
-          <a:prstGeom prst="rect">
-            <a:avLst/>
-          </a:prstGeom>
-          <a:noFill/>
-          <a:ln/>
-        </p:spPr>
-        <p:txBody>
-          <a:bodyPr wrap="square" lIns="0" tIns="0" rIns="0" bIns="0" rtlCol="0" anchor="ctr"/>
-          <a:lstStyle/>
-          <a:p>
-            <a:pPr algn="ctr" indent="0" marL="0">
-              <a:buNone/>
-            </a:pPr>
-            <a:r>
-              <a:rPr lang="en-US" sz="900" b="1" dirty="0">
-                <a:solidFill>
-                  <a:srgbClr val="9D174D"/>
-                </a:solidFill>
-                <a:latin typeface="Trebuchet MS" pitchFamily="34" charset="0"/>
-                <a:ea typeface="Trebuchet MS" pitchFamily="34" charset="-122"/>
-                <a:cs typeface="Trebuchet MS" pitchFamily="34" charset="-120"/>
-              </a:rPr>
-              <a:t>ck</a:t>
+              <a:t>y</a:t>
             </a:r>
             <a:endParaRPr lang="en-US" sz="900" dirty="0"/>
           </a:p>
@@ -11185,7 +11053,7 @@
                 <a:ea typeface="Calibri" pitchFamily="34" charset="-122"/>
                 <a:cs typeface="Calibri" pitchFamily="34" charset="-120"/>
               </a:rPr>
-              <a:t>Word Labs  •  wordlabs.app  •  Root: 'stick' = to adhere, fasten, or pierce</a:t>
+              <a:t>Word Labs  •  wordlabs.app  •  Root: 'stick' = a thin piece of wood; to attach</a:t>
             </a:r>
             <a:endParaRPr lang="en-US" sz="800" dirty="0"/>
           </a:p>
@@ -12012,7 +11880,7 @@
                 <a:ea typeface="Calibri" pitchFamily="34" charset="-122"/>
                 <a:cs typeface="Calibri" pitchFamily="34" charset="-120"/>
               </a:rPr>
-              <a:t>Word Labs  •  wordlabs.app  •  Root: 'stick' = to adhere, fasten, or pierce</a:t>
+              <a:t>Word Labs  •  wordlabs.app  •  Root: 'stick' = a thin piece of wood; to attach</a:t>
             </a:r>
             <a:endParaRPr lang="en-US" sz="800" dirty="0"/>
           </a:p>
@@ -12329,7 +12197,7 @@
                 <a:ea typeface="Calibri" pitchFamily="34" charset="-122"/>
                 <a:cs typeface="Calibri" pitchFamily="34" charset="-120"/>
               </a:rPr>
-              <a:t>to adhere or cling</a:t>
+              <a:t>a thin piece of wood; to attach</a:t>
             </a:r>
             <a:endParaRPr lang="en-US" sz="850" dirty="0"/>
           </a:p>
@@ -12441,7 +12309,7 @@
                 <a:ea typeface="Calibri" pitchFamily="34" charset="-122"/>
                 <a:cs typeface="Calibri" pitchFamily="34" charset="-120"/>
               </a:rPr>
-              <a:t>one who or that which does</a:t>
+              <a:t>person who; more</a:t>
             </a:r>
             <a:endParaRPr lang="en-US" sz="850" dirty="0"/>
           </a:p>
@@ -12997,7 +12865,7 @@
                 <a:ea typeface="Calibri" pitchFamily="34" charset="-122"/>
                 <a:cs typeface="Calibri" pitchFamily="34" charset="-120"/>
               </a:rPr>
-              <a:t>Word Labs  •  wordlabs.app  •  Root: 'stick' = to adhere, fasten, or pierce</a:t>
+              <a:t>Word Labs  •  wordlabs.app  •  Root: 'stick' = a thin piece of wood; to attach</a:t>
             </a:r>
             <a:endParaRPr lang="en-US" sz="800" dirty="0"/>
           </a:p>
@@ -13314,7 +13182,7 @@
                 <a:ea typeface="Calibri" pitchFamily="34" charset="-122"/>
                 <a:cs typeface="Calibri" pitchFamily="34" charset="-120"/>
               </a:rPr>
-              <a:t>to adhere or cling</a:t>
+              <a:t>a thin piece of wood; to attach</a:t>
             </a:r>
             <a:endParaRPr lang="en-US" sz="850" dirty="0"/>
           </a:p>
@@ -13426,7 +13294,7 @@
                 <a:ea typeface="Calibri" pitchFamily="34" charset="-122"/>
                 <a:cs typeface="Calibri" pitchFamily="34" charset="-120"/>
               </a:rPr>
-              <a:t>one who or that which does</a:t>
+              <a:t>person who; more</a:t>
             </a:r>
             <a:endParaRPr lang="en-US" sz="850" dirty="0"/>
           </a:p>
@@ -14023,7 +13891,7 @@
                 <a:ea typeface="Calibri" pitchFamily="34" charset="-122"/>
                 <a:cs typeface="Calibri" pitchFamily="34" charset="-120"/>
               </a:rPr>
-              <a:t>Root 'stick' — to adhere, fasten, or pierce</a:t>
+              <a:t>Root 'stick' — a thin piece of wood; to attach</a:t>
             </a:r>
             <a:endParaRPr lang="en-US" sz="1600" dirty="0"/>
           </a:p>
@@ -14379,7 +14247,7 @@
                 <a:ea typeface="Calibri" pitchFamily="34" charset="-122"/>
                 <a:cs typeface="Calibri" pitchFamily="34" charset="-120"/>
               </a:rPr>
-              <a:t>Word Labs  •  wordlabs.app  •  Root: 'stick' = to adhere, fasten, or pierce</a:t>
+              <a:t>Word Labs  •  wordlabs.app  •  Root: 'stick' = a thin piece of wood; to attach</a:t>
             </a:r>
             <a:endParaRPr lang="en-US" sz="800" dirty="0"/>
           </a:p>
@@ -14696,7 +14564,7 @@
                 <a:ea typeface="Calibri" pitchFamily="34" charset="-122"/>
                 <a:cs typeface="Calibri" pitchFamily="34" charset="-120"/>
               </a:rPr>
-              <a:t>to adhere or cling</a:t>
+              <a:t>a thin piece of wood; to attach</a:t>
             </a:r>
             <a:endParaRPr lang="en-US" sz="850" dirty="0"/>
           </a:p>
@@ -14808,7 +14676,7 @@
                 <a:ea typeface="Calibri" pitchFamily="34" charset="-122"/>
                 <a:cs typeface="Calibri" pitchFamily="34" charset="-120"/>
               </a:rPr>
-              <a:t>one who or that which does</a:t>
+              <a:t>person who; more</a:t>
             </a:r>
             <a:endParaRPr lang="en-US" sz="850" dirty="0"/>
           </a:p>
@@ -16069,7 +15937,7 @@
                 <a:ea typeface="Calibri" pitchFamily="34" charset="-122"/>
                 <a:cs typeface="Calibri" pitchFamily="34" charset="-120"/>
               </a:rPr>
-              <a:t>Word Labs  •  wordlabs.app  •  Root: 'stick' = to adhere, fasten, or pierce</a:t>
+              <a:t>Word Labs  •  wordlabs.app  •  Root: 'stick' = a thin piece of wood; to attach</a:t>
             </a:r>
             <a:endParaRPr lang="en-US" sz="800" dirty="0"/>
           </a:p>
@@ -16403,7 +16271,7 @@
                 <a:ea typeface="Trebuchet MS" pitchFamily="34" charset="-122"/>
                 <a:cs typeface="Trebuchet MS" pitchFamily="34" charset="-120"/>
               </a:rPr>
-              <a:t>1</a:t>
+              <a:t>0</a:t>
             </a:r>
             <a:pPr algn="ctr" indent="0" marL="0">
               <a:buNone/>
@@ -16709,7 +16577,7 @@
                 <a:ea typeface="Calibri" pitchFamily="34" charset="-122"/>
                 <a:cs typeface="Calibri" pitchFamily="34" charset="-120"/>
               </a:rPr>
-              <a:t>Word Labs  •  wordlabs.app  •  Root: 'stick' = to adhere, fasten, or pierce</a:t>
+              <a:t>Word Labs  •  wordlabs.app  •  Root: 'stick' = a thin piece of wood; to attach</a:t>
             </a:r>
             <a:endParaRPr lang="en-US" sz="800" dirty="0"/>
           </a:p>
@@ -16821,7 +16689,7 @@
                 <a:ea typeface="Calibri" pitchFamily="34" charset="-122"/>
                 <a:cs typeface="Calibri" pitchFamily="34" charset="-120"/>
               </a:rPr>
-              <a:t>Mia used a </a:t>
+              <a:t>We fried the eggs in a </a:t>
             </a:r>
             <a:pPr algn="l" indent="0" marL="0">
               <a:buNone/>
@@ -16838,7 +16706,7 @@
                 <a:ea typeface="Calibri" pitchFamily="34" charset="-122"/>
                 <a:cs typeface="Calibri" pitchFamily="34" charset="-120"/>
               </a:rPr>
-              <a:t>drumstick</a:t>
+              <a:t>nonstick</a:t>
             </a:r>
             <a:pPr algn="l" indent="0" marL="0">
               <a:buNone/>
@@ -16852,7 +16720,7 @@
                 <a:ea typeface="Calibri" pitchFamily="34" charset="-122"/>
                 <a:cs typeface="Calibri" pitchFamily="34" charset="-120"/>
               </a:rPr>
-              <a:t> to tap the beat, while the </a:t>
+              <a:t> pan. She collects </a:t>
             </a:r>
             <a:pPr algn="l" indent="0" marL="0">
               <a:buNone/>
@@ -16869,7 +16737,7 @@
                 <a:ea typeface="Calibri" pitchFamily="34" charset="-122"/>
                 <a:cs typeface="Calibri" pitchFamily="34" charset="-120"/>
               </a:rPr>
-              <a:t>sticky</a:t>
+              <a:t>stickers</a:t>
             </a:r>
             <a:pPr algn="l" indent="0" marL="0">
               <a:buNone/>
@@ -16883,7 +16751,7 @@
                 <a:ea typeface="Calibri" pitchFamily="34" charset="-122"/>
                 <a:cs typeface="Calibri" pitchFamily="34" charset="-120"/>
               </a:rPr>
-              <a:t> toffee left a mess on the </a:t>
+              <a:t> from every country she visits. He was </a:t>
             </a:r>
             <a:pPr algn="l" indent="0" marL="0">
               <a:buNone/>
@@ -16900,7 +16768,7 @@
                 <a:ea typeface="Calibri" pitchFamily="34" charset="-122"/>
                 <a:cs typeface="Calibri" pitchFamily="34" charset="-120"/>
               </a:rPr>
-              <a:t>chopstick</a:t>
+              <a:t>sticking</a:t>
             </a:r>
             <a:pPr algn="l" indent="0" marL="0">
               <a:buNone/>
@@ -16914,7 +16782,7 @@
                 <a:ea typeface="Calibri" pitchFamily="34" charset="-122"/>
                 <a:cs typeface="Calibri" pitchFamily="34" charset="-120"/>
               </a:rPr>
-              <a:t> she had borrowed.</a:t>
+              <a:t> the pictures into his scrapbook.</a:t>
             </a:r>
             <a:endParaRPr lang="en-US" sz="1800" dirty="0"/>
           </a:p>
@@ -17069,7 +16937,7 @@
                 <a:ea typeface="Trebuchet MS" pitchFamily="34" charset="-122"/>
                 <a:cs typeface="Trebuchet MS" pitchFamily="34" charset="-120"/>
               </a:rPr>
-              <a:t>drumstick</a:t>
+              <a:t>nonstick</a:t>
             </a:r>
             <a:endParaRPr lang="en-US" sz="1400" dirty="0"/>
           </a:p>
@@ -17197,7 +17065,7 @@
                 <a:ea typeface="Trebuchet MS" pitchFamily="34" charset="-122"/>
                 <a:cs typeface="Trebuchet MS" pitchFamily="34" charset="-120"/>
               </a:rPr>
-              <a:t>sticky</a:t>
+              <a:t>stickers</a:t>
             </a:r>
             <a:endParaRPr lang="en-US" sz="1400" dirty="0"/>
           </a:p>
@@ -17325,7 +17193,7 @@
                 <a:ea typeface="Trebuchet MS" pitchFamily="34" charset="-122"/>
                 <a:cs typeface="Trebuchet MS" pitchFamily="34" charset="-120"/>
               </a:rPr>
-              <a:t>chopstick</a:t>
+              <a:t>sticking</a:t>
             </a:r>
             <a:endParaRPr lang="en-US" sz="1400" dirty="0"/>
           </a:p>
@@ -17656,7 +17524,7 @@
                 <a:ea typeface="Calibri" pitchFamily="34" charset="-122"/>
                 <a:cs typeface="Calibri" pitchFamily="34" charset="-120"/>
               </a:rPr>
-              <a:t>Word Labs  •  wordlabs.app  •  Root: 'stick' = to adhere, fasten, or pierce</a:t>
+              <a:t>Word Labs  •  wordlabs.app  •  Root: 'stick' = a thin piece of wood; to attach</a:t>
             </a:r>
             <a:endParaRPr lang="en-US" sz="800" dirty="0"/>
           </a:p>
@@ -17795,7 +17663,7 @@
                 <a:ea typeface="Trebuchet MS" pitchFamily="34" charset="-122"/>
                 <a:cs typeface="Trebuchet MS" pitchFamily="34" charset="-120"/>
               </a:rPr>
-              <a:t>drumstick</a:t>
+              <a:t>nonstick</a:t>
             </a:r>
             <a:endParaRPr lang="en-US" sz="2800" dirty="0"/>
           </a:p>
@@ -18483,7 +18351,7 @@
                 <a:ea typeface="Calibri" pitchFamily="34" charset="-122"/>
                 <a:cs typeface="Calibri" pitchFamily="34" charset="-120"/>
               </a:rPr>
-              <a:t>Word Labs  •  wordlabs.app  •  Root: 'stick' = to adhere, fasten, or pierce</a:t>
+              <a:t>Word Labs  •  wordlabs.app  •  Root: 'stick' = a thin piece of wood; to attach</a:t>
             </a:r>
             <a:endParaRPr lang="en-US" sz="800" dirty="0"/>
           </a:p>
@@ -18622,7 +18490,7 @@
                 <a:ea typeface="Trebuchet MS" pitchFamily="34" charset="-122"/>
                 <a:cs typeface="Trebuchet MS" pitchFamily="34" charset="-120"/>
               </a:rPr>
-              <a:t>drumstick</a:t>
+              <a:t>nonstick</a:t>
             </a:r>
             <a:endParaRPr lang="en-US" sz="2800" dirty="0"/>
           </a:p>
@@ -18761,7 +18629,7 @@
                 <a:ea typeface="Trebuchet MS" pitchFamily="34" charset="-122"/>
                 <a:cs typeface="Trebuchet MS" pitchFamily="34" charset="-120"/>
               </a:rPr>
-              <a:t>drum</a:t>
+              <a:t>non</a:t>
             </a:r>
             <a:endParaRPr lang="en-US" sz="1300" dirty="0"/>
           </a:p>
@@ -18800,7 +18668,7 @@
                 <a:ea typeface="Calibri" pitchFamily="34" charset="-122"/>
                 <a:cs typeface="Calibri" pitchFamily="34" charset="-120"/>
               </a:rPr>
-              <a:t>a percussion instrument</a:t>
+              <a:t>not</a:t>
             </a:r>
             <a:endParaRPr lang="en-US" sz="850" dirty="0"/>
           </a:p>
@@ -18912,7 +18780,7 @@
                 <a:ea typeface="Calibri" pitchFamily="34" charset="-122"/>
                 <a:cs typeface="Calibri" pitchFamily="34" charset="-120"/>
               </a:rPr>
-              <a:t>a thin rod or something that pierces</a:t>
+              <a:t>a thin piece of wood; to attach</a:t>
             </a:r>
             <a:endParaRPr lang="en-US" sz="850" dirty="0"/>
           </a:p>
@@ -19468,7 +19336,7 @@
                 <a:ea typeface="Calibri" pitchFamily="34" charset="-122"/>
                 <a:cs typeface="Calibri" pitchFamily="34" charset="-120"/>
               </a:rPr>
-              <a:t>Word Labs  •  wordlabs.app  •  Root: 'stick' = to adhere, fasten, or pierce</a:t>
+              <a:t>Word Labs  •  wordlabs.app  •  Root: 'stick' = a thin piece of wood; to attach</a:t>
             </a:r>
             <a:endParaRPr lang="en-US" sz="800" dirty="0"/>
           </a:p>
@@ -19607,7 +19475,7 @@
                 <a:ea typeface="Trebuchet MS" pitchFamily="34" charset="-122"/>
                 <a:cs typeface="Trebuchet MS" pitchFamily="34" charset="-120"/>
               </a:rPr>
-              <a:t>drumstick</a:t>
+              <a:t>nonstick</a:t>
             </a:r>
             <a:endParaRPr lang="en-US" sz="2800" dirty="0"/>
           </a:p>
@@ -19746,7 +19614,7 @@
                 <a:ea typeface="Trebuchet MS" pitchFamily="34" charset="-122"/>
                 <a:cs typeface="Trebuchet MS" pitchFamily="34" charset="-120"/>
               </a:rPr>
-              <a:t>drum</a:t>
+              <a:t>non</a:t>
             </a:r>
             <a:endParaRPr lang="en-US" sz="1300" dirty="0"/>
           </a:p>
@@ -19785,7 +19653,7 @@
                 <a:ea typeface="Calibri" pitchFamily="34" charset="-122"/>
                 <a:cs typeface="Calibri" pitchFamily="34" charset="-120"/>
               </a:rPr>
-              <a:t>a percussion instrument</a:t>
+              <a:t>not</a:t>
             </a:r>
             <a:endParaRPr lang="en-US" sz="850" dirty="0"/>
           </a:p>
@@ -19897,7 +19765,7 @@
                 <a:ea typeface="Calibri" pitchFamily="34" charset="-122"/>
                 <a:cs typeface="Calibri" pitchFamily="34" charset="-120"/>
               </a:rPr>
-              <a:t>a thin rod or something that pierces</a:t>
+              <a:t>a thin piece of wood; to attach</a:t>
             </a:r>
             <a:endParaRPr lang="en-US" sz="850" dirty="0"/>
           </a:p>
@@ -20056,7 +19924,7 @@
                 <a:ea typeface="Trebuchet MS" pitchFamily="34" charset="-122"/>
                 <a:cs typeface="Trebuchet MS" pitchFamily="34" charset="-120"/>
               </a:rPr>
-              <a:t>drum</a:t>
+              <a:t>non</a:t>
             </a:r>
             <a:endParaRPr lang="en-US" sz="1400" dirty="0"/>
           </a:p>
@@ -20585,7 +20453,7 @@
                 <a:ea typeface="Calibri" pitchFamily="34" charset="-122"/>
                 <a:cs typeface="Calibri" pitchFamily="34" charset="-120"/>
               </a:rPr>
-              <a:t>Word Labs  •  wordlabs.app  •  Root: 'stick' = to adhere, fasten, or pierce</a:t>
+              <a:t>Word Labs  •  wordlabs.app  •  Root: 'stick' = a thin piece of wood; to attach</a:t>
             </a:r>
             <a:endParaRPr lang="en-US" sz="800" dirty="0"/>
           </a:p>
@@ -20724,7 +20592,7 @@
                 <a:ea typeface="Trebuchet MS" pitchFamily="34" charset="-122"/>
                 <a:cs typeface="Trebuchet MS" pitchFamily="34" charset="-120"/>
               </a:rPr>
-              <a:t>drumstick</a:t>
+              <a:t>nonstick</a:t>
             </a:r>
             <a:endParaRPr lang="en-US" sz="2800" dirty="0"/>
           </a:p>
@@ -20863,7 +20731,7 @@
                 <a:ea typeface="Trebuchet MS" pitchFamily="34" charset="-122"/>
                 <a:cs typeface="Trebuchet MS" pitchFamily="34" charset="-120"/>
               </a:rPr>
-              <a:t>drum</a:t>
+              <a:t>non</a:t>
             </a:r>
             <a:endParaRPr lang="en-US" sz="1300" dirty="0"/>
           </a:p>
@@ -20902,7 +20770,7 @@
                 <a:ea typeface="Calibri" pitchFamily="34" charset="-122"/>
                 <a:cs typeface="Calibri" pitchFamily="34" charset="-120"/>
               </a:rPr>
-              <a:t>a percussion instrument</a:t>
+              <a:t>not</a:t>
             </a:r>
             <a:endParaRPr lang="en-US" sz="850" dirty="0"/>
           </a:p>
@@ -21014,7 +20882,7 @@
                 <a:ea typeface="Calibri" pitchFamily="34" charset="-122"/>
                 <a:cs typeface="Calibri" pitchFamily="34" charset="-120"/>
               </a:rPr>
-              <a:t>a thin rod or something that pierces</a:t>
+              <a:t>a thin piece of wood; to attach</a:t>
             </a:r>
             <a:endParaRPr lang="en-US" sz="850" dirty="0"/>
           </a:p>
@@ -21173,7 +21041,7 @@
                 <a:ea typeface="Trebuchet MS" pitchFamily="34" charset="-122"/>
                 <a:cs typeface="Trebuchet MS" pitchFamily="34" charset="-120"/>
               </a:rPr>
-              <a:t>drum</a:t>
+              <a:t>non</a:t>
             </a:r>
             <a:endParaRPr lang="en-US" sz="1400" dirty="0"/>
           </a:p>
@@ -21385,7 +21253,7 @@
         </p:nvSpPr>
         <p:spPr>
           <a:xfrm>
-            <a:off x="2023872" y="4169664"/>
+            <a:off x="2124837" y="4169664"/>
             <a:ext cx="685800" cy="475488"/>
           </a:xfrm>
           <a:prstGeom prst="rect">
@@ -21412,7 +21280,7 @@
         </p:nvSpPr>
         <p:spPr>
           <a:xfrm>
-            <a:off x="2023872" y="4169664"/>
+            <a:off x="2124837" y="4169664"/>
             <a:ext cx="685800" cy="475488"/>
           </a:xfrm>
           <a:prstGeom prst="rect">
@@ -21437,7 +21305,7 @@
                 <a:ea typeface="Trebuchet MS" pitchFamily="34" charset="-122"/>
                 <a:cs typeface="Trebuchet MS" pitchFamily="34" charset="-120"/>
               </a:rPr>
-              <a:t>d</a:t>
+              <a:t>n</a:t>
             </a:r>
             <a:endParaRPr lang="en-US" sz="900" dirty="0"/>
           </a:p>
@@ -21451,7 +21319,7 @@
         </p:nvSpPr>
         <p:spPr>
           <a:xfrm>
-            <a:off x="2831592" y="4169664"/>
+            <a:off x="3033522" y="4169664"/>
             <a:ext cx="685800" cy="475488"/>
           </a:xfrm>
           <a:prstGeom prst="rect">
@@ -21478,7 +21346,7 @@
         </p:nvSpPr>
         <p:spPr>
           <a:xfrm>
-            <a:off x="2831592" y="4169664"/>
+            <a:off x="3033522" y="4169664"/>
             <a:ext cx="685800" cy="475488"/>
           </a:xfrm>
           <a:prstGeom prst="rect">
@@ -21503,7 +21371,7 @@
                 <a:ea typeface="Trebuchet MS" pitchFamily="34" charset="-122"/>
                 <a:cs typeface="Trebuchet MS" pitchFamily="34" charset="-120"/>
               </a:rPr>
-              <a:t>r</a:t>
+              <a:t>o</a:t>
             </a:r>
             <a:endParaRPr lang="en-US" sz="900" dirty="0"/>
           </a:p>
@@ -21517,7 +21385,7 @@
         </p:nvSpPr>
         <p:spPr>
           <a:xfrm>
-            <a:off x="3639312" y="4169664"/>
+            <a:off x="3942207" y="4169664"/>
             <a:ext cx="685800" cy="475488"/>
           </a:xfrm>
           <a:prstGeom prst="rect">
@@ -21544,7 +21412,7 @@
         </p:nvSpPr>
         <p:spPr>
           <a:xfrm>
-            <a:off x="3639312" y="4169664"/>
+            <a:off x="3942207" y="4169664"/>
             <a:ext cx="685800" cy="475488"/>
           </a:xfrm>
           <a:prstGeom prst="rect">
@@ -21569,7 +21437,7 @@
                 <a:ea typeface="Trebuchet MS" pitchFamily="34" charset="-122"/>
                 <a:cs typeface="Trebuchet MS" pitchFamily="34" charset="-120"/>
               </a:rPr>
-              <a:t>u</a:t>
+              <a:t>n</a:t>
             </a:r>
             <a:endParaRPr lang="en-US" sz="900" dirty="0"/>
           </a:p>
@@ -21583,7 +21451,7 @@
         </p:nvSpPr>
         <p:spPr>
           <a:xfrm>
-            <a:off x="4447032" y="4169664"/>
+            <a:off x="4850892" y="4169664"/>
             <a:ext cx="685800" cy="475488"/>
           </a:xfrm>
           <a:prstGeom prst="rect">
@@ -21610,7 +21478,7 @@
         </p:nvSpPr>
         <p:spPr>
           <a:xfrm>
-            <a:off x="4447032" y="4169664"/>
+            <a:off x="4850892" y="4169664"/>
             <a:ext cx="685800" cy="475488"/>
           </a:xfrm>
           <a:prstGeom prst="rect">
@@ -21635,7 +21503,7 @@
                 <a:ea typeface="Trebuchet MS" pitchFamily="34" charset="-122"/>
                 <a:cs typeface="Trebuchet MS" pitchFamily="34" charset="-120"/>
               </a:rPr>
-              <a:t>m</a:t>
+              <a:t>s</a:t>
             </a:r>
             <a:endParaRPr lang="en-US" sz="900" dirty="0"/>
           </a:p>
@@ -21649,7 +21517,7 @@
         </p:nvSpPr>
         <p:spPr>
           <a:xfrm>
-            <a:off x="5254752" y="4169664"/>
+            <a:off x="5759577" y="4169664"/>
             <a:ext cx="685800" cy="475488"/>
           </a:xfrm>
           <a:prstGeom prst="rect">
@@ -21676,7 +21544,7 @@
         </p:nvSpPr>
         <p:spPr>
           <a:xfrm>
-            <a:off x="5254752" y="4169664"/>
+            <a:off x="5759577" y="4169664"/>
             <a:ext cx="685800" cy="475488"/>
           </a:xfrm>
           <a:prstGeom prst="rect">
@@ -21701,7 +21569,7 @@
                 <a:ea typeface="Trebuchet MS" pitchFamily="34" charset="-122"/>
                 <a:cs typeface="Trebuchet MS" pitchFamily="34" charset="-120"/>
               </a:rPr>
-              <a:t>s</a:t>
+              <a:t>t</a:t>
             </a:r>
             <a:endParaRPr lang="en-US" sz="900" dirty="0"/>
           </a:p>
@@ -21715,7 +21583,7 @@
         </p:nvSpPr>
         <p:spPr>
           <a:xfrm>
-            <a:off x="6062472" y="4169664"/>
+            <a:off x="6668262" y="4169664"/>
             <a:ext cx="685800" cy="475488"/>
           </a:xfrm>
           <a:prstGeom prst="rect">
@@ -21742,7 +21610,7 @@
         </p:nvSpPr>
         <p:spPr>
           <a:xfrm>
-            <a:off x="6062472" y="4169664"/>
+            <a:off x="6668262" y="4169664"/>
             <a:ext cx="685800" cy="475488"/>
           </a:xfrm>
           <a:prstGeom prst="rect">
@@ -21767,7 +21635,7 @@
                 <a:ea typeface="Trebuchet MS" pitchFamily="34" charset="-122"/>
                 <a:cs typeface="Trebuchet MS" pitchFamily="34" charset="-120"/>
               </a:rPr>
-              <a:t>t</a:t>
+              <a:t>i</a:t>
             </a:r>
             <a:endParaRPr lang="en-US" sz="900" dirty="0"/>
           </a:p>
@@ -21781,7 +21649,7 @@
         </p:nvSpPr>
         <p:spPr>
           <a:xfrm>
-            <a:off x="6870192" y="4169664"/>
+            <a:off x="7576947" y="4169664"/>
             <a:ext cx="685800" cy="475488"/>
           </a:xfrm>
           <a:prstGeom prst="rect">
@@ -21808,73 +21676,7 @@
         </p:nvSpPr>
         <p:spPr>
           <a:xfrm>
-            <a:off x="6870192" y="4169664"/>
-            <a:ext cx="685800" cy="475488"/>
-          </a:xfrm>
-          <a:prstGeom prst="rect">
-            <a:avLst/>
-          </a:prstGeom>
-          <a:noFill/>
-          <a:ln/>
-        </p:spPr>
-        <p:txBody>
-          <a:bodyPr wrap="square" lIns="0" tIns="0" rIns="0" bIns="0" rtlCol="0" anchor="ctr"/>
-          <a:lstStyle/>
-          <a:p>
-            <a:pPr algn="ctr" indent="0" marL="0">
-              <a:buNone/>
-            </a:pPr>
-            <a:r>
-              <a:rPr lang="en-US" sz="900" b="1" dirty="0">
-                <a:solidFill>
-                  <a:srgbClr val="9D174D"/>
-                </a:solidFill>
-                <a:latin typeface="Trebuchet MS" pitchFamily="34" charset="0"/>
-                <a:ea typeface="Trebuchet MS" pitchFamily="34" charset="-122"/>
-                <a:cs typeface="Trebuchet MS" pitchFamily="34" charset="-120"/>
-              </a:rPr>
-              <a:t>i</a:t>
-            </a:r>
-            <a:endParaRPr lang="en-US" sz="900" dirty="0"/>
-          </a:p>
-        </p:txBody>
-      </p:sp>
-      <p:sp>
-        <p:nvSpPr>
-          <p:cNvPr id="47" name="Shape 45"/>
-          <p:cNvSpPr/>
-          <p:nvPr/>
-        </p:nvSpPr>
-        <p:spPr>
-          <a:xfrm>
-            <a:off x="7677912" y="4169664"/>
-            <a:ext cx="685800" cy="475488"/>
-          </a:xfrm>
-          <a:prstGeom prst="rect">
-            <a:avLst>
-              <a:gd name="adj" fmla="val 7692"/>
-            </a:avLst>
-          </a:prstGeom>
-          <a:solidFill>
-            <a:srgbClr val="FFFFFF"/>
-          </a:solidFill>
-          <a:ln w="12700">
-            <a:solidFill>
-              <a:srgbClr val="DB2777"/>
-            </a:solidFill>
-            <a:prstDash val="solid"/>
-          </a:ln>
-        </p:spPr>
-      </p:sp>
-      <p:sp>
-        <p:nvSpPr>
-          <p:cNvPr id="48" name="Text 46"/>
-          <p:cNvSpPr/>
-          <p:nvPr/>
-        </p:nvSpPr>
-        <p:spPr>
-          <a:xfrm>
-            <a:off x="7677912" y="4169664"/>
+            <a:off x="7576947" y="4169664"/>
             <a:ext cx="685800" cy="475488"/>
           </a:xfrm>
           <a:prstGeom prst="rect">
@@ -22191,7 +21993,7 @@
                 <a:ea typeface="Calibri" pitchFamily="34" charset="-122"/>
                 <a:cs typeface="Calibri" pitchFamily="34" charset="-120"/>
               </a:rPr>
-              <a:t>Word Labs  •  wordlabs.app  •  Root: 'stick' = to adhere, fasten, or pierce</a:t>
+              <a:t>Word Labs  •  wordlabs.app  •  Root: 'stick' = a thin piece of wood; to attach</a:t>
             </a:r>
             <a:endParaRPr lang="en-US" sz="800" dirty="0"/>
           </a:p>
@@ -22330,7 +22132,7 @@
                 <a:ea typeface="Trebuchet MS" pitchFamily="34" charset="-122"/>
                 <a:cs typeface="Trebuchet MS" pitchFamily="34" charset="-120"/>
               </a:rPr>
-              <a:t>sticky</a:t>
+              <a:t>stickers</a:t>
             </a:r>
             <a:endParaRPr lang="en-US" sz="2800" dirty="0"/>
           </a:p>
@@ -23018,7 +22820,7 @@
                 <a:ea typeface="Calibri" pitchFamily="34" charset="-122"/>
                 <a:cs typeface="Calibri" pitchFamily="34" charset="-120"/>
               </a:rPr>
-              <a:t>Word Labs  •  wordlabs.app  •  Root: 'stick' = to adhere, fasten, or pierce</a:t>
+              <a:t>Word Labs  •  wordlabs.app  •  Root: 'stick' = a thin piece of wood; to attach</a:t>
             </a:r>
             <a:endParaRPr lang="en-US" sz="800" dirty="0"/>
           </a:p>
@@ -23157,7 +22959,7 @@
                 <a:ea typeface="Trebuchet MS" pitchFamily="34" charset="-122"/>
                 <a:cs typeface="Trebuchet MS" pitchFamily="34" charset="-120"/>
               </a:rPr>
-              <a:t>sticky</a:t>
+              <a:t>stickers</a:t>
             </a:r>
             <a:endParaRPr lang="en-US" sz="2800" dirty="0"/>
           </a:p>
@@ -23237,7 +23039,7 @@
         </p:nvSpPr>
         <p:spPr>
           <a:xfrm>
-            <a:off x="2938272" y="2258568"/>
+            <a:off x="2221992" y="2258568"/>
             <a:ext cx="1828800" cy="292608"/>
           </a:xfrm>
           <a:prstGeom prst="rect">
@@ -23271,7 +23073,7 @@
         </p:nvSpPr>
         <p:spPr>
           <a:xfrm>
-            <a:off x="2938272" y="2258568"/>
+            <a:off x="2221992" y="2258568"/>
             <a:ext cx="1828800" cy="292608"/>
           </a:xfrm>
           <a:prstGeom prst="rect">
@@ -23310,7 +23112,7 @@
         </p:nvSpPr>
         <p:spPr>
           <a:xfrm>
-            <a:off x="2938272" y="2569464"/>
+            <a:off x="2221992" y="2569464"/>
             <a:ext cx="1828800" cy="201168"/>
           </a:xfrm>
           <a:prstGeom prst="rect">
@@ -23335,7 +23137,7 @@
                 <a:ea typeface="Calibri" pitchFamily="34" charset="-122"/>
                 <a:cs typeface="Calibri" pitchFamily="34" charset="-120"/>
               </a:rPr>
-              <a:t>to adhere or cling</a:t>
+              <a:t>a thin piece of wood; to attach</a:t>
             </a:r>
             <a:endParaRPr lang="en-US" sz="850" dirty="0"/>
           </a:p>
@@ -23349,7 +23151,7 @@
         </p:nvSpPr>
         <p:spPr>
           <a:xfrm>
-            <a:off x="5803392" y="2258568"/>
+            <a:off x="4370832" y="2258568"/>
             <a:ext cx="1828800" cy="292608"/>
           </a:xfrm>
           <a:prstGeom prst="rect">
@@ -23383,7 +23185,7 @@
         </p:nvSpPr>
         <p:spPr>
           <a:xfrm>
-            <a:off x="5803392" y="2258568"/>
+            <a:off x="4370832" y="2258568"/>
             <a:ext cx="1828800" cy="292608"/>
           </a:xfrm>
           <a:prstGeom prst="rect">
@@ -23408,7 +23210,7 @@
                 <a:ea typeface="Trebuchet MS" pitchFamily="34" charset="-122"/>
                 <a:cs typeface="Trebuchet MS" pitchFamily="34" charset="-120"/>
               </a:rPr>
-              <a:t>y</a:t>
+              <a:t>er</a:t>
             </a:r>
             <a:endParaRPr lang="en-US" sz="1300" dirty="0"/>
           </a:p>
@@ -23422,7 +23224,7 @@
         </p:nvSpPr>
         <p:spPr>
           <a:xfrm>
-            <a:off x="5803392" y="2569464"/>
+            <a:off x="4370832" y="2569464"/>
             <a:ext cx="1828800" cy="201168"/>
           </a:xfrm>
           <a:prstGeom prst="rect">
@@ -23447,7 +23249,7 @@
                 <a:ea typeface="Calibri" pitchFamily="34" charset="-122"/>
                 <a:cs typeface="Calibri" pitchFamily="34" charset="-120"/>
               </a:rPr>
-              <a:t>having the quality of</a:t>
+              <a:t>person who; more</a:t>
             </a:r>
             <a:endParaRPr lang="en-US" sz="850" dirty="0"/>
           </a:p>
@@ -23456,6 +23258,118 @@
       <p:sp>
         <p:nvSpPr>
           <p:cNvPr id="22" name="Shape 20"/>
+          <p:cNvSpPr/>
+          <p:nvPr/>
+        </p:nvSpPr>
+        <p:spPr>
+          <a:xfrm>
+            <a:off x="6519672" y="2258568"/>
+            <a:ext cx="1828800" cy="292608"/>
+          </a:xfrm>
+          <a:prstGeom prst="rect">
+            <a:avLst>
+              <a:gd name="adj" fmla="val 25000"/>
+            </a:avLst>
+          </a:prstGeom>
+          <a:solidFill>
+            <a:srgbClr val="FCE7F3"/>
+          </a:solidFill>
+          <a:ln w="19050">
+            <a:solidFill>
+              <a:srgbClr val="DB2777"/>
+            </a:solidFill>
+            <a:prstDash val="solid"/>
+          </a:ln>
+          <a:effectLst>
+            <a:outerShdw sx="100000" sy="100000" kx="0" ky="0" algn="bl" rotWithShape="0" blurRad="101600" dist="38100" dir="8100000">
+              <a:srgbClr val="000000">
+                <a:alpha val="12000"/>
+              </a:srgbClr>
+            </a:outerShdw>
+          </a:effectLst>
+        </p:spPr>
+      </p:sp>
+      <p:sp>
+        <p:nvSpPr>
+          <p:cNvPr id="23" name="Text 21"/>
+          <p:cNvSpPr/>
+          <p:nvPr/>
+        </p:nvSpPr>
+        <p:spPr>
+          <a:xfrm>
+            <a:off x="6519672" y="2258568"/>
+            <a:ext cx="1828800" cy="292608"/>
+          </a:xfrm>
+          <a:prstGeom prst="rect">
+            <a:avLst/>
+          </a:prstGeom>
+          <a:noFill/>
+          <a:ln/>
+        </p:spPr>
+        <p:txBody>
+          <a:bodyPr wrap="square" lIns="0" tIns="0" rIns="0" bIns="0" rtlCol="0" anchor="ctr"/>
+          <a:lstStyle/>
+          <a:p>
+            <a:pPr algn="ctr" indent="0" marL="0">
+              <a:buNone/>
+            </a:pPr>
+            <a:r>
+              <a:rPr lang="en-US" sz="1300" b="1" dirty="0">
+                <a:solidFill>
+                  <a:srgbClr val="9D174D"/>
+                </a:solidFill>
+                <a:latin typeface="Trebuchet MS" pitchFamily="34" charset="0"/>
+                <a:ea typeface="Trebuchet MS" pitchFamily="34" charset="-122"/>
+                <a:cs typeface="Trebuchet MS" pitchFamily="34" charset="-120"/>
+              </a:rPr>
+              <a:t>s</a:t>
+            </a:r>
+            <a:endParaRPr lang="en-US" sz="1300" dirty="0"/>
+          </a:p>
+        </p:txBody>
+      </p:sp>
+      <p:sp>
+        <p:nvSpPr>
+          <p:cNvPr id="24" name="Text 22"/>
+          <p:cNvSpPr/>
+          <p:nvPr/>
+        </p:nvSpPr>
+        <p:spPr>
+          <a:xfrm>
+            <a:off x="6519672" y="2569464"/>
+            <a:ext cx="1828800" cy="201168"/>
+          </a:xfrm>
+          <a:prstGeom prst="rect">
+            <a:avLst/>
+          </a:prstGeom>
+          <a:noFill/>
+          <a:ln/>
+        </p:spPr>
+        <p:txBody>
+          <a:bodyPr wrap="square" lIns="0" tIns="0" rIns="0" bIns="0" rtlCol="0" anchor="t"/>
+          <a:lstStyle/>
+          <a:p>
+            <a:pPr algn="ctr" indent="0" marL="0">
+              <a:buNone/>
+            </a:pPr>
+            <a:r>
+              <a:rPr lang="en-US" sz="850" dirty="0">
+                <a:solidFill>
+                  <a:srgbClr val="475569"/>
+                </a:solidFill>
+                <a:latin typeface="Calibri" pitchFamily="34" charset="0"/>
+                <a:ea typeface="Calibri" pitchFamily="34" charset="-122"/>
+                <a:cs typeface="Calibri" pitchFamily="34" charset="-120"/>
+              </a:rPr>
+              <a:t>plural or present tense</a:t>
+            </a:r>
+            <a:endParaRPr lang="en-US" sz="850" dirty="0"/>
+          </a:p>
+        </p:txBody>
+      </p:sp>
+      <p:sp>
+        <p:nvSpPr>
+          <p:cNvPr id="25" name="Shape 23"/>
           <p:cNvSpPr/>
           <p:nvPr/>
         </p:nvSpPr>
@@ -23482,7 +23396,7 @@
       </p:sp>
       <p:sp>
         <p:nvSpPr>
-          <p:cNvPr id="23" name="Text 21"/>
+          <p:cNvPr id="26" name="Text 24"/>
           <p:cNvSpPr/>
           <p:nvPr/>
         </p:nvSpPr>
@@ -23521,7 +23435,7 @@
       </p:sp>
       <p:sp>
         <p:nvSpPr>
-          <p:cNvPr id="24" name="Shape 22"/>
+          <p:cNvPr id="27" name="Shape 25"/>
           <p:cNvSpPr/>
           <p:nvPr/>
         </p:nvSpPr>
@@ -23548,7 +23462,7 @@
       </p:sp>
       <p:sp>
         <p:nvSpPr>
-          <p:cNvPr id="25" name="Text 23"/>
+          <p:cNvPr id="28" name="Text 26"/>
           <p:cNvSpPr/>
           <p:nvPr/>
         </p:nvSpPr>
@@ -23587,7 +23501,7 @@
       </p:sp>
       <p:sp>
         <p:nvSpPr>
-          <p:cNvPr id="26" name="Shape 24"/>
+          <p:cNvPr id="29" name="Shape 27"/>
           <p:cNvSpPr/>
           <p:nvPr/>
         </p:nvSpPr>
@@ -23614,7 +23528,7 @@
       </p:sp>
       <p:sp>
         <p:nvSpPr>
-          <p:cNvPr id="27" name="Text 25"/>
+          <p:cNvPr id="30" name="Text 28"/>
           <p:cNvSpPr/>
           <p:nvPr/>
         </p:nvSpPr>
@@ -23653,7 +23567,7 @@
       </p:sp>
       <p:sp>
         <p:nvSpPr>
-          <p:cNvPr id="28" name="Shape 26"/>
+          <p:cNvPr id="31" name="Shape 29"/>
           <p:cNvSpPr/>
           <p:nvPr/>
         </p:nvSpPr>
@@ -23680,7 +23594,7 @@
       </p:sp>
       <p:sp>
         <p:nvSpPr>
-          <p:cNvPr id="29" name="Text 27"/>
+          <p:cNvPr id="32" name="Text 30"/>
           <p:cNvSpPr/>
           <p:nvPr/>
         </p:nvSpPr>
@@ -24003,7 +23917,7 @@
                 <a:ea typeface="Calibri" pitchFamily="34" charset="-122"/>
                 <a:cs typeface="Calibri" pitchFamily="34" charset="-120"/>
               </a:rPr>
-              <a:t>Word Labs  •  wordlabs.app  •  Root: 'stick' = to adhere, fasten, or pierce</a:t>
+              <a:t>Word Labs  •  wordlabs.app  •  Root: 'stick' = a thin piece of wood; to attach</a:t>
             </a:r>
             <a:endParaRPr lang="en-US" sz="800" dirty="0"/>
           </a:p>
@@ -24076,7 +23990,7 @@
                 <a:ea typeface="Trebuchet MS" pitchFamily="34" charset="-122"/>
                 <a:cs typeface="Trebuchet MS" pitchFamily="34" charset="-120"/>
               </a:rPr>
-              <a:t>We are learning that the root 'stick' means 'to adhere, fasten, or pierce'.</a:t>
+              <a:t>We are learning that the root 'stick' means 'a thin piece of wood; to attach'.</a:t>
             </a:r>
             <a:endParaRPr lang="en-US" sz="2000" dirty="0"/>
           </a:p>
@@ -24722,7 +24636,7 @@
                 <a:ea typeface="Calibri" pitchFamily="34" charset="-122"/>
                 <a:cs typeface="Calibri" pitchFamily="34" charset="-120"/>
               </a:rPr>
-              <a:t>Word Labs  •  wordlabs.app  •  Root: 'stick' = to adhere, fasten, or pierce</a:t>
+              <a:t>Word Labs  •  wordlabs.app  •  Root: 'stick' = a thin piece of wood; to attach</a:t>
             </a:r>
             <a:endParaRPr lang="en-US" sz="800" dirty="0"/>
           </a:p>
@@ -24861,7 +24775,7 @@
                 <a:ea typeface="Trebuchet MS" pitchFamily="34" charset="-122"/>
                 <a:cs typeface="Trebuchet MS" pitchFamily="34" charset="-120"/>
               </a:rPr>
-              <a:t>sticky</a:t>
+              <a:t>stickers</a:t>
             </a:r>
             <a:endParaRPr lang="en-US" sz="2800" dirty="0"/>
           </a:p>
@@ -24941,7 +24855,7 @@
         </p:nvSpPr>
         <p:spPr>
           <a:xfrm>
-            <a:off x="2938272" y="2258568"/>
+            <a:off x="2221992" y="2258568"/>
             <a:ext cx="1828800" cy="292608"/>
           </a:xfrm>
           <a:prstGeom prst="rect">
@@ -24975,7 +24889,7 @@
         </p:nvSpPr>
         <p:spPr>
           <a:xfrm>
-            <a:off x="2938272" y="2258568"/>
+            <a:off x="2221992" y="2258568"/>
             <a:ext cx="1828800" cy="292608"/>
           </a:xfrm>
           <a:prstGeom prst="rect">
@@ -25014,7 +24928,7 @@
         </p:nvSpPr>
         <p:spPr>
           <a:xfrm>
-            <a:off x="2938272" y="2569464"/>
+            <a:off x="2221992" y="2569464"/>
             <a:ext cx="1828800" cy="201168"/>
           </a:xfrm>
           <a:prstGeom prst="rect">
@@ -25039,7 +24953,7 @@
                 <a:ea typeface="Calibri" pitchFamily="34" charset="-122"/>
                 <a:cs typeface="Calibri" pitchFamily="34" charset="-120"/>
               </a:rPr>
-              <a:t>to adhere or cling</a:t>
+              <a:t>a thin piece of wood; to attach</a:t>
             </a:r>
             <a:endParaRPr lang="en-US" sz="850" dirty="0"/>
           </a:p>
@@ -25053,7 +24967,7 @@
         </p:nvSpPr>
         <p:spPr>
           <a:xfrm>
-            <a:off x="5803392" y="2258568"/>
+            <a:off x="4370832" y="2258568"/>
             <a:ext cx="1828800" cy="292608"/>
           </a:xfrm>
           <a:prstGeom prst="rect">
@@ -25087,7 +25001,7 @@
         </p:nvSpPr>
         <p:spPr>
           <a:xfrm>
-            <a:off x="5803392" y="2258568"/>
+            <a:off x="4370832" y="2258568"/>
             <a:ext cx="1828800" cy="292608"/>
           </a:xfrm>
           <a:prstGeom prst="rect">
@@ -25112,7 +25026,7 @@
                 <a:ea typeface="Trebuchet MS" pitchFamily="34" charset="-122"/>
                 <a:cs typeface="Trebuchet MS" pitchFamily="34" charset="-120"/>
               </a:rPr>
-              <a:t>y</a:t>
+              <a:t>er</a:t>
             </a:r>
             <a:endParaRPr lang="en-US" sz="1300" dirty="0"/>
           </a:p>
@@ -25126,7 +25040,7 @@
         </p:nvSpPr>
         <p:spPr>
           <a:xfrm>
-            <a:off x="5803392" y="2569464"/>
+            <a:off x="4370832" y="2569464"/>
             <a:ext cx="1828800" cy="201168"/>
           </a:xfrm>
           <a:prstGeom prst="rect">
@@ -25151,7 +25065,7 @@
                 <a:ea typeface="Calibri" pitchFamily="34" charset="-122"/>
                 <a:cs typeface="Calibri" pitchFamily="34" charset="-120"/>
               </a:rPr>
-              <a:t>having the quality of</a:t>
+              <a:t>person who; more</a:t>
             </a:r>
             <a:endParaRPr lang="en-US" sz="850" dirty="0"/>
           </a:p>
@@ -25160,6 +25074,118 @@
       <p:sp>
         <p:nvSpPr>
           <p:cNvPr id="22" name="Shape 20"/>
+          <p:cNvSpPr/>
+          <p:nvPr/>
+        </p:nvSpPr>
+        <p:spPr>
+          <a:xfrm>
+            <a:off x="6519672" y="2258568"/>
+            <a:ext cx="1828800" cy="292608"/>
+          </a:xfrm>
+          <a:prstGeom prst="rect">
+            <a:avLst>
+              <a:gd name="adj" fmla="val 25000"/>
+            </a:avLst>
+          </a:prstGeom>
+          <a:solidFill>
+            <a:srgbClr val="FCE7F3"/>
+          </a:solidFill>
+          <a:ln w="19050">
+            <a:solidFill>
+              <a:srgbClr val="DB2777"/>
+            </a:solidFill>
+            <a:prstDash val="solid"/>
+          </a:ln>
+          <a:effectLst>
+            <a:outerShdw sx="100000" sy="100000" kx="0" ky="0" algn="bl" rotWithShape="0" blurRad="101600" dist="38100" dir="8100000">
+              <a:srgbClr val="000000">
+                <a:alpha val="12000"/>
+              </a:srgbClr>
+            </a:outerShdw>
+          </a:effectLst>
+        </p:spPr>
+      </p:sp>
+      <p:sp>
+        <p:nvSpPr>
+          <p:cNvPr id="23" name="Text 21"/>
+          <p:cNvSpPr/>
+          <p:nvPr/>
+        </p:nvSpPr>
+        <p:spPr>
+          <a:xfrm>
+            <a:off x="6519672" y="2258568"/>
+            <a:ext cx="1828800" cy="292608"/>
+          </a:xfrm>
+          <a:prstGeom prst="rect">
+            <a:avLst/>
+          </a:prstGeom>
+          <a:noFill/>
+          <a:ln/>
+        </p:spPr>
+        <p:txBody>
+          <a:bodyPr wrap="square" lIns="0" tIns="0" rIns="0" bIns="0" rtlCol="0" anchor="ctr"/>
+          <a:lstStyle/>
+          <a:p>
+            <a:pPr algn="ctr" indent="0" marL="0">
+              <a:buNone/>
+            </a:pPr>
+            <a:r>
+              <a:rPr lang="en-US" sz="1300" b="1" dirty="0">
+                <a:solidFill>
+                  <a:srgbClr val="9D174D"/>
+                </a:solidFill>
+                <a:latin typeface="Trebuchet MS" pitchFamily="34" charset="0"/>
+                <a:ea typeface="Trebuchet MS" pitchFamily="34" charset="-122"/>
+                <a:cs typeface="Trebuchet MS" pitchFamily="34" charset="-120"/>
+              </a:rPr>
+              <a:t>s</a:t>
+            </a:r>
+            <a:endParaRPr lang="en-US" sz="1300" dirty="0"/>
+          </a:p>
+        </p:txBody>
+      </p:sp>
+      <p:sp>
+        <p:nvSpPr>
+          <p:cNvPr id="24" name="Text 22"/>
+          <p:cNvSpPr/>
+          <p:nvPr/>
+        </p:nvSpPr>
+        <p:spPr>
+          <a:xfrm>
+            <a:off x="6519672" y="2569464"/>
+            <a:ext cx="1828800" cy="201168"/>
+          </a:xfrm>
+          <a:prstGeom prst="rect">
+            <a:avLst/>
+          </a:prstGeom>
+          <a:noFill/>
+          <a:ln/>
+        </p:spPr>
+        <p:txBody>
+          <a:bodyPr wrap="square" lIns="0" tIns="0" rIns="0" bIns="0" rtlCol="0" anchor="t"/>
+          <a:lstStyle/>
+          <a:p>
+            <a:pPr algn="ctr" indent="0" marL="0">
+              <a:buNone/>
+            </a:pPr>
+            <a:r>
+              <a:rPr lang="en-US" sz="850" dirty="0">
+                <a:solidFill>
+                  <a:srgbClr val="475569"/>
+                </a:solidFill>
+                <a:latin typeface="Calibri" pitchFamily="34" charset="0"/>
+                <a:ea typeface="Calibri" pitchFamily="34" charset="-122"/>
+                <a:cs typeface="Calibri" pitchFamily="34" charset="-120"/>
+              </a:rPr>
+              <a:t>plural or present tense</a:t>
+            </a:r>
+            <a:endParaRPr lang="en-US" sz="850" dirty="0"/>
+          </a:p>
+        </p:txBody>
+      </p:sp>
+      <p:sp>
+        <p:nvSpPr>
+          <p:cNvPr id="25" name="Shape 23"/>
           <p:cNvSpPr/>
           <p:nvPr/>
         </p:nvSpPr>
@@ -25186,7 +25212,7 @@
       </p:sp>
       <p:sp>
         <p:nvSpPr>
-          <p:cNvPr id="23" name="Text 21"/>
+          <p:cNvPr id="26" name="Text 24"/>
           <p:cNvSpPr/>
           <p:nvPr/>
         </p:nvSpPr>
@@ -25225,7 +25251,7 @@
       </p:sp>
       <p:sp>
         <p:nvSpPr>
-          <p:cNvPr id="24" name="Shape 22"/>
+          <p:cNvPr id="27" name="Shape 25"/>
           <p:cNvSpPr/>
           <p:nvPr/>
         </p:nvSpPr>
@@ -25252,7 +25278,7 @@
       </p:sp>
       <p:sp>
         <p:nvSpPr>
-          <p:cNvPr id="25" name="Shape 23"/>
+          <p:cNvPr id="28" name="Shape 26"/>
           <p:cNvSpPr/>
           <p:nvPr/>
         </p:nvSpPr>
@@ -25279,7 +25305,7 @@
       </p:sp>
       <p:sp>
         <p:nvSpPr>
-          <p:cNvPr id="26" name="Text 24"/>
+          <p:cNvPr id="29" name="Text 27"/>
           <p:cNvSpPr/>
           <p:nvPr/>
         </p:nvSpPr>
@@ -25318,7 +25344,7 @@
       </p:sp>
       <p:sp>
         <p:nvSpPr>
-          <p:cNvPr id="27" name="Text 25"/>
+          <p:cNvPr id="30" name="Text 28"/>
           <p:cNvSpPr/>
           <p:nvPr/>
         </p:nvSpPr>
@@ -25357,7 +25383,7 @@
       </p:sp>
       <p:sp>
         <p:nvSpPr>
-          <p:cNvPr id="28" name="Shape 26"/>
+          <p:cNvPr id="31" name="Shape 29"/>
           <p:cNvSpPr/>
           <p:nvPr/>
         </p:nvSpPr>
@@ -25384,7 +25410,7 @@
       </p:sp>
       <p:sp>
         <p:nvSpPr>
-          <p:cNvPr id="29" name="Text 27"/>
+          <p:cNvPr id="32" name="Text 30"/>
           <p:cNvSpPr/>
           <p:nvPr/>
         </p:nvSpPr>
@@ -25415,7 +25441,7 @@
                 <a:ea typeface="Trebuchet MS" pitchFamily="34" charset="-122"/>
                 <a:cs typeface="Trebuchet MS" pitchFamily="34" charset="-120"/>
               </a:rPr>
-              <a:t>y</a:t>
+              <a:t>ers</a:t>
             </a:r>
             <a:endParaRPr lang="en-US" sz="1400" dirty="0"/>
           </a:p>
@@ -25423,7 +25449,7 @@
       </p:sp>
       <p:sp>
         <p:nvSpPr>
-          <p:cNvPr id="30" name="Shape 28"/>
+          <p:cNvPr id="33" name="Shape 31"/>
           <p:cNvSpPr/>
           <p:nvPr/>
         </p:nvSpPr>
@@ -25450,7 +25476,7 @@
       </p:sp>
       <p:sp>
         <p:nvSpPr>
-          <p:cNvPr id="31" name="Text 29"/>
+          <p:cNvPr id="34" name="Text 32"/>
           <p:cNvSpPr/>
           <p:nvPr/>
         </p:nvSpPr>
@@ -25489,7 +25515,7 @@
       </p:sp>
       <p:sp>
         <p:nvSpPr>
-          <p:cNvPr id="32" name="Shape 30"/>
+          <p:cNvPr id="35" name="Shape 33"/>
           <p:cNvSpPr/>
           <p:nvPr/>
         </p:nvSpPr>
@@ -25516,7 +25542,7 @@
       </p:sp>
       <p:sp>
         <p:nvSpPr>
-          <p:cNvPr id="33" name="Text 31"/>
+          <p:cNvPr id="36" name="Text 34"/>
           <p:cNvSpPr/>
           <p:nvPr/>
         </p:nvSpPr>
@@ -25839,7 +25865,7 @@
                 <a:ea typeface="Calibri" pitchFamily="34" charset="-122"/>
                 <a:cs typeface="Calibri" pitchFamily="34" charset="-120"/>
               </a:rPr>
-              <a:t>Word Labs  •  wordlabs.app  •  Root: 'stick' = to adhere, fasten, or pierce</a:t>
+              <a:t>Word Labs  •  wordlabs.app  •  Root: 'stick' = a thin piece of wood; to attach</a:t>
             </a:r>
             <a:endParaRPr lang="en-US" sz="800" dirty="0"/>
           </a:p>
@@ -25978,7 +26004,7 @@
                 <a:ea typeface="Trebuchet MS" pitchFamily="34" charset="-122"/>
                 <a:cs typeface="Trebuchet MS" pitchFamily="34" charset="-120"/>
               </a:rPr>
-              <a:t>sticky</a:t>
+              <a:t>stickers</a:t>
             </a:r>
             <a:endParaRPr lang="en-US" sz="2800" dirty="0"/>
           </a:p>
@@ -26058,7 +26084,7 @@
         </p:nvSpPr>
         <p:spPr>
           <a:xfrm>
-            <a:off x="2938272" y="2258568"/>
+            <a:off x="2221992" y="2258568"/>
             <a:ext cx="1828800" cy="292608"/>
           </a:xfrm>
           <a:prstGeom prst="rect">
@@ -26092,7 +26118,7 @@
         </p:nvSpPr>
         <p:spPr>
           <a:xfrm>
-            <a:off x="2938272" y="2258568"/>
+            <a:off x="2221992" y="2258568"/>
             <a:ext cx="1828800" cy="292608"/>
           </a:xfrm>
           <a:prstGeom prst="rect">
@@ -26131,7 +26157,7 @@
         </p:nvSpPr>
         <p:spPr>
           <a:xfrm>
-            <a:off x="2938272" y="2569464"/>
+            <a:off x="2221992" y="2569464"/>
             <a:ext cx="1828800" cy="201168"/>
           </a:xfrm>
           <a:prstGeom prst="rect">
@@ -26156,7 +26182,7 @@
                 <a:ea typeface="Calibri" pitchFamily="34" charset="-122"/>
                 <a:cs typeface="Calibri" pitchFamily="34" charset="-120"/>
               </a:rPr>
-              <a:t>to adhere or cling</a:t>
+              <a:t>a thin piece of wood; to attach</a:t>
             </a:r>
             <a:endParaRPr lang="en-US" sz="850" dirty="0"/>
           </a:p>
@@ -26170,7 +26196,7 @@
         </p:nvSpPr>
         <p:spPr>
           <a:xfrm>
-            <a:off x="5803392" y="2258568"/>
+            <a:off x="4370832" y="2258568"/>
             <a:ext cx="1828800" cy="292608"/>
           </a:xfrm>
           <a:prstGeom prst="rect">
@@ -26204,7 +26230,7 @@
         </p:nvSpPr>
         <p:spPr>
           <a:xfrm>
-            <a:off x="5803392" y="2258568"/>
+            <a:off x="4370832" y="2258568"/>
             <a:ext cx="1828800" cy="292608"/>
           </a:xfrm>
           <a:prstGeom prst="rect">
@@ -26229,7 +26255,7 @@
                 <a:ea typeface="Trebuchet MS" pitchFamily="34" charset="-122"/>
                 <a:cs typeface="Trebuchet MS" pitchFamily="34" charset="-120"/>
               </a:rPr>
-              <a:t>y</a:t>
+              <a:t>er</a:t>
             </a:r>
             <a:endParaRPr lang="en-US" sz="1300" dirty="0"/>
           </a:p>
@@ -26243,7 +26269,7 @@
         </p:nvSpPr>
         <p:spPr>
           <a:xfrm>
-            <a:off x="5803392" y="2569464"/>
+            <a:off x="4370832" y="2569464"/>
             <a:ext cx="1828800" cy="201168"/>
           </a:xfrm>
           <a:prstGeom prst="rect">
@@ -26268,7 +26294,7 @@
                 <a:ea typeface="Calibri" pitchFamily="34" charset="-122"/>
                 <a:cs typeface="Calibri" pitchFamily="34" charset="-120"/>
               </a:rPr>
-              <a:t>having the quality of</a:t>
+              <a:t>person who; more</a:t>
             </a:r>
             <a:endParaRPr lang="en-US" sz="850" dirty="0"/>
           </a:p>
@@ -26277,6 +26303,118 @@
       <p:sp>
         <p:nvSpPr>
           <p:cNvPr id="22" name="Shape 20"/>
+          <p:cNvSpPr/>
+          <p:nvPr/>
+        </p:nvSpPr>
+        <p:spPr>
+          <a:xfrm>
+            <a:off x="6519672" y="2258568"/>
+            <a:ext cx="1828800" cy="292608"/>
+          </a:xfrm>
+          <a:prstGeom prst="rect">
+            <a:avLst>
+              <a:gd name="adj" fmla="val 25000"/>
+            </a:avLst>
+          </a:prstGeom>
+          <a:solidFill>
+            <a:srgbClr val="FCE7F3"/>
+          </a:solidFill>
+          <a:ln w="19050">
+            <a:solidFill>
+              <a:srgbClr val="DB2777"/>
+            </a:solidFill>
+            <a:prstDash val="solid"/>
+          </a:ln>
+          <a:effectLst>
+            <a:outerShdw sx="100000" sy="100000" kx="0" ky="0" algn="bl" rotWithShape="0" blurRad="101600" dist="38100" dir="8100000">
+              <a:srgbClr val="000000">
+                <a:alpha val="12000"/>
+              </a:srgbClr>
+            </a:outerShdw>
+          </a:effectLst>
+        </p:spPr>
+      </p:sp>
+      <p:sp>
+        <p:nvSpPr>
+          <p:cNvPr id="23" name="Text 21"/>
+          <p:cNvSpPr/>
+          <p:nvPr/>
+        </p:nvSpPr>
+        <p:spPr>
+          <a:xfrm>
+            <a:off x="6519672" y="2258568"/>
+            <a:ext cx="1828800" cy="292608"/>
+          </a:xfrm>
+          <a:prstGeom prst="rect">
+            <a:avLst/>
+          </a:prstGeom>
+          <a:noFill/>
+          <a:ln/>
+        </p:spPr>
+        <p:txBody>
+          <a:bodyPr wrap="square" lIns="0" tIns="0" rIns="0" bIns="0" rtlCol="0" anchor="ctr"/>
+          <a:lstStyle/>
+          <a:p>
+            <a:pPr algn="ctr" indent="0" marL="0">
+              <a:buNone/>
+            </a:pPr>
+            <a:r>
+              <a:rPr lang="en-US" sz="1300" b="1" dirty="0">
+                <a:solidFill>
+                  <a:srgbClr val="9D174D"/>
+                </a:solidFill>
+                <a:latin typeface="Trebuchet MS" pitchFamily="34" charset="0"/>
+                <a:ea typeface="Trebuchet MS" pitchFamily="34" charset="-122"/>
+                <a:cs typeface="Trebuchet MS" pitchFamily="34" charset="-120"/>
+              </a:rPr>
+              <a:t>s</a:t>
+            </a:r>
+            <a:endParaRPr lang="en-US" sz="1300" dirty="0"/>
+          </a:p>
+        </p:txBody>
+      </p:sp>
+      <p:sp>
+        <p:nvSpPr>
+          <p:cNvPr id="24" name="Text 22"/>
+          <p:cNvSpPr/>
+          <p:nvPr/>
+        </p:nvSpPr>
+        <p:spPr>
+          <a:xfrm>
+            <a:off x="6519672" y="2569464"/>
+            <a:ext cx="1828800" cy="201168"/>
+          </a:xfrm>
+          <a:prstGeom prst="rect">
+            <a:avLst/>
+          </a:prstGeom>
+          <a:noFill/>
+          <a:ln/>
+        </p:spPr>
+        <p:txBody>
+          <a:bodyPr wrap="square" lIns="0" tIns="0" rIns="0" bIns="0" rtlCol="0" anchor="t"/>
+          <a:lstStyle/>
+          <a:p>
+            <a:pPr algn="ctr" indent="0" marL="0">
+              <a:buNone/>
+            </a:pPr>
+            <a:r>
+              <a:rPr lang="en-US" sz="850" dirty="0">
+                <a:solidFill>
+                  <a:srgbClr val="475569"/>
+                </a:solidFill>
+                <a:latin typeface="Calibri" pitchFamily="34" charset="0"/>
+                <a:ea typeface="Calibri" pitchFamily="34" charset="-122"/>
+                <a:cs typeface="Calibri" pitchFamily="34" charset="-120"/>
+              </a:rPr>
+              <a:t>plural or present tense</a:t>
+            </a:r>
+            <a:endParaRPr lang="en-US" sz="850" dirty="0"/>
+          </a:p>
+        </p:txBody>
+      </p:sp>
+      <p:sp>
+        <p:nvSpPr>
+          <p:cNvPr id="25" name="Shape 23"/>
           <p:cNvSpPr/>
           <p:nvPr/>
         </p:nvSpPr>
@@ -26303,7 +26441,7 @@
       </p:sp>
       <p:sp>
         <p:nvSpPr>
-          <p:cNvPr id="23" name="Text 21"/>
+          <p:cNvPr id="26" name="Text 24"/>
           <p:cNvSpPr/>
           <p:nvPr/>
         </p:nvSpPr>
@@ -26342,7 +26480,7 @@
       </p:sp>
       <p:sp>
         <p:nvSpPr>
-          <p:cNvPr id="24" name="Shape 22"/>
+          <p:cNvPr id="27" name="Shape 25"/>
           <p:cNvSpPr/>
           <p:nvPr/>
         </p:nvSpPr>
@@ -26369,7 +26507,7 @@
       </p:sp>
       <p:sp>
         <p:nvSpPr>
-          <p:cNvPr id="25" name="Shape 23"/>
+          <p:cNvPr id="28" name="Shape 26"/>
           <p:cNvSpPr/>
           <p:nvPr/>
         </p:nvSpPr>
@@ -26396,7 +26534,7 @@
       </p:sp>
       <p:sp>
         <p:nvSpPr>
-          <p:cNvPr id="26" name="Text 24"/>
+          <p:cNvPr id="29" name="Text 27"/>
           <p:cNvSpPr/>
           <p:nvPr/>
         </p:nvSpPr>
@@ -26435,7 +26573,7 @@
       </p:sp>
       <p:sp>
         <p:nvSpPr>
-          <p:cNvPr id="27" name="Text 25"/>
+          <p:cNvPr id="30" name="Text 28"/>
           <p:cNvSpPr/>
           <p:nvPr/>
         </p:nvSpPr>
@@ -26474,7 +26612,7 @@
       </p:sp>
       <p:sp>
         <p:nvSpPr>
-          <p:cNvPr id="28" name="Shape 26"/>
+          <p:cNvPr id="31" name="Shape 29"/>
           <p:cNvSpPr/>
           <p:nvPr/>
         </p:nvSpPr>
@@ -26501,7 +26639,7 @@
       </p:sp>
       <p:sp>
         <p:nvSpPr>
-          <p:cNvPr id="29" name="Text 27"/>
+          <p:cNvPr id="32" name="Text 30"/>
           <p:cNvSpPr/>
           <p:nvPr/>
         </p:nvSpPr>
@@ -26532,7 +26670,7 @@
                 <a:ea typeface="Trebuchet MS" pitchFamily="34" charset="-122"/>
                 <a:cs typeface="Trebuchet MS" pitchFamily="34" charset="-120"/>
               </a:rPr>
-              <a:t>y</a:t>
+              <a:t>ers</a:t>
             </a:r>
             <a:endParaRPr lang="en-US" sz="1400" dirty="0"/>
           </a:p>
@@ -26540,7 +26678,7 @@
       </p:sp>
       <p:sp>
         <p:nvSpPr>
-          <p:cNvPr id="30" name="Shape 28"/>
+          <p:cNvPr id="33" name="Shape 31"/>
           <p:cNvSpPr/>
           <p:nvPr/>
         </p:nvSpPr>
@@ -26567,7 +26705,7 @@
       </p:sp>
       <p:sp>
         <p:nvSpPr>
-          <p:cNvPr id="31" name="Text 29"/>
+          <p:cNvPr id="34" name="Text 32"/>
           <p:cNvSpPr/>
           <p:nvPr/>
         </p:nvSpPr>
@@ -26606,7 +26744,7 @@
       </p:sp>
       <p:sp>
         <p:nvSpPr>
-          <p:cNvPr id="32" name="Shape 30"/>
+          <p:cNvPr id="35" name="Shape 33"/>
           <p:cNvSpPr/>
           <p:nvPr/>
         </p:nvSpPr>
@@ -26633,13 +26771,13 @@
       </p:sp>
       <p:sp>
         <p:nvSpPr>
-          <p:cNvPr id="33" name="Shape 31"/>
-          <p:cNvSpPr/>
-          <p:nvPr/>
-        </p:nvSpPr>
-        <p:spPr>
-          <a:xfrm>
-            <a:off x="2427732" y="4169664"/>
+          <p:cNvPr id="36" name="Shape 34"/>
+          <p:cNvSpPr/>
+          <p:nvPr/>
+        </p:nvSpPr>
+        <p:spPr>
+          <a:xfrm>
+            <a:off x="2254649" y="4169664"/>
             <a:ext cx="685800" cy="475488"/>
           </a:xfrm>
           <a:prstGeom prst="rect">
@@ -26660,13 +26798,13 @@
       </p:sp>
       <p:sp>
         <p:nvSpPr>
-          <p:cNvPr id="34" name="Text 32"/>
-          <p:cNvSpPr/>
-          <p:nvPr/>
-        </p:nvSpPr>
-        <p:spPr>
-          <a:xfrm>
-            <a:off x="2427732" y="4169664"/>
+          <p:cNvPr id="37" name="Text 35"/>
+          <p:cNvSpPr/>
+          <p:nvPr/>
+        </p:nvSpPr>
+        <p:spPr>
+          <a:xfrm>
+            <a:off x="2254649" y="4169664"/>
             <a:ext cx="685800" cy="475488"/>
           </a:xfrm>
           <a:prstGeom prst="rect">
@@ -26699,13 +26837,13 @@
       </p:sp>
       <p:sp>
         <p:nvSpPr>
-          <p:cNvPr id="35" name="Shape 33"/>
-          <p:cNvSpPr/>
-          <p:nvPr/>
-        </p:nvSpPr>
-        <p:spPr>
-          <a:xfrm>
-            <a:off x="3639312" y="4169664"/>
+          <p:cNvPr id="38" name="Shape 36"/>
+          <p:cNvSpPr/>
+          <p:nvPr/>
+        </p:nvSpPr>
+        <p:spPr>
+          <a:xfrm>
+            <a:off x="3293146" y="4169664"/>
             <a:ext cx="685800" cy="475488"/>
           </a:xfrm>
           <a:prstGeom prst="rect">
@@ -26726,13 +26864,13 @@
       </p:sp>
       <p:sp>
         <p:nvSpPr>
-          <p:cNvPr id="36" name="Text 34"/>
-          <p:cNvSpPr/>
-          <p:nvPr/>
-        </p:nvSpPr>
-        <p:spPr>
-          <a:xfrm>
-            <a:off x="3639312" y="4169664"/>
+          <p:cNvPr id="39" name="Text 37"/>
+          <p:cNvSpPr/>
+          <p:nvPr/>
+        </p:nvSpPr>
+        <p:spPr>
+          <a:xfrm>
+            <a:off x="3293146" y="4169664"/>
             <a:ext cx="685800" cy="475488"/>
           </a:xfrm>
           <a:prstGeom prst="rect">
@@ -26765,13 +26903,13 @@
       </p:sp>
       <p:sp>
         <p:nvSpPr>
-          <p:cNvPr id="37" name="Shape 35"/>
-          <p:cNvSpPr/>
-          <p:nvPr/>
-        </p:nvSpPr>
-        <p:spPr>
-          <a:xfrm>
-            <a:off x="4850892" y="4169664"/>
+          <p:cNvPr id="40" name="Shape 38"/>
+          <p:cNvSpPr/>
+          <p:nvPr/>
+        </p:nvSpPr>
+        <p:spPr>
+          <a:xfrm>
+            <a:off x="4331643" y="4169664"/>
             <a:ext cx="685800" cy="475488"/>
           </a:xfrm>
           <a:prstGeom prst="rect">
@@ -26792,13 +26930,13 @@
       </p:sp>
       <p:sp>
         <p:nvSpPr>
-          <p:cNvPr id="38" name="Text 36"/>
-          <p:cNvSpPr/>
-          <p:nvPr/>
-        </p:nvSpPr>
-        <p:spPr>
-          <a:xfrm>
-            <a:off x="4850892" y="4169664"/>
+          <p:cNvPr id="41" name="Text 39"/>
+          <p:cNvSpPr/>
+          <p:nvPr/>
+        </p:nvSpPr>
+        <p:spPr>
+          <a:xfrm>
+            <a:off x="4331643" y="4169664"/>
             <a:ext cx="685800" cy="475488"/>
           </a:xfrm>
           <a:prstGeom prst="rect">
@@ -26831,13 +26969,13 @@
       </p:sp>
       <p:sp>
         <p:nvSpPr>
-          <p:cNvPr id="39" name="Shape 37"/>
-          <p:cNvSpPr/>
-          <p:nvPr/>
-        </p:nvSpPr>
-        <p:spPr>
-          <a:xfrm>
-            <a:off x="6062472" y="4169664"/>
+          <p:cNvPr id="42" name="Shape 40"/>
+          <p:cNvSpPr/>
+          <p:nvPr/>
+        </p:nvSpPr>
+        <p:spPr>
+          <a:xfrm>
+            <a:off x="5370141" y="4169664"/>
             <a:ext cx="685800" cy="475488"/>
           </a:xfrm>
           <a:prstGeom prst="rect">
@@ -26858,13 +26996,13 @@
       </p:sp>
       <p:sp>
         <p:nvSpPr>
-          <p:cNvPr id="40" name="Text 38"/>
-          <p:cNvSpPr/>
-          <p:nvPr/>
-        </p:nvSpPr>
-        <p:spPr>
-          <a:xfrm>
-            <a:off x="6062472" y="4169664"/>
+          <p:cNvPr id="43" name="Text 41"/>
+          <p:cNvSpPr/>
+          <p:nvPr/>
+        </p:nvSpPr>
+        <p:spPr>
+          <a:xfrm>
+            <a:off x="5370141" y="4169664"/>
             <a:ext cx="685800" cy="475488"/>
           </a:xfrm>
           <a:prstGeom prst="rect">
@@ -26897,13 +27035,13 @@
       </p:sp>
       <p:sp>
         <p:nvSpPr>
-          <p:cNvPr id="41" name="Shape 39"/>
-          <p:cNvSpPr/>
-          <p:nvPr/>
-        </p:nvSpPr>
-        <p:spPr>
-          <a:xfrm>
-            <a:off x="7274052" y="4169664"/>
+          <p:cNvPr id="44" name="Shape 42"/>
+          <p:cNvSpPr/>
+          <p:nvPr/>
+        </p:nvSpPr>
+        <p:spPr>
+          <a:xfrm>
+            <a:off x="6408638" y="4169664"/>
             <a:ext cx="685800" cy="475488"/>
           </a:xfrm>
           <a:prstGeom prst="rect">
@@ -26924,13 +27062,13 @@
       </p:sp>
       <p:sp>
         <p:nvSpPr>
-          <p:cNvPr id="42" name="Text 40"/>
-          <p:cNvSpPr/>
-          <p:nvPr/>
-        </p:nvSpPr>
-        <p:spPr>
-          <a:xfrm>
-            <a:off x="7274052" y="4169664"/>
+          <p:cNvPr id="45" name="Text 43"/>
+          <p:cNvSpPr/>
+          <p:nvPr/>
+        </p:nvSpPr>
+        <p:spPr>
+          <a:xfrm>
+            <a:off x="6408638" y="4169664"/>
             <a:ext cx="685800" cy="475488"/>
           </a:xfrm>
           <a:prstGeom prst="rect">
@@ -26955,7 +27093,73 @@
                 <a:ea typeface="Trebuchet MS" pitchFamily="34" charset="-122"/>
                 <a:cs typeface="Trebuchet MS" pitchFamily="34" charset="-120"/>
               </a:rPr>
-              <a:t>y</a:t>
+              <a:t>er</a:t>
+            </a:r>
+            <a:endParaRPr lang="en-US" sz="900" dirty="0"/>
+          </a:p>
+        </p:txBody>
+      </p:sp>
+      <p:sp>
+        <p:nvSpPr>
+          <p:cNvPr id="46" name="Shape 44"/>
+          <p:cNvSpPr/>
+          <p:nvPr/>
+        </p:nvSpPr>
+        <p:spPr>
+          <a:xfrm>
+            <a:off x="7447135" y="4169664"/>
+            <a:ext cx="685800" cy="475488"/>
+          </a:xfrm>
+          <a:prstGeom prst="rect">
+            <a:avLst>
+              <a:gd name="adj" fmla="val 7692"/>
+            </a:avLst>
+          </a:prstGeom>
+          <a:solidFill>
+            <a:srgbClr val="FFFFFF"/>
+          </a:solidFill>
+          <a:ln w="12700">
+            <a:solidFill>
+              <a:srgbClr val="DB2777"/>
+            </a:solidFill>
+            <a:prstDash val="solid"/>
+          </a:ln>
+        </p:spPr>
+      </p:sp>
+      <p:sp>
+        <p:nvSpPr>
+          <p:cNvPr id="47" name="Text 45"/>
+          <p:cNvSpPr/>
+          <p:nvPr/>
+        </p:nvSpPr>
+        <p:spPr>
+          <a:xfrm>
+            <a:off x="7447135" y="4169664"/>
+            <a:ext cx="685800" cy="475488"/>
+          </a:xfrm>
+          <a:prstGeom prst="rect">
+            <a:avLst/>
+          </a:prstGeom>
+          <a:noFill/>
+          <a:ln/>
+        </p:spPr>
+        <p:txBody>
+          <a:bodyPr wrap="square" lIns="0" tIns="0" rIns="0" bIns="0" rtlCol="0" anchor="ctr"/>
+          <a:lstStyle/>
+          <a:p>
+            <a:pPr algn="ctr" indent="0" marL="0">
+              <a:buNone/>
+            </a:pPr>
+            <a:r>
+              <a:rPr lang="en-US" sz="900" b="1" dirty="0">
+                <a:solidFill>
+                  <a:srgbClr val="9D174D"/>
+                </a:solidFill>
+                <a:latin typeface="Trebuchet MS" pitchFamily="34" charset="0"/>
+                <a:ea typeface="Trebuchet MS" pitchFamily="34" charset="-122"/>
+                <a:cs typeface="Trebuchet MS" pitchFamily="34" charset="-120"/>
+              </a:rPr>
+              <a:t>s</a:t>
             </a:r>
             <a:endParaRPr lang="en-US" sz="900" dirty="0"/>
           </a:p>
@@ -27247,7 +27451,7 @@
                 <a:ea typeface="Calibri" pitchFamily="34" charset="-122"/>
                 <a:cs typeface="Calibri" pitchFamily="34" charset="-120"/>
               </a:rPr>
-              <a:t>Word Labs  •  wordlabs.app  •  Root: 'stick' = to adhere, fasten, or pierce</a:t>
+              <a:t>Word Labs  •  wordlabs.app  •  Root: 'stick' = a thin piece of wood; to attach</a:t>
             </a:r>
             <a:endParaRPr lang="en-US" sz="800" dirty="0"/>
           </a:p>
@@ -27386,7 +27590,7 @@
                 <a:ea typeface="Trebuchet MS" pitchFamily="34" charset="-122"/>
                 <a:cs typeface="Trebuchet MS" pitchFamily="34" charset="-120"/>
               </a:rPr>
-              <a:t>chopstick</a:t>
+              <a:t>sticking</a:t>
             </a:r>
             <a:endParaRPr lang="en-US" sz="2800" dirty="0"/>
           </a:p>
@@ -28074,7 +28278,7 @@
                 <a:ea typeface="Calibri" pitchFamily="34" charset="-122"/>
                 <a:cs typeface="Calibri" pitchFamily="34" charset="-120"/>
               </a:rPr>
-              <a:t>Word Labs  •  wordlabs.app  •  Root: 'stick' = to adhere, fasten, or pierce</a:t>
+              <a:t>Word Labs  •  wordlabs.app  •  Root: 'stick' = a thin piece of wood; to attach</a:t>
             </a:r>
             <a:endParaRPr lang="en-US" sz="800" dirty="0"/>
           </a:p>
@@ -28213,7 +28417,7 @@
                 <a:ea typeface="Trebuchet MS" pitchFamily="34" charset="-122"/>
                 <a:cs typeface="Trebuchet MS" pitchFamily="34" charset="-120"/>
               </a:rPr>
-              <a:t>chopstick</a:t>
+              <a:t>sticking</a:t>
             </a:r>
             <a:endParaRPr lang="en-US" sz="2800" dirty="0"/>
           </a:p>
@@ -28302,11 +28506,11 @@
             </a:avLst>
           </a:prstGeom>
           <a:solidFill>
-            <a:srgbClr val="DDD6FE"/>
+            <a:srgbClr val="CCFBF1"/>
           </a:solidFill>
           <a:ln w="19050">
             <a:solidFill>
-              <a:srgbClr val="7C3AED"/>
+              <a:srgbClr val="0D9488"/>
             </a:solidFill>
             <a:prstDash val="solid"/>
           </a:ln>
@@ -28346,13 +28550,13 @@
             <a:r>
               <a:rPr lang="en-US" sz="1300" b="1" dirty="0">
                 <a:solidFill>
-                  <a:srgbClr val="4C1D95"/>
+                  <a:srgbClr val="0F766E"/>
                 </a:solidFill>
                 <a:latin typeface="Trebuchet MS" pitchFamily="34" charset="0"/>
                 <a:ea typeface="Trebuchet MS" pitchFamily="34" charset="-122"/>
                 <a:cs typeface="Trebuchet MS" pitchFamily="34" charset="-120"/>
               </a:rPr>
-              <a:t>chop</a:t>
+              <a:t>stick</a:t>
             </a:r>
             <a:endParaRPr lang="en-US" sz="1300" dirty="0"/>
           </a:p>
@@ -28391,7 +28595,7 @@
                 <a:ea typeface="Calibri" pitchFamily="34" charset="-122"/>
                 <a:cs typeface="Calibri" pitchFamily="34" charset="-120"/>
               </a:rPr>
-              <a:t>to cut or break</a:t>
+              <a:t>a thin piece of wood; to attach</a:t>
             </a:r>
             <a:endParaRPr lang="en-US" sz="850" dirty="0"/>
           </a:p>
@@ -28414,11 +28618,11 @@
             </a:avLst>
           </a:prstGeom>
           <a:solidFill>
-            <a:srgbClr val="CCFBF1"/>
+            <a:srgbClr val="FCE7F3"/>
           </a:solidFill>
           <a:ln w="19050">
             <a:solidFill>
-              <a:srgbClr val="0D9488"/>
+              <a:srgbClr val="DB2777"/>
             </a:solidFill>
             <a:prstDash val="solid"/>
           </a:ln>
@@ -28458,13 +28662,13 @@
             <a:r>
               <a:rPr lang="en-US" sz="1300" b="1" dirty="0">
                 <a:solidFill>
-                  <a:srgbClr val="0F766E"/>
+                  <a:srgbClr val="9D174D"/>
                 </a:solidFill>
                 <a:latin typeface="Trebuchet MS" pitchFamily="34" charset="0"/>
                 <a:ea typeface="Trebuchet MS" pitchFamily="34" charset="-122"/>
                 <a:cs typeface="Trebuchet MS" pitchFamily="34" charset="-120"/>
               </a:rPr>
-              <a:t>stick</a:t>
+              <a:t>ing</a:t>
             </a:r>
             <a:endParaRPr lang="en-US" sz="1300" dirty="0"/>
           </a:p>
@@ -28503,7 +28707,7 @@
                 <a:ea typeface="Calibri" pitchFamily="34" charset="-122"/>
                 <a:cs typeface="Calibri" pitchFamily="34" charset="-120"/>
               </a:rPr>
-              <a:t>a thin rod used to pick up food</a:t>
+              <a:t>happening now</a:t>
             </a:r>
             <a:endParaRPr lang="en-US" sz="850" dirty="0"/>
           </a:p>
@@ -29059,7 +29263,7 @@
                 <a:ea typeface="Calibri" pitchFamily="34" charset="-122"/>
                 <a:cs typeface="Calibri" pitchFamily="34" charset="-120"/>
               </a:rPr>
-              <a:t>Word Labs  •  wordlabs.app  •  Root: 'stick' = to adhere, fasten, or pierce</a:t>
+              <a:t>Word Labs  •  wordlabs.app  •  Root: 'stick' = a thin piece of wood; to attach</a:t>
             </a:r>
             <a:endParaRPr lang="en-US" sz="800" dirty="0"/>
           </a:p>
@@ -29198,7 +29402,7 @@
                 <a:ea typeface="Trebuchet MS" pitchFamily="34" charset="-122"/>
                 <a:cs typeface="Trebuchet MS" pitchFamily="34" charset="-120"/>
               </a:rPr>
-              <a:t>chopstick</a:t>
+              <a:t>sticking</a:t>
             </a:r>
             <a:endParaRPr lang="en-US" sz="2800" dirty="0"/>
           </a:p>
@@ -29287,11 +29491,11 @@
             </a:avLst>
           </a:prstGeom>
           <a:solidFill>
-            <a:srgbClr val="DDD6FE"/>
+            <a:srgbClr val="CCFBF1"/>
           </a:solidFill>
           <a:ln w="19050">
             <a:solidFill>
-              <a:srgbClr val="7C3AED"/>
+              <a:srgbClr val="0D9488"/>
             </a:solidFill>
             <a:prstDash val="solid"/>
           </a:ln>
@@ -29331,13 +29535,13 @@
             <a:r>
               <a:rPr lang="en-US" sz="1300" b="1" dirty="0">
                 <a:solidFill>
-                  <a:srgbClr val="4C1D95"/>
+                  <a:srgbClr val="0F766E"/>
                 </a:solidFill>
                 <a:latin typeface="Trebuchet MS" pitchFamily="34" charset="0"/>
                 <a:ea typeface="Trebuchet MS" pitchFamily="34" charset="-122"/>
                 <a:cs typeface="Trebuchet MS" pitchFamily="34" charset="-120"/>
               </a:rPr>
-              <a:t>chop</a:t>
+              <a:t>stick</a:t>
             </a:r>
             <a:endParaRPr lang="en-US" sz="1300" dirty="0"/>
           </a:p>
@@ -29376,7 +29580,7 @@
                 <a:ea typeface="Calibri" pitchFamily="34" charset="-122"/>
                 <a:cs typeface="Calibri" pitchFamily="34" charset="-120"/>
               </a:rPr>
-              <a:t>to cut or break</a:t>
+              <a:t>a thin piece of wood; to attach</a:t>
             </a:r>
             <a:endParaRPr lang="en-US" sz="850" dirty="0"/>
           </a:p>
@@ -29399,11 +29603,11 @@
             </a:avLst>
           </a:prstGeom>
           <a:solidFill>
-            <a:srgbClr val="CCFBF1"/>
+            <a:srgbClr val="FCE7F3"/>
           </a:solidFill>
           <a:ln w="19050">
             <a:solidFill>
-              <a:srgbClr val="0D9488"/>
+              <a:srgbClr val="DB2777"/>
             </a:solidFill>
             <a:prstDash val="solid"/>
           </a:ln>
@@ -29443,13 +29647,13 @@
             <a:r>
               <a:rPr lang="en-US" sz="1300" b="1" dirty="0">
                 <a:solidFill>
-                  <a:srgbClr val="0F766E"/>
+                  <a:srgbClr val="9D174D"/>
                 </a:solidFill>
                 <a:latin typeface="Trebuchet MS" pitchFamily="34" charset="0"/>
                 <a:ea typeface="Trebuchet MS" pitchFamily="34" charset="-122"/>
                 <a:cs typeface="Trebuchet MS" pitchFamily="34" charset="-120"/>
               </a:rPr>
-              <a:t>stick</a:t>
+              <a:t>ing</a:t>
             </a:r>
             <a:endParaRPr lang="en-US" sz="1300" dirty="0"/>
           </a:p>
@@ -29488,7 +29692,7 @@
                 <a:ea typeface="Calibri" pitchFamily="34" charset="-122"/>
                 <a:cs typeface="Calibri" pitchFamily="34" charset="-120"/>
               </a:rPr>
-              <a:t>a thin rod used to pick up food</a:t>
+              <a:t>happening now</a:t>
             </a:r>
             <a:endParaRPr lang="en-US" sz="850" dirty="0"/>
           </a:p>
@@ -29647,7 +29851,7 @@
                 <a:ea typeface="Trebuchet MS" pitchFamily="34" charset="-122"/>
                 <a:cs typeface="Trebuchet MS" pitchFamily="34" charset="-120"/>
               </a:rPr>
-              <a:t>chop</a:t>
+              <a:t>stick</a:t>
             </a:r>
             <a:endParaRPr lang="en-US" sz="1400" dirty="0"/>
           </a:p>
@@ -29752,7 +29956,7 @@
                 <a:ea typeface="Trebuchet MS" pitchFamily="34" charset="-122"/>
                 <a:cs typeface="Trebuchet MS" pitchFamily="34" charset="-120"/>
               </a:rPr>
-              <a:t>stick</a:t>
+              <a:t>ing</a:t>
             </a:r>
             <a:endParaRPr lang="en-US" sz="1400" dirty="0"/>
           </a:p>
@@ -30176,7 +30380,7 @@
                 <a:ea typeface="Calibri" pitchFamily="34" charset="-122"/>
                 <a:cs typeface="Calibri" pitchFamily="34" charset="-120"/>
               </a:rPr>
-              <a:t>Word Labs  •  wordlabs.app  •  Root: 'stick' = to adhere, fasten, or pierce</a:t>
+              <a:t>Word Labs  •  wordlabs.app  •  Root: 'stick' = a thin piece of wood; to attach</a:t>
             </a:r>
             <a:endParaRPr lang="en-US" sz="800" dirty="0"/>
           </a:p>
@@ -30315,7 +30519,7 @@
                 <a:ea typeface="Trebuchet MS" pitchFamily="34" charset="-122"/>
                 <a:cs typeface="Trebuchet MS" pitchFamily="34" charset="-120"/>
               </a:rPr>
-              <a:t>chopstick</a:t>
+              <a:t>sticking</a:t>
             </a:r>
             <a:endParaRPr lang="en-US" sz="2800" dirty="0"/>
           </a:p>
@@ -30404,11 +30608,11 @@
             </a:avLst>
           </a:prstGeom>
           <a:solidFill>
-            <a:srgbClr val="DDD6FE"/>
+            <a:srgbClr val="CCFBF1"/>
           </a:solidFill>
           <a:ln w="19050">
             <a:solidFill>
-              <a:srgbClr val="7C3AED"/>
+              <a:srgbClr val="0D9488"/>
             </a:solidFill>
             <a:prstDash val="solid"/>
           </a:ln>
@@ -30448,13 +30652,13 @@
             <a:r>
               <a:rPr lang="en-US" sz="1300" b="1" dirty="0">
                 <a:solidFill>
-                  <a:srgbClr val="4C1D95"/>
+                  <a:srgbClr val="0F766E"/>
                 </a:solidFill>
                 <a:latin typeface="Trebuchet MS" pitchFamily="34" charset="0"/>
                 <a:ea typeface="Trebuchet MS" pitchFamily="34" charset="-122"/>
                 <a:cs typeface="Trebuchet MS" pitchFamily="34" charset="-120"/>
               </a:rPr>
-              <a:t>chop</a:t>
+              <a:t>stick</a:t>
             </a:r>
             <a:endParaRPr lang="en-US" sz="1300" dirty="0"/>
           </a:p>
@@ -30493,7 +30697,7 @@
                 <a:ea typeface="Calibri" pitchFamily="34" charset="-122"/>
                 <a:cs typeface="Calibri" pitchFamily="34" charset="-120"/>
               </a:rPr>
-              <a:t>to cut or break</a:t>
+              <a:t>a thin piece of wood; to attach</a:t>
             </a:r>
             <a:endParaRPr lang="en-US" sz="850" dirty="0"/>
           </a:p>
@@ -30516,11 +30720,11 @@
             </a:avLst>
           </a:prstGeom>
           <a:solidFill>
-            <a:srgbClr val="CCFBF1"/>
+            <a:srgbClr val="FCE7F3"/>
           </a:solidFill>
           <a:ln w="19050">
             <a:solidFill>
-              <a:srgbClr val="0D9488"/>
+              <a:srgbClr val="DB2777"/>
             </a:solidFill>
             <a:prstDash val="solid"/>
           </a:ln>
@@ -30560,13 +30764,13 @@
             <a:r>
               <a:rPr lang="en-US" sz="1300" b="1" dirty="0">
                 <a:solidFill>
-                  <a:srgbClr val="0F766E"/>
+                  <a:srgbClr val="9D174D"/>
                 </a:solidFill>
                 <a:latin typeface="Trebuchet MS" pitchFamily="34" charset="0"/>
                 <a:ea typeface="Trebuchet MS" pitchFamily="34" charset="-122"/>
                 <a:cs typeface="Trebuchet MS" pitchFamily="34" charset="-120"/>
               </a:rPr>
-              <a:t>stick</a:t>
+              <a:t>ing</a:t>
             </a:r>
             <a:endParaRPr lang="en-US" sz="1300" dirty="0"/>
           </a:p>
@@ -30605,7 +30809,7 @@
                 <a:ea typeface="Calibri" pitchFamily="34" charset="-122"/>
                 <a:cs typeface="Calibri" pitchFamily="34" charset="-120"/>
               </a:rPr>
-              <a:t>a thin rod used to pick up food</a:t>
+              <a:t>happening now</a:t>
             </a:r>
             <a:endParaRPr lang="en-US" sz="850" dirty="0"/>
           </a:p>
@@ -30764,7 +30968,7 @@
                 <a:ea typeface="Trebuchet MS" pitchFamily="34" charset="-122"/>
                 <a:cs typeface="Trebuchet MS" pitchFamily="34" charset="-120"/>
               </a:rPr>
-              <a:t>chop</a:t>
+              <a:t>stick</a:t>
             </a:r>
             <a:endParaRPr lang="en-US" sz="1400" dirty="0"/>
           </a:p>
@@ -30869,7 +31073,7 @@
                 <a:ea typeface="Trebuchet MS" pitchFamily="34" charset="-122"/>
                 <a:cs typeface="Trebuchet MS" pitchFamily="34" charset="-120"/>
               </a:rPr>
-              <a:t>stick</a:t>
+              <a:t>ing</a:t>
             </a:r>
             <a:endParaRPr lang="en-US" sz="1400" dirty="0"/>
           </a:p>
@@ -30976,7 +31180,7 @@
         </p:nvSpPr>
         <p:spPr>
           <a:xfrm>
-            <a:off x="2124837" y="4169664"/>
+            <a:off x="2254649" y="4169664"/>
             <a:ext cx="685800" cy="475488"/>
           </a:xfrm>
           <a:prstGeom prst="rect">
@@ -31003,7 +31207,7 @@
         </p:nvSpPr>
         <p:spPr>
           <a:xfrm>
-            <a:off x="2124837" y="4169664"/>
+            <a:off x="2254649" y="4169664"/>
             <a:ext cx="685800" cy="475488"/>
           </a:xfrm>
           <a:prstGeom prst="rect">
@@ -31028,7 +31232,7 @@
                 <a:ea typeface="Trebuchet MS" pitchFamily="34" charset="-122"/>
                 <a:cs typeface="Trebuchet MS" pitchFamily="34" charset="-120"/>
               </a:rPr>
-              <a:t>ch</a:t>
+              <a:t>s</a:t>
             </a:r>
             <a:endParaRPr lang="en-US" sz="900" dirty="0"/>
           </a:p>
@@ -31042,7 +31246,7 @@
         </p:nvSpPr>
         <p:spPr>
           <a:xfrm>
-            <a:off x="3033522" y="4169664"/>
+            <a:off x="3293146" y="4169664"/>
             <a:ext cx="685800" cy="475488"/>
           </a:xfrm>
           <a:prstGeom prst="rect">
@@ -31069,7 +31273,7 @@
         </p:nvSpPr>
         <p:spPr>
           <a:xfrm>
-            <a:off x="3033522" y="4169664"/>
+            <a:off x="3293146" y="4169664"/>
             <a:ext cx="685800" cy="475488"/>
           </a:xfrm>
           <a:prstGeom prst="rect">
@@ -31094,7 +31298,7 @@
                 <a:ea typeface="Trebuchet MS" pitchFamily="34" charset="-122"/>
                 <a:cs typeface="Trebuchet MS" pitchFamily="34" charset="-120"/>
               </a:rPr>
-              <a:t>o</a:t>
+              <a:t>t</a:t>
             </a:r>
             <a:endParaRPr lang="en-US" sz="900" dirty="0"/>
           </a:p>
@@ -31108,7 +31312,7 @@
         </p:nvSpPr>
         <p:spPr>
           <a:xfrm>
-            <a:off x="3942207" y="4169664"/>
+            <a:off x="4331643" y="4169664"/>
             <a:ext cx="685800" cy="475488"/>
           </a:xfrm>
           <a:prstGeom prst="rect">
@@ -31135,7 +31339,7 @@
         </p:nvSpPr>
         <p:spPr>
           <a:xfrm>
-            <a:off x="3942207" y="4169664"/>
+            <a:off x="4331643" y="4169664"/>
             <a:ext cx="685800" cy="475488"/>
           </a:xfrm>
           <a:prstGeom prst="rect">
@@ -31160,7 +31364,7 @@
                 <a:ea typeface="Trebuchet MS" pitchFamily="34" charset="-122"/>
                 <a:cs typeface="Trebuchet MS" pitchFamily="34" charset="-120"/>
               </a:rPr>
-              <a:t>p</a:t>
+              <a:t>i</a:t>
             </a:r>
             <a:endParaRPr lang="en-US" sz="900" dirty="0"/>
           </a:p>
@@ -31174,7 +31378,7 @@
         </p:nvSpPr>
         <p:spPr>
           <a:xfrm>
-            <a:off x="4850892" y="4169664"/>
+            <a:off x="5370141" y="4169664"/>
             <a:ext cx="685800" cy="475488"/>
           </a:xfrm>
           <a:prstGeom prst="rect">
@@ -31201,7 +31405,7 @@
         </p:nvSpPr>
         <p:spPr>
           <a:xfrm>
-            <a:off x="4850892" y="4169664"/>
+            <a:off x="5370141" y="4169664"/>
             <a:ext cx="685800" cy="475488"/>
           </a:xfrm>
           <a:prstGeom prst="rect">
@@ -31226,7 +31430,7 @@
                 <a:ea typeface="Trebuchet MS" pitchFamily="34" charset="-122"/>
                 <a:cs typeface="Trebuchet MS" pitchFamily="34" charset="-120"/>
               </a:rPr>
-              <a:t>s</a:t>
+              <a:t>ck</a:t>
             </a:r>
             <a:endParaRPr lang="en-US" sz="900" dirty="0"/>
           </a:p>
@@ -31240,7 +31444,7 @@
         </p:nvSpPr>
         <p:spPr>
           <a:xfrm>
-            <a:off x="5759577" y="4169664"/>
+            <a:off x="6408638" y="4169664"/>
             <a:ext cx="685800" cy="475488"/>
           </a:xfrm>
           <a:prstGeom prst="rect">
@@ -31267,7 +31471,7 @@
         </p:nvSpPr>
         <p:spPr>
           <a:xfrm>
-            <a:off x="5759577" y="4169664"/>
+            <a:off x="6408638" y="4169664"/>
             <a:ext cx="685800" cy="475488"/>
           </a:xfrm>
           <a:prstGeom prst="rect">
@@ -31292,7 +31496,7 @@
                 <a:ea typeface="Trebuchet MS" pitchFamily="34" charset="-122"/>
                 <a:cs typeface="Trebuchet MS" pitchFamily="34" charset="-120"/>
               </a:rPr>
-              <a:t>t</a:t>
+              <a:t>i</a:t>
             </a:r>
             <a:endParaRPr lang="en-US" sz="900" dirty="0"/>
           </a:p>
@@ -31306,7 +31510,7 @@
         </p:nvSpPr>
         <p:spPr>
           <a:xfrm>
-            <a:off x="6668262" y="4169664"/>
+            <a:off x="7447135" y="4169664"/>
             <a:ext cx="685800" cy="475488"/>
           </a:xfrm>
           <a:prstGeom prst="rect">
@@ -31333,7 +31537,7 @@
         </p:nvSpPr>
         <p:spPr>
           <a:xfrm>
-            <a:off x="6668262" y="4169664"/>
+            <a:off x="7447135" y="4169664"/>
             <a:ext cx="685800" cy="475488"/>
           </a:xfrm>
           <a:prstGeom prst="rect">
@@ -31358,73 +31562,7 @@
                 <a:ea typeface="Trebuchet MS" pitchFamily="34" charset="-122"/>
                 <a:cs typeface="Trebuchet MS" pitchFamily="34" charset="-120"/>
               </a:rPr>
-              <a:t>i</a:t>
-            </a:r>
-            <a:endParaRPr lang="en-US" sz="900" dirty="0"/>
-          </a:p>
-        </p:txBody>
-      </p:sp>
-      <p:sp>
-        <p:nvSpPr>
-          <p:cNvPr id="45" name="Shape 43"/>
-          <p:cNvSpPr/>
-          <p:nvPr/>
-        </p:nvSpPr>
-        <p:spPr>
-          <a:xfrm>
-            <a:off x="7576947" y="4169664"/>
-            <a:ext cx="685800" cy="475488"/>
-          </a:xfrm>
-          <a:prstGeom prst="rect">
-            <a:avLst>
-              <a:gd name="adj" fmla="val 7692"/>
-            </a:avLst>
-          </a:prstGeom>
-          <a:solidFill>
-            <a:srgbClr val="FFFFFF"/>
-          </a:solidFill>
-          <a:ln w="12700">
-            <a:solidFill>
-              <a:srgbClr val="DB2777"/>
-            </a:solidFill>
-            <a:prstDash val="solid"/>
-          </a:ln>
-        </p:spPr>
-      </p:sp>
-      <p:sp>
-        <p:nvSpPr>
-          <p:cNvPr id="46" name="Text 44"/>
-          <p:cNvSpPr/>
-          <p:nvPr/>
-        </p:nvSpPr>
-        <p:spPr>
-          <a:xfrm>
-            <a:off x="7576947" y="4169664"/>
-            <a:ext cx="685800" cy="475488"/>
-          </a:xfrm>
-          <a:prstGeom prst="rect">
-            <a:avLst/>
-          </a:prstGeom>
-          <a:noFill/>
-          <a:ln/>
-        </p:spPr>
-        <p:txBody>
-          <a:bodyPr wrap="square" lIns="0" tIns="0" rIns="0" bIns="0" rtlCol="0" anchor="ctr"/>
-          <a:lstStyle/>
-          <a:p>
-            <a:pPr algn="ctr" indent="0" marL="0">
-              <a:buNone/>
-            </a:pPr>
-            <a:r>
-              <a:rPr lang="en-US" sz="900" b="1" dirty="0">
-                <a:solidFill>
-                  <a:srgbClr val="9D174D"/>
-                </a:solidFill>
-                <a:latin typeface="Trebuchet MS" pitchFamily="34" charset="0"/>
-                <a:ea typeface="Trebuchet MS" pitchFamily="34" charset="-122"/>
-                <a:cs typeface="Trebuchet MS" pitchFamily="34" charset="-120"/>
-              </a:rPr>
-              <a:t>ck</a:t>
+              <a:t>ng</a:t>
             </a:r>
             <a:endParaRPr lang="en-US" sz="900" dirty="0"/>
           </a:p>
@@ -31716,7 +31854,7 @@
                 <a:ea typeface="Calibri" pitchFamily="34" charset="-122"/>
                 <a:cs typeface="Calibri" pitchFamily="34" charset="-120"/>
               </a:rPr>
-              <a:t>Word Labs  •  wordlabs.app  •  Root: 'stick' = to adhere, fasten, or pierce</a:t>
+              <a:t>Word Labs  •  wordlabs.app  •  Root: 'stick' = a thin piece of wood; to attach</a:t>
             </a:r>
             <a:endParaRPr lang="en-US" sz="800" dirty="0"/>
           </a:p>
@@ -32885,7 +33023,7 @@
                 <a:ea typeface="Calibri" pitchFamily="34" charset="-122"/>
                 <a:cs typeface="Calibri" pitchFamily="34" charset="-120"/>
               </a:rPr>
-              <a:t>Word Labs  •  wordlabs.app  •  Root: 'stick' = to adhere, fasten, or pierce</a:t>
+              <a:t>Word Labs  •  wordlabs.app  •  Root: 'stick' = a thin piece of wood; to attach</a:t>
             </a:r>
             <a:endParaRPr lang="en-US" sz="800" dirty="0"/>
           </a:p>
@@ -33186,7 +33324,7 @@
                 <a:ea typeface="Trebuchet MS" pitchFamily="34" charset="-122"/>
                 <a:cs typeface="Trebuchet MS" pitchFamily="34" charset="-120"/>
               </a:rPr>
-              <a:t>lip-</a:t>
+              <a:t>non-</a:t>
             </a:r>
             <a:endParaRPr lang="en-US" sz="1300" dirty="0"/>
           </a:p>
@@ -33314,7 +33452,7 @@
                 <a:ea typeface="Trebuchet MS" pitchFamily="34" charset="-122"/>
                 <a:cs typeface="Trebuchet MS" pitchFamily="34" charset="-120"/>
               </a:rPr>
-              <a:t>--er</a:t>
+              <a:t>-er</a:t>
             </a:r>
             <a:endParaRPr lang="en-US" sz="1300" dirty="0"/>
           </a:p>
@@ -33335,7 +33473,7 @@
             <a:avLst/>
           </a:prstGeom>
           <a:solidFill>
-            <a:srgbClr val="DDD6FE"/>
+            <a:srgbClr val="F1F5F9"/>
           </a:solidFill>
           <a:ln w="12700">
             <a:solidFill>
@@ -33347,14 +33485,64 @@
       </p:sp>
       <p:sp>
         <p:nvSpPr>
-          <p:cNvPr id="24" name="Text 22"/>
-          <p:cNvSpPr/>
-          <p:nvPr/>
-        </p:nvSpPr>
-        <p:spPr>
-          <a:xfrm>
-            <a:off x="365760" y="1984248"/>
-            <a:ext cx="2468880" cy="402336"/>
+          <p:cNvPr id="24" name="Shape 22"/>
+          <p:cNvSpPr/>
+          <p:nvPr/>
+        </p:nvSpPr>
+        <p:spPr>
+          <a:xfrm>
+            <a:off x="2971800" y="1984248"/>
+            <a:ext cx="2834640" cy="402336"/>
+          </a:xfrm>
+          <a:prstGeom prst="rect">
+            <a:avLst/>
+          </a:prstGeom>
+          <a:solidFill>
+            <a:srgbClr val="F1F5F9"/>
+          </a:solidFill>
+          <a:ln w="12700">
+            <a:solidFill>
+              <a:srgbClr val="E2E8F0"/>
+            </a:solidFill>
+            <a:prstDash val="solid"/>
+          </a:ln>
+        </p:spPr>
+      </p:sp>
+      <p:sp>
+        <p:nvSpPr>
+          <p:cNvPr id="25" name="Shape 23"/>
+          <p:cNvSpPr/>
+          <p:nvPr/>
+        </p:nvSpPr>
+        <p:spPr>
+          <a:xfrm>
+            <a:off x="5943600" y="1984248"/>
+            <a:ext cx="2834640" cy="402336"/>
+          </a:xfrm>
+          <a:prstGeom prst="rect">
+            <a:avLst/>
+          </a:prstGeom>
+          <a:solidFill>
+            <a:srgbClr val="FCE7F3"/>
+          </a:solidFill>
+          <a:ln w="12700">
+            <a:solidFill>
+              <a:srgbClr val="E2E8F0"/>
+            </a:solidFill>
+            <a:prstDash val="solid"/>
+          </a:ln>
+        </p:spPr>
+      </p:sp>
+      <p:sp>
+        <p:nvSpPr>
+          <p:cNvPr id="26" name="Text 24"/>
+          <p:cNvSpPr/>
+          <p:nvPr/>
+        </p:nvSpPr>
+        <p:spPr>
+          <a:xfrm>
+            <a:off x="5943600" y="1984248"/>
+            <a:ext cx="2834640" cy="402336"/>
           </a:xfrm>
           <a:prstGeom prst="rect">
             <a:avLst/>
@@ -33372,13 +33560,13 @@
             <a:r>
               <a:rPr lang="en-US" sz="1300" b="1" dirty="0">
                 <a:solidFill>
-                  <a:srgbClr val="4C1D95"/>
+                  <a:srgbClr val="9D174D"/>
                 </a:solidFill>
                 <a:latin typeface="Trebuchet MS" pitchFamily="34" charset="0"/>
                 <a:ea typeface="Trebuchet MS" pitchFamily="34" charset="-122"/>
                 <a:cs typeface="Trebuchet MS" pitchFamily="34" charset="-120"/>
               </a:rPr>
-              <a:t>chop-</a:t>
+              <a:t>-ing</a:t>
             </a:r>
             <a:endParaRPr lang="en-US" sz="1300" dirty="0"/>
           </a:p>
@@ -33386,20 +33574,45 @@
       </p:sp>
       <p:sp>
         <p:nvSpPr>
-          <p:cNvPr id="25" name="Shape 23"/>
-          <p:cNvSpPr/>
-          <p:nvPr/>
-        </p:nvSpPr>
-        <p:spPr>
-          <a:xfrm>
-            <a:off x="2971800" y="1984248"/>
+          <p:cNvPr id="27" name="Shape 25"/>
+          <p:cNvSpPr/>
+          <p:nvPr/>
+        </p:nvSpPr>
+        <p:spPr>
+          <a:xfrm>
+            <a:off x="365760" y="2404872"/>
+            <a:ext cx="2468880" cy="402336"/>
+          </a:xfrm>
+          <a:prstGeom prst="rect">
+            <a:avLst/>
+          </a:prstGeom>
+          <a:solidFill>
+            <a:srgbClr val="F8FAFC"/>
+          </a:solidFill>
+          <a:ln w="12700">
+            <a:solidFill>
+              <a:srgbClr val="E2E8F0"/>
+            </a:solidFill>
+            <a:prstDash val="solid"/>
+          </a:ln>
+        </p:spPr>
+      </p:sp>
+      <p:sp>
+        <p:nvSpPr>
+          <p:cNvPr id="28" name="Shape 26"/>
+          <p:cNvSpPr/>
+          <p:nvPr/>
+        </p:nvSpPr>
+        <p:spPr>
+          <a:xfrm>
+            <a:off x="2971800" y="2404872"/>
             <a:ext cx="2834640" cy="402336"/>
           </a:xfrm>
           <a:prstGeom prst="rect">
             <a:avLst/>
           </a:prstGeom>
           <a:solidFill>
-            <a:srgbClr val="F1F5F9"/>
+            <a:srgbClr val="F8FAFC"/>
           </a:solidFill>
           <a:ln w="12700">
             <a:solidFill>
@@ -33411,13 +33624,13 @@
       </p:sp>
       <p:sp>
         <p:nvSpPr>
-          <p:cNvPr id="26" name="Shape 24"/>
-          <p:cNvSpPr/>
-          <p:nvPr/>
-        </p:nvSpPr>
-        <p:spPr>
-          <a:xfrm>
-            <a:off x="5943600" y="1984248"/>
+          <p:cNvPr id="29" name="Shape 27"/>
+          <p:cNvSpPr/>
+          <p:nvPr/>
+        </p:nvSpPr>
+        <p:spPr>
+          <a:xfrm>
+            <a:off x="5943600" y="2404872"/>
             <a:ext cx="2834640" cy="402336"/>
           </a:xfrm>
           <a:prstGeom prst="rect">
@@ -33436,13 +33649,13 @@
       </p:sp>
       <p:sp>
         <p:nvSpPr>
-          <p:cNvPr id="27" name="Text 25"/>
-          <p:cNvSpPr/>
-          <p:nvPr/>
-        </p:nvSpPr>
-        <p:spPr>
-          <a:xfrm>
-            <a:off x="5943600" y="1984248"/>
+          <p:cNvPr id="30" name="Text 28"/>
+          <p:cNvSpPr/>
+          <p:nvPr/>
+        </p:nvSpPr>
+        <p:spPr>
+          <a:xfrm>
+            <a:off x="5943600" y="2404872"/>
             <a:ext cx="2834640" cy="402336"/>
           </a:xfrm>
           <a:prstGeom prst="rect">
@@ -33467,7 +33680,7 @@
                 <a:ea typeface="Trebuchet MS" pitchFamily="34" charset="-122"/>
                 <a:cs typeface="Trebuchet MS" pitchFamily="34" charset="-120"/>
               </a:rPr>
-              <a:t>--ing</a:t>
+              <a:t>-s</a:t>
             </a:r>
             <a:endParaRPr lang="en-US" sz="1300" dirty="0"/>
           </a:p>
@@ -33475,20 +33688,20 @@
       </p:sp>
       <p:sp>
         <p:nvSpPr>
-          <p:cNvPr id="28" name="Shape 26"/>
-          <p:cNvSpPr/>
-          <p:nvPr/>
-        </p:nvSpPr>
-        <p:spPr>
-          <a:xfrm>
-            <a:off x="365760" y="2404872"/>
+          <p:cNvPr id="31" name="Shape 29"/>
+          <p:cNvSpPr/>
+          <p:nvPr/>
+        </p:nvSpPr>
+        <p:spPr>
+          <a:xfrm>
+            <a:off x="365760" y="2825496"/>
             <a:ext cx="2468880" cy="402336"/>
           </a:xfrm>
           <a:prstGeom prst="rect">
             <a:avLst/>
           </a:prstGeom>
           <a:solidFill>
-            <a:srgbClr val="DDD6FE"/>
+            <a:srgbClr val="F1F5F9"/>
           </a:solidFill>
           <a:ln w="12700">
             <a:solidFill>
@@ -33500,14 +33713,64 @@
       </p:sp>
       <p:sp>
         <p:nvSpPr>
-          <p:cNvPr id="29" name="Text 27"/>
-          <p:cNvSpPr/>
-          <p:nvPr/>
-        </p:nvSpPr>
-        <p:spPr>
-          <a:xfrm>
-            <a:off x="365760" y="2404872"/>
-            <a:ext cx="2468880" cy="402336"/>
+          <p:cNvPr id="32" name="Shape 30"/>
+          <p:cNvSpPr/>
+          <p:nvPr/>
+        </p:nvSpPr>
+        <p:spPr>
+          <a:xfrm>
+            <a:off x="2971800" y="2825496"/>
+            <a:ext cx="2834640" cy="402336"/>
+          </a:xfrm>
+          <a:prstGeom prst="rect">
+            <a:avLst/>
+          </a:prstGeom>
+          <a:solidFill>
+            <a:srgbClr val="F1F5F9"/>
+          </a:solidFill>
+          <a:ln w="12700">
+            <a:solidFill>
+              <a:srgbClr val="E2E8F0"/>
+            </a:solidFill>
+            <a:prstDash val="solid"/>
+          </a:ln>
+        </p:spPr>
+      </p:sp>
+      <p:sp>
+        <p:nvSpPr>
+          <p:cNvPr id="33" name="Shape 31"/>
+          <p:cNvSpPr/>
+          <p:nvPr/>
+        </p:nvSpPr>
+        <p:spPr>
+          <a:xfrm>
+            <a:off x="5943600" y="2825496"/>
+            <a:ext cx="2834640" cy="402336"/>
+          </a:xfrm>
+          <a:prstGeom prst="rect">
+            <a:avLst/>
+          </a:prstGeom>
+          <a:solidFill>
+            <a:srgbClr val="FCE7F3"/>
+          </a:solidFill>
+          <a:ln w="12700">
+            <a:solidFill>
+              <a:srgbClr val="E2E8F0"/>
+            </a:solidFill>
+            <a:prstDash val="solid"/>
+          </a:ln>
+        </p:spPr>
+      </p:sp>
+      <p:sp>
+        <p:nvSpPr>
+          <p:cNvPr id="34" name="Text 32"/>
+          <p:cNvSpPr/>
+          <p:nvPr/>
+        </p:nvSpPr>
+        <p:spPr>
+          <a:xfrm>
+            <a:off x="5943600" y="2825496"/>
+            <a:ext cx="2834640" cy="402336"/>
           </a:xfrm>
           <a:prstGeom prst="rect">
             <a:avLst/>
@@ -33525,13 +33788,13 @@
             <a:r>
               <a:rPr lang="en-US" sz="1300" b="1" dirty="0">
                 <a:solidFill>
-                  <a:srgbClr val="4C1D95"/>
+                  <a:srgbClr val="9D174D"/>
                 </a:solidFill>
                 <a:latin typeface="Trebuchet MS" pitchFamily="34" charset="0"/>
                 <a:ea typeface="Trebuchet MS" pitchFamily="34" charset="-122"/>
                 <a:cs typeface="Trebuchet MS" pitchFamily="34" charset="-120"/>
               </a:rPr>
-              <a:t>drum-</a:t>
+              <a:t>-y</a:t>
             </a:r>
             <a:endParaRPr lang="en-US" sz="1300" dirty="0"/>
           </a:p>
@@ -33539,64 +33802,14 @@
       </p:sp>
       <p:sp>
         <p:nvSpPr>
-          <p:cNvPr id="30" name="Shape 28"/>
-          <p:cNvSpPr/>
-          <p:nvPr/>
-        </p:nvSpPr>
-        <p:spPr>
-          <a:xfrm>
-            <a:off x="2971800" y="2404872"/>
-            <a:ext cx="2834640" cy="402336"/>
-          </a:xfrm>
-          <a:prstGeom prst="rect">
-            <a:avLst/>
-          </a:prstGeom>
-          <a:solidFill>
-            <a:srgbClr val="F8FAFC"/>
-          </a:solidFill>
-          <a:ln w="12700">
-            <a:solidFill>
-              <a:srgbClr val="E2E8F0"/>
-            </a:solidFill>
-            <a:prstDash val="solid"/>
-          </a:ln>
-        </p:spPr>
-      </p:sp>
-      <p:sp>
-        <p:nvSpPr>
-          <p:cNvPr id="31" name="Shape 29"/>
-          <p:cNvSpPr/>
-          <p:nvPr/>
-        </p:nvSpPr>
-        <p:spPr>
-          <a:xfrm>
-            <a:off x="5943600" y="2404872"/>
-            <a:ext cx="2834640" cy="402336"/>
-          </a:xfrm>
-          <a:prstGeom prst="rect">
-            <a:avLst/>
-          </a:prstGeom>
-          <a:solidFill>
-            <a:srgbClr val="FCE7F3"/>
-          </a:solidFill>
-          <a:ln w="12700">
-            <a:solidFill>
-              <a:srgbClr val="E2E8F0"/>
-            </a:solidFill>
-            <a:prstDash val="solid"/>
-          </a:ln>
-        </p:spPr>
-      </p:sp>
-      <p:sp>
-        <p:nvSpPr>
-          <p:cNvPr id="32" name="Text 30"/>
-          <p:cNvSpPr/>
-          <p:nvPr/>
-        </p:nvSpPr>
-        <p:spPr>
-          <a:xfrm>
-            <a:off x="5943600" y="2404872"/>
-            <a:ext cx="2834640" cy="402336"/>
+          <p:cNvPr id="35" name="Text 33"/>
+          <p:cNvSpPr/>
+          <p:nvPr/>
+        </p:nvSpPr>
+        <p:spPr>
+          <a:xfrm>
+            <a:off x="365760" y="3611880"/>
+            <a:ext cx="1828800" cy="347472"/>
           </a:xfrm>
           <a:prstGeom prst="rect">
             <a:avLst/>
@@ -33608,59 +33821,61 @@
           <a:bodyPr wrap="square" lIns="0" tIns="0" rIns="0" bIns="0" rtlCol="0" anchor="ctr"/>
           <a:lstStyle/>
           <a:p>
-            <a:pPr algn="ctr" indent="0" marL="0">
-              <a:buNone/>
-            </a:pPr>
-            <a:r>
-              <a:rPr lang="en-US" sz="1300" b="1" dirty="0">
-                <a:solidFill>
-                  <a:srgbClr val="9D174D"/>
+            <a:pPr algn="l" indent="0" marL="0">
+              <a:buNone/>
+            </a:pPr>
+            <a:r>
+              <a:rPr lang="en-US" sz="1200" b="1" dirty="0">
+                <a:solidFill>
+                  <a:srgbClr val="0F172A"/>
                 </a:solidFill>
                 <a:latin typeface="Trebuchet MS" pitchFamily="34" charset="0"/>
                 <a:ea typeface="Trebuchet MS" pitchFamily="34" charset="-122"/>
                 <a:cs typeface="Trebuchet MS" pitchFamily="34" charset="-120"/>
               </a:rPr>
-              <a:t>--y</a:t>
-            </a:r>
-            <a:endParaRPr lang="en-US" sz="1300" dirty="0"/>
-          </a:p>
-        </p:txBody>
-      </p:sp>
-      <p:sp>
-        <p:nvSpPr>
-          <p:cNvPr id="33" name="Shape 31"/>
-          <p:cNvSpPr/>
-          <p:nvPr/>
-        </p:nvSpPr>
-        <p:spPr>
-          <a:xfrm>
-            <a:off x="365760" y="2825496"/>
-            <a:ext cx="2468880" cy="402336"/>
-          </a:xfrm>
-          <a:prstGeom prst="rect">
-            <a:avLst/>
-          </a:prstGeom>
-          <a:solidFill>
-            <a:srgbClr val="DDD6FE"/>
-          </a:solidFill>
-          <a:ln w="12700">
-            <a:solidFill>
-              <a:srgbClr val="E2E8F0"/>
-            </a:solidFill>
-            <a:prstDash val="solid"/>
-          </a:ln>
-        </p:spPr>
-      </p:sp>
-      <p:sp>
-        <p:nvSpPr>
-          <p:cNvPr id="34" name="Text 32"/>
-          <p:cNvSpPr/>
-          <p:nvPr/>
-        </p:nvSpPr>
-        <p:spPr>
-          <a:xfrm>
-            <a:off x="365760" y="2825496"/>
-            <a:ext cx="2468880" cy="402336"/>
+              <a:t>Sample words:</a:t>
+            </a:r>
+            <a:endParaRPr lang="en-US" sz="1200" dirty="0"/>
+          </a:p>
+        </p:txBody>
+      </p:sp>
+      <p:sp>
+        <p:nvSpPr>
+          <p:cNvPr id="36" name="Shape 34"/>
+          <p:cNvSpPr/>
+          <p:nvPr/>
+        </p:nvSpPr>
+        <p:spPr>
+          <a:xfrm>
+            <a:off x="365760" y="4023360"/>
+            <a:ext cx="2011680" cy="402336"/>
+          </a:xfrm>
+          <a:prstGeom prst="rect">
+            <a:avLst>
+              <a:gd name="adj" fmla="val 13636"/>
+            </a:avLst>
+          </a:prstGeom>
+          <a:solidFill>
+            <a:srgbClr val="EEF2FF"/>
+          </a:solidFill>
+          <a:ln w="12700">
+            <a:solidFill>
+              <a:srgbClr val="6366F1"/>
+            </a:solidFill>
+            <a:prstDash val="solid"/>
+          </a:ln>
+        </p:spPr>
+      </p:sp>
+      <p:sp>
+        <p:nvSpPr>
+          <p:cNvPr id="37" name="Text 35"/>
+          <p:cNvSpPr/>
+          <p:nvPr/>
+        </p:nvSpPr>
+        <p:spPr>
+          <a:xfrm>
+            <a:off x="365760" y="4023360"/>
+            <a:ext cx="2011680" cy="402336"/>
           </a:xfrm>
           <a:prstGeom prst="rect">
             <a:avLst/>
@@ -33676,80 +33891,57 @@
               <a:buNone/>
             </a:pPr>
             <a:r>
-              <a:rPr lang="en-US" sz="1300" b="1" dirty="0">
-                <a:solidFill>
-                  <a:srgbClr val="4C1D95"/>
+              <a:rPr lang="en-US" sz="1200" b="1" dirty="0">
+                <a:solidFill>
+                  <a:srgbClr val="4338CA"/>
                 </a:solidFill>
                 <a:latin typeface="Trebuchet MS" pitchFamily="34" charset="0"/>
                 <a:ea typeface="Trebuchet MS" pitchFamily="34" charset="-122"/>
                 <a:cs typeface="Trebuchet MS" pitchFamily="34" charset="-120"/>
               </a:rPr>
-              <a:t>non-</a:t>
-            </a:r>
-            <a:endParaRPr lang="en-US" sz="1300" dirty="0"/>
-          </a:p>
-        </p:txBody>
-      </p:sp>
-      <p:sp>
-        <p:nvSpPr>
-          <p:cNvPr id="35" name="Shape 33"/>
-          <p:cNvSpPr/>
-          <p:nvPr/>
-        </p:nvSpPr>
-        <p:spPr>
-          <a:xfrm>
-            <a:off x="2971800" y="2825496"/>
-            <a:ext cx="2834640" cy="402336"/>
-          </a:xfrm>
-          <a:prstGeom prst="rect">
-            <a:avLst/>
-          </a:prstGeom>
-          <a:solidFill>
-            <a:srgbClr val="F1F5F9"/>
-          </a:solidFill>
-          <a:ln w="12700">
-            <a:solidFill>
-              <a:srgbClr val="E2E8F0"/>
-            </a:solidFill>
-            <a:prstDash val="solid"/>
-          </a:ln>
-        </p:spPr>
-      </p:sp>
-      <p:sp>
-        <p:nvSpPr>
-          <p:cNvPr id="36" name="Shape 34"/>
-          <p:cNvSpPr/>
-          <p:nvPr/>
-        </p:nvSpPr>
-        <p:spPr>
-          <a:xfrm>
-            <a:off x="5943600" y="2825496"/>
-            <a:ext cx="2834640" cy="402336"/>
-          </a:xfrm>
-          <a:prstGeom prst="rect">
-            <a:avLst/>
-          </a:prstGeom>
-          <a:solidFill>
-            <a:srgbClr val="FCE7F3"/>
-          </a:solidFill>
-          <a:ln w="12700">
-            <a:solidFill>
-              <a:srgbClr val="E2E8F0"/>
-            </a:solidFill>
-            <a:prstDash val="solid"/>
-          </a:ln>
-        </p:spPr>
-      </p:sp>
-      <p:sp>
-        <p:nvSpPr>
-          <p:cNvPr id="37" name="Text 35"/>
-          <p:cNvSpPr/>
-          <p:nvPr/>
-        </p:nvSpPr>
-        <p:spPr>
-          <a:xfrm>
-            <a:off x="5943600" y="2825496"/>
-            <a:ext cx="2834640" cy="402336"/>
+              <a:t>stick</a:t>
+            </a:r>
+            <a:endParaRPr lang="en-US" sz="1200" dirty="0"/>
+          </a:p>
+        </p:txBody>
+      </p:sp>
+      <p:sp>
+        <p:nvSpPr>
+          <p:cNvPr id="38" name="Shape 36"/>
+          <p:cNvSpPr/>
+          <p:nvPr/>
+        </p:nvSpPr>
+        <p:spPr>
+          <a:xfrm>
+            <a:off x="2542032" y="4023360"/>
+            <a:ext cx="2011680" cy="402336"/>
+          </a:xfrm>
+          <a:prstGeom prst="rect">
+            <a:avLst>
+              <a:gd name="adj" fmla="val 13636"/>
+            </a:avLst>
+          </a:prstGeom>
+          <a:solidFill>
+            <a:srgbClr val="EEF2FF"/>
+          </a:solidFill>
+          <a:ln w="12700">
+            <a:solidFill>
+              <a:srgbClr val="6366F1"/>
+            </a:solidFill>
+            <a:prstDash val="solid"/>
+          </a:ln>
+        </p:spPr>
+      </p:sp>
+      <p:sp>
+        <p:nvSpPr>
+          <p:cNvPr id="39" name="Text 37"/>
+          <p:cNvSpPr/>
+          <p:nvPr/>
+        </p:nvSpPr>
+        <p:spPr>
+          <a:xfrm>
+            <a:off x="2542032" y="4023360"/>
+            <a:ext cx="2011680" cy="402336"/>
           </a:xfrm>
           <a:prstGeom prst="rect">
             <a:avLst/>
@@ -33765,735 +33957,15 @@
               <a:buNone/>
             </a:pPr>
             <a:r>
-              <a:rPr lang="en-US" sz="1300" b="1" dirty="0">
-                <a:solidFill>
-                  <a:srgbClr val="9D174D"/>
+              <a:rPr lang="en-US" sz="1200" b="1" dirty="0">
+                <a:solidFill>
+                  <a:srgbClr val="4338CA"/>
                 </a:solidFill>
                 <a:latin typeface="Trebuchet MS" pitchFamily="34" charset="0"/>
                 <a:ea typeface="Trebuchet MS" pitchFamily="34" charset="-122"/>
                 <a:cs typeface="Trebuchet MS" pitchFamily="34" charset="-120"/>
               </a:rPr>
-              <a:t>--ier</a:t>
-            </a:r>
-            <a:endParaRPr lang="en-US" sz="1300" dirty="0"/>
-          </a:p>
-        </p:txBody>
-      </p:sp>
-      <p:sp>
-        <p:nvSpPr>
-          <p:cNvPr id="38" name="Shape 36"/>
-          <p:cNvSpPr/>
-          <p:nvPr/>
-        </p:nvSpPr>
-        <p:spPr>
-          <a:xfrm>
-            <a:off x="365760" y="3246120"/>
-            <a:ext cx="2468880" cy="402336"/>
-          </a:xfrm>
-          <a:prstGeom prst="rect">
-            <a:avLst/>
-          </a:prstGeom>
-          <a:solidFill>
-            <a:srgbClr val="DDD6FE"/>
-          </a:solidFill>
-          <a:ln w="12700">
-            <a:solidFill>
-              <a:srgbClr val="E2E8F0"/>
-            </a:solidFill>
-            <a:prstDash val="solid"/>
-          </a:ln>
-        </p:spPr>
-      </p:sp>
-      <p:sp>
-        <p:nvSpPr>
-          <p:cNvPr id="39" name="Text 37"/>
-          <p:cNvSpPr/>
-          <p:nvPr/>
-        </p:nvSpPr>
-        <p:spPr>
-          <a:xfrm>
-            <a:off x="365760" y="3246120"/>
-            <a:ext cx="2468880" cy="402336"/>
-          </a:xfrm>
-          <a:prstGeom prst="rect">
-            <a:avLst/>
-          </a:prstGeom>
-          <a:noFill/>
-          <a:ln/>
-        </p:spPr>
-        <p:txBody>
-          <a:bodyPr wrap="square" lIns="0" tIns="0" rIns="0" bIns="0" rtlCol="0" anchor="ctr"/>
-          <a:lstStyle/>
-          <a:p>
-            <a:pPr algn="ctr" indent="0" marL="0">
-              <a:buNone/>
-            </a:pPr>
-            <a:r>
-              <a:rPr lang="en-US" sz="1300" b="1" dirty="0">
-                <a:solidFill>
-                  <a:srgbClr val="4C1D95"/>
-                </a:solidFill>
-                <a:latin typeface="Trebuchet MS" pitchFamily="34" charset="0"/>
-                <a:ea typeface="Trebuchet MS" pitchFamily="34" charset="-122"/>
-                <a:cs typeface="Trebuchet MS" pitchFamily="34" charset="-120"/>
-              </a:rPr>
-              <a:t>can-</a:t>
-            </a:r>
-            <a:endParaRPr lang="en-US" sz="1300" dirty="0"/>
-          </a:p>
-        </p:txBody>
-      </p:sp>
-      <p:sp>
-        <p:nvSpPr>
-          <p:cNvPr id="40" name="Shape 38"/>
-          <p:cNvSpPr/>
-          <p:nvPr/>
-        </p:nvSpPr>
-        <p:spPr>
-          <a:xfrm>
-            <a:off x="2971800" y="3246120"/>
-            <a:ext cx="2834640" cy="402336"/>
-          </a:xfrm>
-          <a:prstGeom prst="rect">
-            <a:avLst/>
-          </a:prstGeom>
-          <a:solidFill>
-            <a:srgbClr val="F8FAFC"/>
-          </a:solidFill>
-          <a:ln w="12700">
-            <a:solidFill>
-              <a:srgbClr val="E2E8F0"/>
-            </a:solidFill>
-            <a:prstDash val="solid"/>
-          </a:ln>
-        </p:spPr>
-      </p:sp>
-      <p:sp>
-        <p:nvSpPr>
-          <p:cNvPr id="41" name="Shape 39"/>
-          <p:cNvSpPr/>
-          <p:nvPr/>
-        </p:nvSpPr>
-        <p:spPr>
-          <a:xfrm>
-            <a:off x="5943600" y="3246120"/>
-            <a:ext cx="2834640" cy="402336"/>
-          </a:xfrm>
-          <a:prstGeom prst="rect">
-            <a:avLst/>
-          </a:prstGeom>
-          <a:solidFill>
-            <a:srgbClr val="FCE7F3"/>
-          </a:solidFill>
-          <a:ln w="12700">
-            <a:solidFill>
-              <a:srgbClr val="E2E8F0"/>
-            </a:solidFill>
-            <a:prstDash val="solid"/>
-          </a:ln>
-        </p:spPr>
-      </p:sp>
-      <p:sp>
-        <p:nvSpPr>
-          <p:cNvPr id="42" name="Text 40"/>
-          <p:cNvSpPr/>
-          <p:nvPr/>
-        </p:nvSpPr>
-        <p:spPr>
-          <a:xfrm>
-            <a:off x="5943600" y="3246120"/>
-            <a:ext cx="2834640" cy="402336"/>
-          </a:xfrm>
-          <a:prstGeom prst="rect">
-            <a:avLst/>
-          </a:prstGeom>
-          <a:noFill/>
-          <a:ln/>
-        </p:spPr>
-        <p:txBody>
-          <a:bodyPr wrap="square" lIns="0" tIns="0" rIns="0" bIns="0" rtlCol="0" anchor="ctr"/>
-          <a:lstStyle/>
-          <a:p>
-            <a:pPr algn="ctr" indent="0" marL="0">
-              <a:buNone/>
-            </a:pPr>
-            <a:r>
-              <a:rPr lang="en-US" sz="1300" b="1" dirty="0">
-                <a:solidFill>
-                  <a:srgbClr val="9D174D"/>
-                </a:solidFill>
-                <a:latin typeface="Trebuchet MS" pitchFamily="34" charset="0"/>
-                <a:ea typeface="Trebuchet MS" pitchFamily="34" charset="-122"/>
-                <a:cs typeface="Trebuchet MS" pitchFamily="34" charset="-120"/>
-              </a:rPr>
-              <a:t>--iness</a:t>
-            </a:r>
-            <a:endParaRPr lang="en-US" sz="1300" dirty="0"/>
-          </a:p>
-        </p:txBody>
-      </p:sp>
-      <p:sp>
-        <p:nvSpPr>
-          <p:cNvPr id="43" name="Text 41"/>
-          <p:cNvSpPr/>
-          <p:nvPr/>
-        </p:nvSpPr>
-        <p:spPr>
-          <a:xfrm>
-            <a:off x="365760" y="3611880"/>
-            <a:ext cx="1828800" cy="347472"/>
-          </a:xfrm>
-          <a:prstGeom prst="rect">
-            <a:avLst/>
-          </a:prstGeom>
-          <a:noFill/>
-          <a:ln/>
-        </p:spPr>
-        <p:txBody>
-          <a:bodyPr wrap="square" lIns="0" tIns="0" rIns="0" bIns="0" rtlCol="0" anchor="ctr"/>
-          <a:lstStyle/>
-          <a:p>
-            <a:pPr algn="l" indent="0" marL="0">
-              <a:buNone/>
-            </a:pPr>
-            <a:r>
-              <a:rPr lang="en-US" sz="1200" b="1" dirty="0">
-                <a:solidFill>
-                  <a:srgbClr val="0F172A"/>
-                </a:solidFill>
-                <a:latin typeface="Trebuchet MS" pitchFamily="34" charset="0"/>
-                <a:ea typeface="Trebuchet MS" pitchFamily="34" charset="-122"/>
-                <a:cs typeface="Trebuchet MS" pitchFamily="34" charset="-120"/>
-              </a:rPr>
-              <a:t>Sample words:</a:t>
-            </a:r>
-            <a:endParaRPr lang="en-US" sz="1200" dirty="0"/>
-          </a:p>
-        </p:txBody>
-      </p:sp>
-      <p:sp>
-        <p:nvSpPr>
-          <p:cNvPr id="44" name="Shape 42"/>
-          <p:cNvSpPr/>
-          <p:nvPr/>
-        </p:nvSpPr>
-        <p:spPr>
-          <a:xfrm>
-            <a:off x="365760" y="4023360"/>
-            <a:ext cx="2011680" cy="402336"/>
-          </a:xfrm>
-          <a:prstGeom prst="rect">
-            <a:avLst>
-              <a:gd name="adj" fmla="val 13636"/>
-            </a:avLst>
-          </a:prstGeom>
-          <a:solidFill>
-            <a:srgbClr val="EEF2FF"/>
-          </a:solidFill>
-          <a:ln w="12700">
-            <a:solidFill>
-              <a:srgbClr val="6366F1"/>
-            </a:solidFill>
-            <a:prstDash val="solid"/>
-          </a:ln>
-        </p:spPr>
-      </p:sp>
-      <p:sp>
-        <p:nvSpPr>
-          <p:cNvPr id="45" name="Text 43"/>
-          <p:cNvSpPr/>
-          <p:nvPr/>
-        </p:nvSpPr>
-        <p:spPr>
-          <a:xfrm>
-            <a:off x="365760" y="4023360"/>
-            <a:ext cx="2011680" cy="402336"/>
-          </a:xfrm>
-          <a:prstGeom prst="rect">
-            <a:avLst/>
-          </a:prstGeom>
-          <a:noFill/>
-          <a:ln/>
-        </p:spPr>
-        <p:txBody>
-          <a:bodyPr wrap="square" lIns="0" tIns="0" rIns="0" bIns="0" rtlCol="0" anchor="ctr"/>
-          <a:lstStyle/>
-          <a:p>
-            <a:pPr algn="ctr" indent="0" marL="0">
-              <a:buNone/>
-            </a:pPr>
-            <a:r>
-              <a:rPr lang="en-US" sz="1200" b="1" dirty="0">
-                <a:solidFill>
-                  <a:srgbClr val="4338CA"/>
-                </a:solidFill>
-                <a:latin typeface="Trebuchet MS" pitchFamily="34" charset="0"/>
-                <a:ea typeface="Trebuchet MS" pitchFamily="34" charset="-122"/>
-                <a:cs typeface="Trebuchet MS" pitchFamily="34" charset="-120"/>
-              </a:rPr>
-              <a:t>sticker</a:t>
-            </a:r>
-            <a:endParaRPr lang="en-US" sz="1200" dirty="0"/>
-          </a:p>
-        </p:txBody>
-      </p:sp>
-      <p:sp>
-        <p:nvSpPr>
-          <p:cNvPr id="46" name="Shape 44"/>
-          <p:cNvSpPr/>
-          <p:nvPr/>
-        </p:nvSpPr>
-        <p:spPr>
-          <a:xfrm>
-            <a:off x="2542032" y="4023360"/>
-            <a:ext cx="2011680" cy="402336"/>
-          </a:xfrm>
-          <a:prstGeom prst="rect">
-            <a:avLst>
-              <a:gd name="adj" fmla="val 13636"/>
-            </a:avLst>
-          </a:prstGeom>
-          <a:solidFill>
-            <a:srgbClr val="EEF2FF"/>
-          </a:solidFill>
-          <a:ln w="12700">
-            <a:solidFill>
-              <a:srgbClr val="6366F1"/>
-            </a:solidFill>
-            <a:prstDash val="solid"/>
-          </a:ln>
-        </p:spPr>
-      </p:sp>
-      <p:sp>
-        <p:nvSpPr>
-          <p:cNvPr id="47" name="Text 45"/>
-          <p:cNvSpPr/>
-          <p:nvPr/>
-        </p:nvSpPr>
-        <p:spPr>
-          <a:xfrm>
-            <a:off x="2542032" y="4023360"/>
-            <a:ext cx="2011680" cy="402336"/>
-          </a:xfrm>
-          <a:prstGeom prst="rect">
-            <a:avLst/>
-          </a:prstGeom>
-          <a:noFill/>
-          <a:ln/>
-        </p:spPr>
-        <p:txBody>
-          <a:bodyPr wrap="square" lIns="0" tIns="0" rIns="0" bIns="0" rtlCol="0" anchor="ctr"/>
-          <a:lstStyle/>
-          <a:p>
-            <a:pPr algn="ctr" indent="0" marL="0">
-              <a:buNone/>
-            </a:pPr>
-            <a:r>
-              <a:rPr lang="en-US" sz="1200" b="1" dirty="0">
-                <a:solidFill>
-                  <a:srgbClr val="4338CA"/>
-                </a:solidFill>
-                <a:latin typeface="Trebuchet MS" pitchFamily="34" charset="0"/>
-                <a:ea typeface="Trebuchet MS" pitchFamily="34" charset="-122"/>
-                <a:cs typeface="Trebuchet MS" pitchFamily="34" charset="-120"/>
-              </a:rPr>
-              <a:t>sticking</a:t>
-            </a:r>
-            <a:endParaRPr lang="en-US" sz="1200" dirty="0"/>
-          </a:p>
-        </p:txBody>
-      </p:sp>
-      <p:sp>
-        <p:nvSpPr>
-          <p:cNvPr id="48" name="Shape 46"/>
-          <p:cNvSpPr/>
-          <p:nvPr/>
-        </p:nvSpPr>
-        <p:spPr>
-          <a:xfrm>
-            <a:off x="4718304" y="4023360"/>
-            <a:ext cx="2011680" cy="402336"/>
-          </a:xfrm>
-          <a:prstGeom prst="rect">
-            <a:avLst>
-              <a:gd name="adj" fmla="val 13636"/>
-            </a:avLst>
-          </a:prstGeom>
-          <a:solidFill>
-            <a:srgbClr val="EEF2FF"/>
-          </a:solidFill>
-          <a:ln w="12700">
-            <a:solidFill>
-              <a:srgbClr val="6366F1"/>
-            </a:solidFill>
-            <a:prstDash val="solid"/>
-          </a:ln>
-        </p:spPr>
-      </p:sp>
-      <p:sp>
-        <p:nvSpPr>
-          <p:cNvPr id="49" name="Text 47"/>
-          <p:cNvSpPr/>
-          <p:nvPr/>
-        </p:nvSpPr>
-        <p:spPr>
-          <a:xfrm>
-            <a:off x="4718304" y="4023360"/>
-            <a:ext cx="2011680" cy="402336"/>
-          </a:xfrm>
-          <a:prstGeom prst="rect">
-            <a:avLst/>
-          </a:prstGeom>
-          <a:noFill/>
-          <a:ln/>
-        </p:spPr>
-        <p:txBody>
-          <a:bodyPr wrap="square" lIns="0" tIns="0" rIns="0" bIns="0" rtlCol="0" anchor="ctr"/>
-          <a:lstStyle/>
-          <a:p>
-            <a:pPr algn="ctr" indent="0" marL="0">
-              <a:buNone/>
-            </a:pPr>
-            <a:r>
-              <a:rPr lang="en-US" sz="1200" b="1" dirty="0">
-                <a:solidFill>
-                  <a:srgbClr val="4338CA"/>
-                </a:solidFill>
-                <a:latin typeface="Trebuchet MS" pitchFamily="34" charset="0"/>
-                <a:ea typeface="Trebuchet MS" pitchFamily="34" charset="-122"/>
-                <a:cs typeface="Trebuchet MS" pitchFamily="34" charset="-120"/>
-              </a:rPr>
-              <a:t>sticky</a:t>
-            </a:r>
-            <a:endParaRPr lang="en-US" sz="1200" dirty="0"/>
-          </a:p>
-        </p:txBody>
-      </p:sp>
-      <p:sp>
-        <p:nvSpPr>
-          <p:cNvPr id="50" name="Shape 48"/>
-          <p:cNvSpPr/>
-          <p:nvPr/>
-        </p:nvSpPr>
-        <p:spPr>
-          <a:xfrm>
-            <a:off x="6894576" y="4023360"/>
-            <a:ext cx="2011680" cy="402336"/>
-          </a:xfrm>
-          <a:prstGeom prst="rect">
-            <a:avLst>
-              <a:gd name="adj" fmla="val 13636"/>
-            </a:avLst>
-          </a:prstGeom>
-          <a:solidFill>
-            <a:srgbClr val="EEF2FF"/>
-          </a:solidFill>
-          <a:ln w="12700">
-            <a:solidFill>
-              <a:srgbClr val="6366F1"/>
-            </a:solidFill>
-            <a:prstDash val="solid"/>
-          </a:ln>
-        </p:spPr>
-      </p:sp>
-      <p:sp>
-        <p:nvSpPr>
-          <p:cNvPr id="51" name="Text 49"/>
-          <p:cNvSpPr/>
-          <p:nvPr/>
-        </p:nvSpPr>
-        <p:spPr>
-          <a:xfrm>
-            <a:off x="6894576" y="4023360"/>
-            <a:ext cx="2011680" cy="402336"/>
-          </a:xfrm>
-          <a:prstGeom prst="rect">
-            <a:avLst/>
-          </a:prstGeom>
-          <a:noFill/>
-          <a:ln/>
-        </p:spPr>
-        <p:txBody>
-          <a:bodyPr wrap="square" lIns="0" tIns="0" rIns="0" bIns="0" rtlCol="0" anchor="ctr"/>
-          <a:lstStyle/>
-          <a:p>
-            <a:pPr algn="ctr" indent="0" marL="0">
-              <a:buNone/>
-            </a:pPr>
-            <a:r>
-              <a:rPr lang="en-US" sz="1200" b="1" dirty="0">
-                <a:solidFill>
-                  <a:srgbClr val="4338CA"/>
-                </a:solidFill>
-                <a:latin typeface="Trebuchet MS" pitchFamily="34" charset="0"/>
-                <a:ea typeface="Trebuchet MS" pitchFamily="34" charset="-122"/>
-                <a:cs typeface="Trebuchet MS" pitchFamily="34" charset="-120"/>
-              </a:rPr>
-              <a:t>drumstick</a:t>
-            </a:r>
-            <a:endParaRPr lang="en-US" sz="1200" dirty="0"/>
-          </a:p>
-        </p:txBody>
-      </p:sp>
-      <p:sp>
-        <p:nvSpPr>
-          <p:cNvPr id="52" name="Shape 50"/>
-          <p:cNvSpPr/>
-          <p:nvPr/>
-        </p:nvSpPr>
-        <p:spPr>
-          <a:xfrm>
-            <a:off x="365760" y="4498848"/>
-            <a:ext cx="2011680" cy="402336"/>
-          </a:xfrm>
-          <a:prstGeom prst="rect">
-            <a:avLst>
-              <a:gd name="adj" fmla="val 13636"/>
-            </a:avLst>
-          </a:prstGeom>
-          <a:solidFill>
-            <a:srgbClr val="EEF2FF"/>
-          </a:solidFill>
-          <a:ln w="12700">
-            <a:solidFill>
-              <a:srgbClr val="6366F1"/>
-            </a:solidFill>
-            <a:prstDash val="solid"/>
-          </a:ln>
-        </p:spPr>
-      </p:sp>
-      <p:sp>
-        <p:nvSpPr>
-          <p:cNvPr id="53" name="Text 51"/>
-          <p:cNvSpPr/>
-          <p:nvPr/>
-        </p:nvSpPr>
-        <p:spPr>
-          <a:xfrm>
-            <a:off x="365760" y="4498848"/>
-            <a:ext cx="2011680" cy="402336"/>
-          </a:xfrm>
-          <a:prstGeom prst="rect">
-            <a:avLst/>
-          </a:prstGeom>
-          <a:noFill/>
-          <a:ln/>
-        </p:spPr>
-        <p:txBody>
-          <a:bodyPr wrap="square" lIns="0" tIns="0" rIns="0" bIns="0" rtlCol="0" anchor="ctr"/>
-          <a:lstStyle/>
-          <a:p>
-            <a:pPr algn="ctr" indent="0" marL="0">
-              <a:buNone/>
-            </a:pPr>
-            <a:r>
-              <a:rPr lang="en-US" sz="1200" b="1" dirty="0">
-                <a:solidFill>
-                  <a:srgbClr val="4338CA"/>
-                </a:solidFill>
-                <a:latin typeface="Trebuchet MS" pitchFamily="34" charset="0"/>
-                <a:ea typeface="Trebuchet MS" pitchFamily="34" charset="-122"/>
-                <a:cs typeface="Trebuchet MS" pitchFamily="34" charset="-120"/>
-              </a:rPr>
-              <a:t>lipstick</a:t>
-            </a:r>
-            <a:endParaRPr lang="en-US" sz="1200" dirty="0"/>
-          </a:p>
-        </p:txBody>
-      </p:sp>
-      <p:sp>
-        <p:nvSpPr>
-          <p:cNvPr id="54" name="Shape 52"/>
-          <p:cNvSpPr/>
-          <p:nvPr/>
-        </p:nvSpPr>
-        <p:spPr>
-          <a:xfrm>
-            <a:off x="2542032" y="4498848"/>
-            <a:ext cx="2011680" cy="402336"/>
-          </a:xfrm>
-          <a:prstGeom prst="rect">
-            <a:avLst>
-              <a:gd name="adj" fmla="val 13636"/>
-            </a:avLst>
-          </a:prstGeom>
-          <a:solidFill>
-            <a:srgbClr val="EEF2FF"/>
-          </a:solidFill>
-          <a:ln w="12700">
-            <a:solidFill>
-              <a:srgbClr val="6366F1"/>
-            </a:solidFill>
-            <a:prstDash val="solid"/>
-          </a:ln>
-        </p:spPr>
-      </p:sp>
-      <p:sp>
-        <p:nvSpPr>
-          <p:cNvPr id="55" name="Text 53"/>
-          <p:cNvSpPr/>
-          <p:nvPr/>
-        </p:nvSpPr>
-        <p:spPr>
-          <a:xfrm>
-            <a:off x="2542032" y="4498848"/>
-            <a:ext cx="2011680" cy="402336"/>
-          </a:xfrm>
-          <a:prstGeom prst="rect">
-            <a:avLst/>
-          </a:prstGeom>
-          <a:noFill/>
-          <a:ln/>
-        </p:spPr>
-        <p:txBody>
-          <a:bodyPr wrap="square" lIns="0" tIns="0" rIns="0" bIns="0" rtlCol="0" anchor="ctr"/>
-          <a:lstStyle/>
-          <a:p>
-            <a:pPr algn="ctr" indent="0" marL="0">
-              <a:buNone/>
-            </a:pPr>
-            <a:r>
-              <a:rPr lang="en-US" sz="1200" b="1" dirty="0">
-                <a:solidFill>
-                  <a:srgbClr val="4338CA"/>
-                </a:solidFill>
-                <a:latin typeface="Trebuchet MS" pitchFamily="34" charset="0"/>
-                <a:ea typeface="Trebuchet MS" pitchFamily="34" charset="-122"/>
-                <a:cs typeface="Trebuchet MS" pitchFamily="34" charset="-120"/>
-              </a:rPr>
-              <a:t>chopstick</a:t>
-            </a:r>
-            <a:endParaRPr lang="en-US" sz="1200" dirty="0"/>
-          </a:p>
-        </p:txBody>
-      </p:sp>
-      <p:sp>
-        <p:nvSpPr>
-          <p:cNvPr id="56" name="Shape 54"/>
-          <p:cNvSpPr/>
-          <p:nvPr/>
-        </p:nvSpPr>
-        <p:spPr>
-          <a:xfrm>
-            <a:off x="4718304" y="4498848"/>
-            <a:ext cx="2011680" cy="402336"/>
-          </a:xfrm>
-          <a:prstGeom prst="rect">
-            <a:avLst>
-              <a:gd name="adj" fmla="val 13636"/>
-            </a:avLst>
-          </a:prstGeom>
-          <a:solidFill>
-            <a:srgbClr val="EEF2FF"/>
-          </a:solidFill>
-          <a:ln w="12700">
-            <a:solidFill>
-              <a:srgbClr val="6366F1"/>
-            </a:solidFill>
-            <a:prstDash val="solid"/>
-          </a:ln>
-        </p:spPr>
-      </p:sp>
-      <p:sp>
-        <p:nvSpPr>
-          <p:cNvPr id="57" name="Text 55"/>
-          <p:cNvSpPr/>
-          <p:nvPr/>
-        </p:nvSpPr>
-        <p:spPr>
-          <a:xfrm>
-            <a:off x="4718304" y="4498848"/>
-            <a:ext cx="2011680" cy="402336"/>
-          </a:xfrm>
-          <a:prstGeom prst="rect">
-            <a:avLst/>
-          </a:prstGeom>
-          <a:noFill/>
-          <a:ln/>
-        </p:spPr>
-        <p:txBody>
-          <a:bodyPr wrap="square" lIns="0" tIns="0" rIns="0" bIns="0" rtlCol="0" anchor="ctr"/>
-          <a:lstStyle/>
-          <a:p>
-            <a:pPr algn="ctr" indent="0" marL="0">
-              <a:buNone/>
-            </a:pPr>
-            <a:r>
-              <a:rPr lang="en-US" sz="1200" b="1" dirty="0">
-                <a:solidFill>
-                  <a:srgbClr val="4338CA"/>
-                </a:solidFill>
-                <a:latin typeface="Trebuchet MS" pitchFamily="34" charset="0"/>
-                <a:ea typeface="Trebuchet MS" pitchFamily="34" charset="-122"/>
-                <a:cs typeface="Trebuchet MS" pitchFamily="34" charset="-120"/>
-              </a:rPr>
-              <a:t>nonstick</a:t>
-            </a:r>
-            <a:endParaRPr lang="en-US" sz="1200" dirty="0"/>
-          </a:p>
-        </p:txBody>
-      </p:sp>
-      <p:sp>
-        <p:nvSpPr>
-          <p:cNvPr id="58" name="Shape 56"/>
-          <p:cNvSpPr/>
-          <p:nvPr/>
-        </p:nvSpPr>
-        <p:spPr>
-          <a:xfrm>
-            <a:off x="6894576" y="4498848"/>
-            <a:ext cx="2011680" cy="402336"/>
-          </a:xfrm>
-          <a:prstGeom prst="rect">
-            <a:avLst>
-              <a:gd name="adj" fmla="val 13636"/>
-            </a:avLst>
-          </a:prstGeom>
-          <a:solidFill>
-            <a:srgbClr val="EEF2FF"/>
-          </a:solidFill>
-          <a:ln w="12700">
-            <a:solidFill>
-              <a:srgbClr val="6366F1"/>
-            </a:solidFill>
-            <a:prstDash val="solid"/>
-          </a:ln>
-        </p:spPr>
-      </p:sp>
-      <p:sp>
-        <p:nvSpPr>
-          <p:cNvPr id="59" name="Text 57"/>
-          <p:cNvSpPr/>
-          <p:nvPr/>
-        </p:nvSpPr>
-        <p:spPr>
-          <a:xfrm>
-            <a:off x="6894576" y="4498848"/>
-            <a:ext cx="2011680" cy="402336"/>
-          </a:xfrm>
-          <a:prstGeom prst="rect">
-            <a:avLst/>
-          </a:prstGeom>
-          <a:noFill/>
-          <a:ln/>
-        </p:spPr>
-        <p:txBody>
-          <a:bodyPr wrap="square" lIns="0" tIns="0" rIns="0" bIns="0" rtlCol="0" anchor="ctr"/>
-          <a:lstStyle/>
-          <a:p>
-            <a:pPr algn="ctr" indent="0" marL="0">
-              <a:buNone/>
-            </a:pPr>
-            <a:r>
-              <a:rPr lang="en-US" sz="1200" b="1" dirty="0">
-                <a:solidFill>
-                  <a:srgbClr val="4338CA"/>
-                </a:solidFill>
-                <a:latin typeface="Trebuchet MS" pitchFamily="34" charset="0"/>
-                <a:ea typeface="Trebuchet MS" pitchFamily="34" charset="-122"/>
-                <a:cs typeface="Trebuchet MS" pitchFamily="34" charset="-120"/>
-              </a:rPr>
-              <a:t>candlestick</a:t>
+              <a:t>sticks</a:t>
             </a:r>
             <a:endParaRPr lang="en-US" sz="1200" dirty="0"/>
           </a:p>
@@ -34785,7 +34257,7 @@
                 <a:ea typeface="Calibri" pitchFamily="34" charset="-122"/>
                 <a:cs typeface="Calibri" pitchFamily="34" charset="-120"/>
               </a:rPr>
-              <a:t>Word Labs  •  wordlabs.app  •  Root: 'stick' = to adhere, fasten, or pierce</a:t>
+              <a:t>Word Labs  •  wordlabs.app  •  Root: 'stick' = a thin piece of wood; to attach</a:t>
             </a:r>
             <a:endParaRPr lang="en-US" sz="800" dirty="0"/>
           </a:p>
@@ -34949,7 +34421,7 @@
                 <a:ea typeface="Calibri" pitchFamily="34" charset="-122"/>
                 <a:cs typeface="Calibri" pitchFamily="34" charset="-120"/>
               </a:rPr>
-              <a:t>The core part of a word carrying its basic meaning. For example, 'stick' means 'to adhere, fasten, or pierce'.</a:t>
+              <a:t>The core part of a word carrying its basic meaning. For example, 'stick' means 'a thin piece of wood; to attach'.</a:t>
             </a:r>
             <a:endParaRPr lang="en-US" sz="1350" dirty="0"/>
           </a:p>
@@ -35569,7 +35041,7 @@
                 <a:ea typeface="Calibri" pitchFamily="34" charset="-122"/>
                 <a:cs typeface="Calibri" pitchFamily="34" charset="-120"/>
               </a:rPr>
-              <a:t>Word Labs  •  wordlabs.app  •  Root: 'stick' = to adhere, fasten, or pierce</a:t>
+              <a:t>Word Labs  •  wordlabs.app  •  Root: 'stick' = a thin piece of wood; to attach</a:t>
             </a:r>
             <a:endParaRPr lang="en-US" sz="800" dirty="0"/>
           </a:p>
@@ -35681,7 +35153,7 @@
                 <a:ea typeface="Calibri" pitchFamily="34" charset="-122"/>
                 <a:cs typeface="Calibri" pitchFamily="34" charset="-120"/>
               </a:rPr>
-              <a:t>1.  The word 'sticker' means something that moves very quickly.</a:t>
+              <a:t>1.  'stick' means 'a long thin piece of wood'.</a:t>
             </a:r>
             <a:endParaRPr lang="en-US" sz="1300" dirty="0"/>
           </a:p>
@@ -35704,11 +35176,11 @@
             </a:avLst>
           </a:prstGeom>
           <a:solidFill>
-            <a:srgbClr val="FEE2E2"/>
-          </a:solidFill>
-          <a:ln w="12700">
-            <a:solidFill>
-              <a:srgbClr val="DC2626"/>
+            <a:srgbClr val="DCFCE7"/>
+          </a:solidFill>
+          <a:ln w="12700">
+            <a:solidFill>
+              <a:srgbClr val="16A34A"/>
             </a:solidFill>
             <a:prstDash val="solid"/>
           </a:ln>
@@ -35741,13 +35213,13 @@
             <a:r>
               <a:rPr lang="en-US" sz="1100" b="1" dirty="0">
                 <a:solidFill>
-                  <a:srgbClr val="DC2626"/>
+                  <a:srgbClr val="16A34A"/>
                 </a:solidFill>
                 <a:latin typeface="Trebuchet MS" pitchFamily="34" charset="0"/>
                 <a:ea typeface="Trebuchet MS" pitchFamily="34" charset="-122"/>
                 <a:cs typeface="Trebuchet MS" pitchFamily="34" charset="-120"/>
               </a:rPr>
-              <a:t>FALSE</a:t>
+              <a:t>TRUE</a:t>
             </a:r>
             <a:endParaRPr lang="en-US" sz="1100" dirty="0"/>
           </a:p>
@@ -35820,7 +35292,7 @@
                 <a:ea typeface="Calibri" pitchFamily="34" charset="-122"/>
                 <a:cs typeface="Calibri" pitchFamily="34" charset="-120"/>
               </a:rPr>
-              <a:t>2.  The suffix '-er' can be added to 'stick' to make 'sticker'.</a:t>
+              <a:t>2.  'sticks' means 'soft round cushions'.</a:t>
             </a:r>
             <a:endParaRPr lang="en-US" sz="1300" dirty="0"/>
           </a:p>
@@ -35843,11 +35315,11 @@
             </a:avLst>
           </a:prstGeom>
           <a:solidFill>
-            <a:srgbClr val="DCFCE7"/>
-          </a:solidFill>
-          <a:ln w="12700">
-            <a:solidFill>
-              <a:srgbClr val="16A34A"/>
+            <a:srgbClr val="FEE2E2"/>
+          </a:solidFill>
+          <a:ln w="12700">
+            <a:solidFill>
+              <a:srgbClr val="DC2626"/>
             </a:solidFill>
             <a:prstDash val="solid"/>
           </a:ln>
@@ -35880,13 +35352,13 @@
             <a:r>
               <a:rPr lang="en-US" sz="1100" b="1" dirty="0">
                 <a:solidFill>
-                  <a:srgbClr val="16A34A"/>
+                  <a:srgbClr val="DC2626"/>
                 </a:solidFill>
                 <a:latin typeface="Trebuchet MS" pitchFamily="34" charset="0"/>
                 <a:ea typeface="Trebuchet MS" pitchFamily="34" charset="-122"/>
                 <a:cs typeface="Trebuchet MS" pitchFamily="34" charset="-120"/>
               </a:rPr>
-              <a:t>TRUE</a:t>
+              <a:t>FALSE</a:t>
             </a:r>
             <a:endParaRPr lang="en-US" sz="1100" dirty="0"/>
           </a:p>
@@ -35959,7 +35431,7 @@
                 <a:ea typeface="Calibri" pitchFamily="34" charset="-122"/>
                 <a:cs typeface="Calibri" pitchFamily="34" charset="-120"/>
               </a:rPr>
-              <a:t>3.  The root 'stick' comes from Greek and means 'to write'.</a:t>
+              <a:t>3.  'sticks' means 'long thin pieces of wood'.</a:t>
             </a:r>
             <a:endParaRPr lang="en-US" sz="1300" dirty="0"/>
           </a:p>
@@ -35982,11 +35454,11 @@
             </a:avLst>
           </a:prstGeom>
           <a:solidFill>
-            <a:srgbClr val="FEE2E2"/>
-          </a:solidFill>
-          <a:ln w="12700">
-            <a:solidFill>
-              <a:srgbClr val="DC2626"/>
+            <a:srgbClr val="DCFCE7"/>
+          </a:solidFill>
+          <a:ln w="12700">
+            <a:solidFill>
+              <a:srgbClr val="16A34A"/>
             </a:solidFill>
             <a:prstDash val="solid"/>
           </a:ln>
@@ -36019,13 +35491,13 @@
             <a:r>
               <a:rPr lang="en-US" sz="1100" b="1" dirty="0">
                 <a:solidFill>
-                  <a:srgbClr val="DC2626"/>
+                  <a:srgbClr val="16A34A"/>
                 </a:solidFill>
                 <a:latin typeface="Trebuchet MS" pitchFamily="34" charset="0"/>
                 <a:ea typeface="Trebuchet MS" pitchFamily="34" charset="-122"/>
                 <a:cs typeface="Trebuchet MS" pitchFamily="34" charset="-120"/>
               </a:rPr>
-              <a:t>FALSE</a:t>
+              <a:t>TRUE</a:t>
             </a:r>
             <a:endParaRPr lang="en-US" sz="1100" dirty="0"/>
           </a:p>
@@ -36098,7 +35570,7 @@
                 <a:ea typeface="Calibri" pitchFamily="34" charset="-122"/>
                 <a:cs typeface="Calibri" pitchFamily="34" charset="-120"/>
               </a:rPr>
-              <a:t>4.  The word 'sticky' contains the root 'stick'.</a:t>
+              <a:t>4.  'stick' means 'a soft round cushion'.</a:t>
             </a:r>
             <a:endParaRPr lang="en-US" sz="1300" dirty="0"/>
           </a:p>
@@ -36121,11 +35593,11 @@
             </a:avLst>
           </a:prstGeom>
           <a:solidFill>
-            <a:srgbClr val="DCFCE7"/>
-          </a:solidFill>
-          <a:ln w="12700">
-            <a:solidFill>
-              <a:srgbClr val="16A34A"/>
+            <a:srgbClr val="FEE2E2"/>
+          </a:solidFill>
+          <a:ln w="12700">
+            <a:solidFill>
+              <a:srgbClr val="DC2626"/>
             </a:solidFill>
             <a:prstDash val="solid"/>
           </a:ln>
@@ -36158,13 +35630,13 @@
             <a:r>
               <a:rPr lang="en-US" sz="1100" b="1" dirty="0">
                 <a:solidFill>
-                  <a:srgbClr val="16A34A"/>
+                  <a:srgbClr val="DC2626"/>
                 </a:solidFill>
                 <a:latin typeface="Trebuchet MS" pitchFamily="34" charset="0"/>
                 <a:ea typeface="Trebuchet MS" pitchFamily="34" charset="-122"/>
                 <a:cs typeface="Trebuchet MS" pitchFamily="34" charset="-120"/>
               </a:rPr>
-              <a:t>TRUE</a:t>
+              <a:t>FALSE</a:t>
             </a:r>
             <a:endParaRPr lang="en-US" sz="1100" dirty="0"/>
           </a:p>
@@ -36237,7 +35709,7 @@
                 <a:ea typeface="Calibri" pitchFamily="34" charset="-122"/>
                 <a:cs typeface="Calibri" pitchFamily="34" charset="-120"/>
               </a:rPr>
-              <a:t>5.  A 'drumstick' contains the root 'stick'.</a:t>
+              <a:t>5.  'stick' means 'a thin piece of wood; to attach'.</a:t>
             </a:r>
             <a:endParaRPr lang="en-US" sz="1300" dirty="0"/>
           </a:p>
@@ -36595,7 +36067,7 @@
                 <a:ea typeface="Calibri" pitchFamily="34" charset="-122"/>
                 <a:cs typeface="Calibri" pitchFamily="34" charset="-120"/>
               </a:rPr>
-              <a:t>Word Labs  •  wordlabs.app  •  Root: 'stick' = to adhere, fasten, or pierce</a:t>
+              <a:t>Word Labs  •  wordlabs.app  •  Root: 'stick' = a thin piece of wood; to attach</a:t>
             </a:r>
             <a:endParaRPr lang="en-US" sz="800" dirty="0"/>
           </a:p>
@@ -36732,7 +36204,7 @@
                 <a:ea typeface="Trebuchet MS" pitchFamily="34" charset="-122"/>
                 <a:cs typeface="Trebuchet MS" pitchFamily="34" charset="-120"/>
               </a:rPr>
-              <a:t>to adhere, fasten, or pierce</a:t>
+              <a:t>a thin piece of wood; to attach</a:t>
             </a:r>
             <a:endParaRPr lang="en-US" sz="2000" dirty="0"/>
           </a:p>
@@ -36771,7 +36243,7 @@
                 <a:ea typeface="Calibri" pitchFamily="34" charset="-122"/>
                 <a:cs typeface="Calibri" pitchFamily="34" charset="-120"/>
               </a:rPr>
-              <a:t>Origin: Latin: stingere</a:t>
+              <a:t>Origin: Core English root</a:t>
             </a:r>
             <a:endParaRPr lang="en-US" sz="1100" dirty="0"/>
           </a:p>
@@ -36876,7 +36348,7 @@
                 <a:ea typeface="Trebuchet MS" pitchFamily="34" charset="-122"/>
                 <a:cs typeface="Trebuchet MS" pitchFamily="34" charset="-120"/>
               </a:rPr>
-              <a:t>sticker</a:t>
+              <a:t>stick</a:t>
             </a:r>
             <a:endParaRPr lang="en-US" sz="1300" dirty="0"/>
           </a:p>
@@ -36942,337 +36414,7 @@
                 <a:ea typeface="Trebuchet MS" pitchFamily="34" charset="-122"/>
                 <a:cs typeface="Trebuchet MS" pitchFamily="34" charset="-120"/>
               </a:rPr>
-              <a:t>sticking</a:t>
-            </a:r>
-            <a:endParaRPr lang="en-US" sz="1300" dirty="0"/>
-          </a:p>
-        </p:txBody>
-      </p:sp>
-      <p:sp>
-        <p:nvSpPr>
-          <p:cNvPr id="20" name="Shape 18"/>
-          <p:cNvSpPr/>
-          <p:nvPr/>
-        </p:nvSpPr>
-        <p:spPr>
-          <a:xfrm>
-            <a:off x="4663440" y="2743200"/>
-            <a:ext cx="2011680" cy="502920"/>
-          </a:xfrm>
-          <a:prstGeom prst="rect">
-            <a:avLst>
-              <a:gd name="adj" fmla="val 14545"/>
-            </a:avLst>
-          </a:prstGeom>
-          <a:solidFill>
-            <a:srgbClr val="EEF2FF"/>
-          </a:solidFill>
-          <a:ln w="12700">
-            <a:solidFill>
-              <a:srgbClr val="6366F1"/>
-            </a:solidFill>
-            <a:prstDash val="solid"/>
-          </a:ln>
-        </p:spPr>
-      </p:sp>
-      <p:sp>
-        <p:nvSpPr>
-          <p:cNvPr id="21" name="Text 19"/>
-          <p:cNvSpPr/>
-          <p:nvPr/>
-        </p:nvSpPr>
-        <p:spPr>
-          <a:xfrm>
-            <a:off x="4663440" y="2743200"/>
-            <a:ext cx="2011680" cy="502920"/>
-          </a:xfrm>
-          <a:prstGeom prst="rect">
-            <a:avLst/>
-          </a:prstGeom>
-          <a:noFill/>
-          <a:ln/>
-        </p:spPr>
-        <p:txBody>
-          <a:bodyPr wrap="square" lIns="0" tIns="0" rIns="0" bIns="0" rtlCol="0" anchor="ctr"/>
-          <a:lstStyle/>
-          <a:p>
-            <a:pPr algn="ctr" indent="0" marL="0">
-              <a:buNone/>
-            </a:pPr>
-            <a:r>
-              <a:rPr lang="en-US" sz="1300" b="1" dirty="0">
-                <a:solidFill>
-                  <a:srgbClr val="4338CA"/>
-                </a:solidFill>
-                <a:latin typeface="Trebuchet MS" pitchFamily="34" charset="0"/>
-                <a:ea typeface="Trebuchet MS" pitchFamily="34" charset="-122"/>
-                <a:cs typeface="Trebuchet MS" pitchFamily="34" charset="-120"/>
-              </a:rPr>
-              <a:t>sticky</a:t>
-            </a:r>
-            <a:endParaRPr lang="en-US" sz="1300" dirty="0"/>
-          </a:p>
-        </p:txBody>
-      </p:sp>
-      <p:sp>
-        <p:nvSpPr>
-          <p:cNvPr id="22" name="Shape 20"/>
-          <p:cNvSpPr/>
-          <p:nvPr/>
-        </p:nvSpPr>
-        <p:spPr>
-          <a:xfrm>
-            <a:off x="6812280" y="2743200"/>
-            <a:ext cx="2011680" cy="502920"/>
-          </a:xfrm>
-          <a:prstGeom prst="rect">
-            <a:avLst>
-              <a:gd name="adj" fmla="val 14545"/>
-            </a:avLst>
-          </a:prstGeom>
-          <a:solidFill>
-            <a:srgbClr val="EEF2FF"/>
-          </a:solidFill>
-          <a:ln w="12700">
-            <a:solidFill>
-              <a:srgbClr val="6366F1"/>
-            </a:solidFill>
-            <a:prstDash val="solid"/>
-          </a:ln>
-        </p:spPr>
-      </p:sp>
-      <p:sp>
-        <p:nvSpPr>
-          <p:cNvPr id="23" name="Text 21"/>
-          <p:cNvSpPr/>
-          <p:nvPr/>
-        </p:nvSpPr>
-        <p:spPr>
-          <a:xfrm>
-            <a:off x="6812280" y="2743200"/>
-            <a:ext cx="2011680" cy="502920"/>
-          </a:xfrm>
-          <a:prstGeom prst="rect">
-            <a:avLst/>
-          </a:prstGeom>
-          <a:noFill/>
-          <a:ln/>
-        </p:spPr>
-        <p:txBody>
-          <a:bodyPr wrap="square" lIns="0" tIns="0" rIns="0" bIns="0" rtlCol="0" anchor="ctr"/>
-          <a:lstStyle/>
-          <a:p>
-            <a:pPr algn="ctr" indent="0" marL="0">
-              <a:buNone/>
-            </a:pPr>
-            <a:r>
-              <a:rPr lang="en-US" sz="1300" b="1" dirty="0">
-                <a:solidFill>
-                  <a:srgbClr val="4338CA"/>
-                </a:solidFill>
-                <a:latin typeface="Trebuchet MS" pitchFamily="34" charset="0"/>
-                <a:ea typeface="Trebuchet MS" pitchFamily="34" charset="-122"/>
-                <a:cs typeface="Trebuchet MS" pitchFamily="34" charset="-120"/>
-              </a:rPr>
-              <a:t>drumstick</a:t>
-            </a:r>
-            <a:endParaRPr lang="en-US" sz="1300" dirty="0"/>
-          </a:p>
-        </p:txBody>
-      </p:sp>
-      <p:sp>
-        <p:nvSpPr>
-          <p:cNvPr id="24" name="Shape 22"/>
-          <p:cNvSpPr/>
-          <p:nvPr/>
-        </p:nvSpPr>
-        <p:spPr>
-          <a:xfrm>
-            <a:off x="365760" y="3401568"/>
-            <a:ext cx="2011680" cy="502920"/>
-          </a:xfrm>
-          <a:prstGeom prst="rect">
-            <a:avLst>
-              <a:gd name="adj" fmla="val 14545"/>
-            </a:avLst>
-          </a:prstGeom>
-          <a:solidFill>
-            <a:srgbClr val="EEF2FF"/>
-          </a:solidFill>
-          <a:ln w="12700">
-            <a:solidFill>
-              <a:srgbClr val="6366F1"/>
-            </a:solidFill>
-            <a:prstDash val="solid"/>
-          </a:ln>
-        </p:spPr>
-      </p:sp>
-      <p:sp>
-        <p:nvSpPr>
-          <p:cNvPr id="25" name="Text 23"/>
-          <p:cNvSpPr/>
-          <p:nvPr/>
-        </p:nvSpPr>
-        <p:spPr>
-          <a:xfrm>
-            <a:off x="365760" y="3401568"/>
-            <a:ext cx="2011680" cy="502920"/>
-          </a:xfrm>
-          <a:prstGeom prst="rect">
-            <a:avLst/>
-          </a:prstGeom>
-          <a:noFill/>
-          <a:ln/>
-        </p:spPr>
-        <p:txBody>
-          <a:bodyPr wrap="square" lIns="0" tIns="0" rIns="0" bIns="0" rtlCol="0" anchor="ctr"/>
-          <a:lstStyle/>
-          <a:p>
-            <a:pPr algn="ctr" indent="0" marL="0">
-              <a:buNone/>
-            </a:pPr>
-            <a:r>
-              <a:rPr lang="en-US" sz="1300" b="1" dirty="0">
-                <a:solidFill>
-                  <a:srgbClr val="4338CA"/>
-                </a:solidFill>
-                <a:latin typeface="Trebuchet MS" pitchFamily="34" charset="0"/>
-                <a:ea typeface="Trebuchet MS" pitchFamily="34" charset="-122"/>
-                <a:cs typeface="Trebuchet MS" pitchFamily="34" charset="-120"/>
-              </a:rPr>
-              <a:t>lipstick</a:t>
-            </a:r>
-            <a:endParaRPr lang="en-US" sz="1300" dirty="0"/>
-          </a:p>
-        </p:txBody>
-      </p:sp>
-      <p:sp>
-        <p:nvSpPr>
-          <p:cNvPr id="26" name="Shape 24"/>
-          <p:cNvSpPr/>
-          <p:nvPr/>
-        </p:nvSpPr>
-        <p:spPr>
-          <a:xfrm>
-            <a:off x="2514600" y="3401568"/>
-            <a:ext cx="2011680" cy="502920"/>
-          </a:xfrm>
-          <a:prstGeom prst="rect">
-            <a:avLst>
-              <a:gd name="adj" fmla="val 14545"/>
-            </a:avLst>
-          </a:prstGeom>
-          <a:solidFill>
-            <a:srgbClr val="EEF2FF"/>
-          </a:solidFill>
-          <a:ln w="12700">
-            <a:solidFill>
-              <a:srgbClr val="6366F1"/>
-            </a:solidFill>
-            <a:prstDash val="solid"/>
-          </a:ln>
-        </p:spPr>
-      </p:sp>
-      <p:sp>
-        <p:nvSpPr>
-          <p:cNvPr id="27" name="Text 25"/>
-          <p:cNvSpPr/>
-          <p:nvPr/>
-        </p:nvSpPr>
-        <p:spPr>
-          <a:xfrm>
-            <a:off x="2514600" y="3401568"/>
-            <a:ext cx="2011680" cy="502920"/>
-          </a:xfrm>
-          <a:prstGeom prst="rect">
-            <a:avLst/>
-          </a:prstGeom>
-          <a:noFill/>
-          <a:ln/>
-        </p:spPr>
-        <p:txBody>
-          <a:bodyPr wrap="square" lIns="0" tIns="0" rIns="0" bIns="0" rtlCol="0" anchor="ctr"/>
-          <a:lstStyle/>
-          <a:p>
-            <a:pPr algn="ctr" indent="0" marL="0">
-              <a:buNone/>
-            </a:pPr>
-            <a:r>
-              <a:rPr lang="en-US" sz="1300" b="1" dirty="0">
-                <a:solidFill>
-                  <a:srgbClr val="4338CA"/>
-                </a:solidFill>
-                <a:latin typeface="Trebuchet MS" pitchFamily="34" charset="0"/>
-                <a:ea typeface="Trebuchet MS" pitchFamily="34" charset="-122"/>
-                <a:cs typeface="Trebuchet MS" pitchFamily="34" charset="-120"/>
-              </a:rPr>
-              <a:t>chopstick</a:t>
-            </a:r>
-            <a:endParaRPr lang="en-US" sz="1300" dirty="0"/>
-          </a:p>
-        </p:txBody>
-      </p:sp>
-      <p:sp>
-        <p:nvSpPr>
-          <p:cNvPr id="28" name="Shape 26"/>
-          <p:cNvSpPr/>
-          <p:nvPr/>
-        </p:nvSpPr>
-        <p:spPr>
-          <a:xfrm>
-            <a:off x="4663440" y="3401568"/>
-            <a:ext cx="2011680" cy="502920"/>
-          </a:xfrm>
-          <a:prstGeom prst="rect">
-            <a:avLst>
-              <a:gd name="adj" fmla="val 14545"/>
-            </a:avLst>
-          </a:prstGeom>
-          <a:solidFill>
-            <a:srgbClr val="EEF2FF"/>
-          </a:solidFill>
-          <a:ln w="12700">
-            <a:solidFill>
-              <a:srgbClr val="6366F1"/>
-            </a:solidFill>
-            <a:prstDash val="solid"/>
-          </a:ln>
-        </p:spPr>
-      </p:sp>
-      <p:sp>
-        <p:nvSpPr>
-          <p:cNvPr id="29" name="Text 27"/>
-          <p:cNvSpPr/>
-          <p:nvPr/>
-        </p:nvSpPr>
-        <p:spPr>
-          <a:xfrm>
-            <a:off x="4663440" y="3401568"/>
-            <a:ext cx="2011680" cy="502920"/>
-          </a:xfrm>
-          <a:prstGeom prst="rect">
-            <a:avLst/>
-          </a:prstGeom>
-          <a:noFill/>
-          <a:ln/>
-        </p:spPr>
-        <p:txBody>
-          <a:bodyPr wrap="square" lIns="0" tIns="0" rIns="0" bIns="0" rtlCol="0" anchor="ctr"/>
-          <a:lstStyle/>
-          <a:p>
-            <a:pPr algn="ctr" indent="0" marL="0">
-              <a:buNone/>
-            </a:pPr>
-            <a:r>
-              <a:rPr lang="en-US" sz="1300" b="1" dirty="0">
-                <a:solidFill>
-                  <a:srgbClr val="4338CA"/>
-                </a:solidFill>
-                <a:latin typeface="Trebuchet MS" pitchFamily="34" charset="0"/>
-                <a:ea typeface="Trebuchet MS" pitchFamily="34" charset="-122"/>
-                <a:cs typeface="Trebuchet MS" pitchFamily="34" charset="-120"/>
-              </a:rPr>
-              <a:t>nonstick</a:t>
+              <a:t>sticks</a:t>
             </a:r>
             <a:endParaRPr lang="en-US" sz="1300" dirty="0"/>
           </a:p>
@@ -37564,7 +36706,7 @@
                 <a:ea typeface="Calibri" pitchFamily="34" charset="-122"/>
                 <a:cs typeface="Calibri" pitchFamily="34" charset="-120"/>
               </a:rPr>
-              <a:t>Word Labs  •  wordlabs.app  •  Root: 'stick' = to adhere, fasten, or pierce</a:t>
+              <a:t>Word Labs  •  wordlabs.app  •  Root: 'stick' = a thin piece of wood; to attach</a:t>
             </a:r>
             <a:endParaRPr lang="en-US" sz="800" dirty="0"/>
           </a:p>
@@ -37865,7 +37007,7 @@
                 <a:ea typeface="Trebuchet MS" pitchFamily="34" charset="-122"/>
                 <a:cs typeface="Trebuchet MS" pitchFamily="34" charset="-120"/>
               </a:rPr>
-              <a:t>lip-</a:t>
+              <a:t>non-</a:t>
             </a:r>
             <a:endParaRPr lang="en-US" sz="1300" dirty="0"/>
           </a:p>
@@ -37993,7 +37135,7 @@
                 <a:ea typeface="Trebuchet MS" pitchFamily="34" charset="-122"/>
                 <a:cs typeface="Trebuchet MS" pitchFamily="34" charset="-120"/>
               </a:rPr>
-              <a:t>--er</a:t>
+              <a:t>-er</a:t>
             </a:r>
             <a:endParaRPr lang="en-US" sz="1300" dirty="0"/>
           </a:p>
@@ -38014,7 +37156,7 @@
             <a:avLst/>
           </a:prstGeom>
           <a:solidFill>
-            <a:srgbClr val="DDD6FE"/>
+            <a:srgbClr val="F1F5F9"/>
           </a:solidFill>
           <a:ln w="12700">
             <a:solidFill>
@@ -38026,18 +37168,68 @@
       </p:sp>
       <p:sp>
         <p:nvSpPr>
-          <p:cNvPr id="24" name="Text 22"/>
-          <p:cNvSpPr/>
-          <p:nvPr/>
-        </p:nvSpPr>
-        <p:spPr>
-          <a:xfrm>
-            <a:off x="640080" y="2212848"/>
+          <p:cNvPr id="24" name="Shape 22"/>
+          <p:cNvSpPr/>
+          <p:nvPr/>
+        </p:nvSpPr>
+        <p:spPr>
+          <a:xfrm>
+            <a:off x="3291840" y="2212848"/>
+            <a:ext cx="1645920" cy="420624"/>
+          </a:xfrm>
+          <a:prstGeom prst="rect">
+            <a:avLst/>
+          </a:prstGeom>
+          <a:solidFill>
+            <a:srgbClr val="F1F5F9"/>
+          </a:solidFill>
+          <a:ln w="12700">
+            <a:solidFill>
+              <a:srgbClr val="E5E7EB"/>
+            </a:solidFill>
+            <a:prstDash val="solid"/>
+          </a:ln>
+        </p:spPr>
+      </p:sp>
+      <p:sp>
+        <p:nvSpPr>
+          <p:cNvPr id="25" name="Shape 23"/>
+          <p:cNvSpPr/>
+          <p:nvPr/>
+        </p:nvSpPr>
+        <p:spPr>
+          <a:xfrm>
+            <a:off x="5943600" y="2212848"/>
             <a:ext cx="1463040" cy="420624"/>
           </a:xfrm>
           <a:prstGeom prst="rect">
             <a:avLst/>
           </a:prstGeom>
+          <a:solidFill>
+            <a:srgbClr val="FCE7F3"/>
+          </a:solidFill>
+          <a:ln w="12700">
+            <a:solidFill>
+              <a:srgbClr val="E5E7EB"/>
+            </a:solidFill>
+            <a:prstDash val="solid"/>
+          </a:ln>
+        </p:spPr>
+      </p:sp>
+      <p:sp>
+        <p:nvSpPr>
+          <p:cNvPr id="26" name="Text 24"/>
+          <p:cNvSpPr/>
+          <p:nvPr/>
+        </p:nvSpPr>
+        <p:spPr>
+          <a:xfrm>
+            <a:off x="5943600" y="2212848"/>
+            <a:ext cx="1463040" cy="420624"/>
+          </a:xfrm>
+          <a:prstGeom prst="rect">
+            <a:avLst/>
+          </a:prstGeom>
           <a:noFill/>
           <a:ln/>
         </p:spPr>
@@ -38051,13 +37243,13 @@
             <a:r>
               <a:rPr lang="en-US" sz="1300" b="1" dirty="0">
                 <a:solidFill>
-                  <a:srgbClr val="4C1D95"/>
+                  <a:srgbClr val="9D174D"/>
                 </a:solidFill>
                 <a:latin typeface="Trebuchet MS" pitchFamily="34" charset="0"/>
                 <a:ea typeface="Trebuchet MS" pitchFamily="34" charset="-122"/>
                 <a:cs typeface="Trebuchet MS" pitchFamily="34" charset="-120"/>
               </a:rPr>
-              <a:t>chop-</a:t>
+              <a:t>-ing</a:t>
             </a:r>
             <a:endParaRPr lang="en-US" sz="1300" dirty="0"/>
           </a:p>
@@ -38065,20 +37257,45 @@
       </p:sp>
       <p:sp>
         <p:nvSpPr>
-          <p:cNvPr id="25" name="Shape 23"/>
-          <p:cNvSpPr/>
-          <p:nvPr/>
-        </p:nvSpPr>
-        <p:spPr>
-          <a:xfrm>
-            <a:off x="3291840" y="2212848"/>
+          <p:cNvPr id="27" name="Shape 25"/>
+          <p:cNvSpPr/>
+          <p:nvPr/>
+        </p:nvSpPr>
+        <p:spPr>
+          <a:xfrm>
+            <a:off x="640080" y="2670048"/>
+            <a:ext cx="1463040" cy="420624"/>
+          </a:xfrm>
+          <a:prstGeom prst="rect">
+            <a:avLst/>
+          </a:prstGeom>
+          <a:solidFill>
+            <a:srgbClr val="F8FAFC"/>
+          </a:solidFill>
+          <a:ln w="12700">
+            <a:solidFill>
+              <a:srgbClr val="E5E7EB"/>
+            </a:solidFill>
+            <a:prstDash val="solid"/>
+          </a:ln>
+        </p:spPr>
+      </p:sp>
+      <p:sp>
+        <p:nvSpPr>
+          <p:cNvPr id="28" name="Shape 26"/>
+          <p:cNvSpPr/>
+          <p:nvPr/>
+        </p:nvSpPr>
+        <p:spPr>
+          <a:xfrm>
+            <a:off x="3291840" y="2670048"/>
             <a:ext cx="1645920" cy="420624"/>
           </a:xfrm>
           <a:prstGeom prst="rect">
             <a:avLst/>
           </a:prstGeom>
           <a:solidFill>
-            <a:srgbClr val="F1F5F9"/>
+            <a:srgbClr val="F8FAFC"/>
           </a:solidFill>
           <a:ln w="12700">
             <a:solidFill>
@@ -38090,13 +37307,13 @@
       </p:sp>
       <p:sp>
         <p:nvSpPr>
-          <p:cNvPr id="26" name="Shape 24"/>
-          <p:cNvSpPr/>
-          <p:nvPr/>
-        </p:nvSpPr>
-        <p:spPr>
-          <a:xfrm>
-            <a:off x="5943600" y="2212848"/>
+          <p:cNvPr id="29" name="Shape 27"/>
+          <p:cNvSpPr/>
+          <p:nvPr/>
+        </p:nvSpPr>
+        <p:spPr>
+          <a:xfrm>
+            <a:off x="5943600" y="2670048"/>
             <a:ext cx="1463040" cy="420624"/>
           </a:xfrm>
           <a:prstGeom prst="rect">
@@ -38115,13 +37332,13 @@
       </p:sp>
       <p:sp>
         <p:nvSpPr>
-          <p:cNvPr id="27" name="Text 25"/>
-          <p:cNvSpPr/>
-          <p:nvPr/>
-        </p:nvSpPr>
-        <p:spPr>
-          <a:xfrm>
-            <a:off x="5943600" y="2212848"/>
+          <p:cNvPr id="30" name="Text 28"/>
+          <p:cNvSpPr/>
+          <p:nvPr/>
+        </p:nvSpPr>
+        <p:spPr>
+          <a:xfrm>
+            <a:off x="5943600" y="2670048"/>
             <a:ext cx="1463040" cy="420624"/>
           </a:xfrm>
           <a:prstGeom prst="rect">
@@ -38146,7 +37363,7 @@
                 <a:ea typeface="Trebuchet MS" pitchFamily="34" charset="-122"/>
                 <a:cs typeface="Trebuchet MS" pitchFamily="34" charset="-120"/>
               </a:rPr>
-              <a:t>--ing</a:t>
+              <a:t>-s</a:t>
             </a:r>
             <a:endParaRPr lang="en-US" sz="1300" dirty="0"/>
           </a:p>
@@ -38154,20 +37371,20 @@
       </p:sp>
       <p:sp>
         <p:nvSpPr>
-          <p:cNvPr id="28" name="Shape 26"/>
-          <p:cNvSpPr/>
-          <p:nvPr/>
-        </p:nvSpPr>
-        <p:spPr>
-          <a:xfrm>
-            <a:off x="640080" y="2670048"/>
+          <p:cNvPr id="31" name="Shape 29"/>
+          <p:cNvSpPr/>
+          <p:nvPr/>
+        </p:nvSpPr>
+        <p:spPr>
+          <a:xfrm>
+            <a:off x="640080" y="3127248"/>
             <a:ext cx="1463040" cy="420624"/>
           </a:xfrm>
           <a:prstGeom prst="rect">
             <a:avLst/>
           </a:prstGeom>
           <a:solidFill>
-            <a:srgbClr val="DDD6FE"/>
+            <a:srgbClr val="F1F5F9"/>
           </a:solidFill>
           <a:ln w="12700">
             <a:solidFill>
@@ -38179,18 +37396,68 @@
       </p:sp>
       <p:sp>
         <p:nvSpPr>
-          <p:cNvPr id="29" name="Text 27"/>
-          <p:cNvSpPr/>
-          <p:nvPr/>
-        </p:nvSpPr>
-        <p:spPr>
-          <a:xfrm>
-            <a:off x="640080" y="2670048"/>
+          <p:cNvPr id="32" name="Shape 30"/>
+          <p:cNvSpPr/>
+          <p:nvPr/>
+        </p:nvSpPr>
+        <p:spPr>
+          <a:xfrm>
+            <a:off x="3291840" y="3127248"/>
+            <a:ext cx="1645920" cy="420624"/>
+          </a:xfrm>
+          <a:prstGeom prst="rect">
+            <a:avLst/>
+          </a:prstGeom>
+          <a:solidFill>
+            <a:srgbClr val="F1F5F9"/>
+          </a:solidFill>
+          <a:ln w="12700">
+            <a:solidFill>
+              <a:srgbClr val="E5E7EB"/>
+            </a:solidFill>
+            <a:prstDash val="solid"/>
+          </a:ln>
+        </p:spPr>
+      </p:sp>
+      <p:sp>
+        <p:nvSpPr>
+          <p:cNvPr id="33" name="Shape 31"/>
+          <p:cNvSpPr/>
+          <p:nvPr/>
+        </p:nvSpPr>
+        <p:spPr>
+          <a:xfrm>
+            <a:off x="5943600" y="3127248"/>
             <a:ext cx="1463040" cy="420624"/>
           </a:xfrm>
           <a:prstGeom prst="rect">
             <a:avLst/>
           </a:prstGeom>
+          <a:solidFill>
+            <a:srgbClr val="FCE7F3"/>
+          </a:solidFill>
+          <a:ln w="12700">
+            <a:solidFill>
+              <a:srgbClr val="E5E7EB"/>
+            </a:solidFill>
+            <a:prstDash val="solid"/>
+          </a:ln>
+        </p:spPr>
+      </p:sp>
+      <p:sp>
+        <p:nvSpPr>
+          <p:cNvPr id="34" name="Text 32"/>
+          <p:cNvSpPr/>
+          <p:nvPr/>
+        </p:nvSpPr>
+        <p:spPr>
+          <a:xfrm>
+            <a:off x="5943600" y="3127248"/>
+            <a:ext cx="1463040" cy="420624"/>
+          </a:xfrm>
+          <a:prstGeom prst="rect">
+            <a:avLst/>
+          </a:prstGeom>
           <a:noFill/>
           <a:ln/>
         </p:spPr>
@@ -38204,13 +37471,13 @@
             <a:r>
               <a:rPr lang="en-US" sz="1300" b="1" dirty="0">
                 <a:solidFill>
-                  <a:srgbClr val="4C1D95"/>
+                  <a:srgbClr val="9D174D"/>
                 </a:solidFill>
                 <a:latin typeface="Trebuchet MS" pitchFamily="34" charset="0"/>
                 <a:ea typeface="Trebuchet MS" pitchFamily="34" charset="-122"/>
                 <a:cs typeface="Trebuchet MS" pitchFamily="34" charset="-120"/>
               </a:rPr>
-              <a:t>drum-</a:t>
+              <a:t>-y</a:t>
             </a:r>
             <a:endParaRPr lang="en-US" sz="1300" dirty="0"/>
           </a:p>
@@ -38218,408 +37485,13 @@
       </p:sp>
       <p:sp>
         <p:nvSpPr>
-          <p:cNvPr id="30" name="Shape 28"/>
-          <p:cNvSpPr/>
-          <p:nvPr/>
-        </p:nvSpPr>
-        <p:spPr>
-          <a:xfrm>
-            <a:off x="3291840" y="2670048"/>
-            <a:ext cx="1645920" cy="420624"/>
-          </a:xfrm>
-          <a:prstGeom prst="rect">
-            <a:avLst/>
-          </a:prstGeom>
-          <a:solidFill>
-            <a:srgbClr val="F8FAFC"/>
-          </a:solidFill>
-          <a:ln w="12700">
-            <a:solidFill>
-              <a:srgbClr val="E5E7EB"/>
-            </a:solidFill>
-            <a:prstDash val="solid"/>
-          </a:ln>
-        </p:spPr>
-      </p:sp>
-      <p:sp>
-        <p:nvSpPr>
-          <p:cNvPr id="31" name="Shape 29"/>
-          <p:cNvSpPr/>
-          <p:nvPr/>
-        </p:nvSpPr>
-        <p:spPr>
-          <a:xfrm>
-            <a:off x="5943600" y="2670048"/>
-            <a:ext cx="1463040" cy="420624"/>
-          </a:xfrm>
-          <a:prstGeom prst="rect">
-            <a:avLst/>
-          </a:prstGeom>
-          <a:solidFill>
-            <a:srgbClr val="FCE7F3"/>
-          </a:solidFill>
-          <a:ln w="12700">
-            <a:solidFill>
-              <a:srgbClr val="E5E7EB"/>
-            </a:solidFill>
-            <a:prstDash val="solid"/>
-          </a:ln>
-        </p:spPr>
-      </p:sp>
-      <p:sp>
-        <p:nvSpPr>
-          <p:cNvPr id="32" name="Text 30"/>
-          <p:cNvSpPr/>
-          <p:nvPr/>
-        </p:nvSpPr>
-        <p:spPr>
-          <a:xfrm>
-            <a:off x="5943600" y="2670048"/>
-            <a:ext cx="1463040" cy="420624"/>
-          </a:xfrm>
-          <a:prstGeom prst="rect">
-            <a:avLst/>
-          </a:prstGeom>
-          <a:noFill/>
-          <a:ln/>
-        </p:spPr>
-        <p:txBody>
-          <a:bodyPr wrap="square" lIns="0" tIns="0" rIns="0" bIns="0" rtlCol="0" anchor="ctr"/>
-          <a:lstStyle/>
-          <a:p>
-            <a:pPr algn="ctr" indent="0" marL="0">
-              <a:buNone/>
-            </a:pPr>
-            <a:r>
-              <a:rPr lang="en-US" sz="1300" b="1" dirty="0">
-                <a:solidFill>
-                  <a:srgbClr val="9D174D"/>
-                </a:solidFill>
-                <a:latin typeface="Trebuchet MS" pitchFamily="34" charset="0"/>
-                <a:ea typeface="Trebuchet MS" pitchFamily="34" charset="-122"/>
-                <a:cs typeface="Trebuchet MS" pitchFamily="34" charset="-120"/>
-              </a:rPr>
-              <a:t>--y</a:t>
-            </a:r>
-            <a:endParaRPr lang="en-US" sz="1300" dirty="0"/>
-          </a:p>
-        </p:txBody>
-      </p:sp>
-      <p:sp>
-        <p:nvSpPr>
-          <p:cNvPr id="33" name="Shape 31"/>
-          <p:cNvSpPr/>
-          <p:nvPr/>
-        </p:nvSpPr>
-        <p:spPr>
-          <a:xfrm>
-            <a:off x="640080" y="3127248"/>
-            <a:ext cx="1463040" cy="420624"/>
-          </a:xfrm>
-          <a:prstGeom prst="rect">
-            <a:avLst/>
-          </a:prstGeom>
-          <a:solidFill>
-            <a:srgbClr val="DDD6FE"/>
-          </a:solidFill>
-          <a:ln w="12700">
-            <a:solidFill>
-              <a:srgbClr val="E5E7EB"/>
-            </a:solidFill>
-            <a:prstDash val="solid"/>
-          </a:ln>
-        </p:spPr>
-      </p:sp>
-      <p:sp>
-        <p:nvSpPr>
-          <p:cNvPr id="34" name="Text 32"/>
-          <p:cNvSpPr/>
-          <p:nvPr/>
-        </p:nvSpPr>
-        <p:spPr>
-          <a:xfrm>
-            <a:off x="640080" y="3127248"/>
-            <a:ext cx="1463040" cy="420624"/>
-          </a:xfrm>
-          <a:prstGeom prst="rect">
-            <a:avLst/>
-          </a:prstGeom>
-          <a:noFill/>
-          <a:ln/>
-        </p:spPr>
-        <p:txBody>
-          <a:bodyPr wrap="square" lIns="0" tIns="0" rIns="0" bIns="0" rtlCol="0" anchor="ctr"/>
-          <a:lstStyle/>
-          <a:p>
-            <a:pPr algn="ctr" indent="0" marL="0">
-              <a:buNone/>
-            </a:pPr>
-            <a:r>
-              <a:rPr lang="en-US" sz="1300" b="1" dirty="0">
-                <a:solidFill>
-                  <a:srgbClr val="4C1D95"/>
-                </a:solidFill>
-                <a:latin typeface="Trebuchet MS" pitchFamily="34" charset="0"/>
-                <a:ea typeface="Trebuchet MS" pitchFamily="34" charset="-122"/>
-                <a:cs typeface="Trebuchet MS" pitchFamily="34" charset="-120"/>
-              </a:rPr>
-              <a:t>non-</a:t>
-            </a:r>
-            <a:endParaRPr lang="en-US" sz="1300" dirty="0"/>
-          </a:p>
-        </p:txBody>
-      </p:sp>
-      <p:sp>
-        <p:nvSpPr>
-          <p:cNvPr id="35" name="Shape 33"/>
-          <p:cNvSpPr/>
-          <p:nvPr/>
-        </p:nvSpPr>
-        <p:spPr>
-          <a:xfrm>
-            <a:off x="3291840" y="3127248"/>
-            <a:ext cx="1645920" cy="420624"/>
-          </a:xfrm>
-          <a:prstGeom prst="rect">
-            <a:avLst/>
-          </a:prstGeom>
-          <a:solidFill>
-            <a:srgbClr val="F1F5F9"/>
-          </a:solidFill>
-          <a:ln w="12700">
-            <a:solidFill>
-              <a:srgbClr val="E5E7EB"/>
-            </a:solidFill>
-            <a:prstDash val="solid"/>
-          </a:ln>
-        </p:spPr>
-      </p:sp>
-      <p:sp>
-        <p:nvSpPr>
-          <p:cNvPr id="36" name="Shape 34"/>
-          <p:cNvSpPr/>
-          <p:nvPr/>
-        </p:nvSpPr>
-        <p:spPr>
-          <a:xfrm>
-            <a:off x="5943600" y="3127248"/>
-            <a:ext cx="1463040" cy="420624"/>
-          </a:xfrm>
-          <a:prstGeom prst="rect">
-            <a:avLst/>
-          </a:prstGeom>
-          <a:solidFill>
-            <a:srgbClr val="FCE7F3"/>
-          </a:solidFill>
-          <a:ln w="12700">
-            <a:solidFill>
-              <a:srgbClr val="E5E7EB"/>
-            </a:solidFill>
-            <a:prstDash val="solid"/>
-          </a:ln>
-        </p:spPr>
-      </p:sp>
-      <p:sp>
-        <p:nvSpPr>
-          <p:cNvPr id="37" name="Text 35"/>
-          <p:cNvSpPr/>
-          <p:nvPr/>
-        </p:nvSpPr>
-        <p:spPr>
-          <a:xfrm>
-            <a:off x="5943600" y="3127248"/>
-            <a:ext cx="1463040" cy="420624"/>
-          </a:xfrm>
-          <a:prstGeom prst="rect">
-            <a:avLst/>
-          </a:prstGeom>
-          <a:noFill/>
-          <a:ln/>
-        </p:spPr>
-        <p:txBody>
-          <a:bodyPr wrap="square" lIns="0" tIns="0" rIns="0" bIns="0" rtlCol="0" anchor="ctr"/>
-          <a:lstStyle/>
-          <a:p>
-            <a:pPr algn="ctr" indent="0" marL="0">
-              <a:buNone/>
-            </a:pPr>
-            <a:r>
-              <a:rPr lang="en-US" sz="1300" b="1" dirty="0">
-                <a:solidFill>
-                  <a:srgbClr val="9D174D"/>
-                </a:solidFill>
-                <a:latin typeface="Trebuchet MS" pitchFamily="34" charset="0"/>
-                <a:ea typeface="Trebuchet MS" pitchFamily="34" charset="-122"/>
-                <a:cs typeface="Trebuchet MS" pitchFamily="34" charset="-120"/>
-              </a:rPr>
-              <a:t>--ier</a:t>
-            </a:r>
-            <a:endParaRPr lang="en-US" sz="1300" dirty="0"/>
-          </a:p>
-        </p:txBody>
-      </p:sp>
-      <p:sp>
-        <p:nvSpPr>
-          <p:cNvPr id="38" name="Shape 36"/>
-          <p:cNvSpPr/>
-          <p:nvPr/>
-        </p:nvSpPr>
-        <p:spPr>
-          <a:xfrm>
-            <a:off x="640080" y="3584448"/>
-            <a:ext cx="1463040" cy="420624"/>
-          </a:xfrm>
-          <a:prstGeom prst="rect">
-            <a:avLst/>
-          </a:prstGeom>
-          <a:solidFill>
-            <a:srgbClr val="DDD6FE"/>
-          </a:solidFill>
-          <a:ln w="12700">
-            <a:solidFill>
-              <a:srgbClr val="E5E7EB"/>
-            </a:solidFill>
-            <a:prstDash val="solid"/>
-          </a:ln>
-        </p:spPr>
-      </p:sp>
-      <p:sp>
-        <p:nvSpPr>
-          <p:cNvPr id="39" name="Text 37"/>
-          <p:cNvSpPr/>
-          <p:nvPr/>
-        </p:nvSpPr>
-        <p:spPr>
-          <a:xfrm>
-            <a:off x="640080" y="3584448"/>
-            <a:ext cx="1463040" cy="420624"/>
-          </a:xfrm>
-          <a:prstGeom prst="rect">
-            <a:avLst/>
-          </a:prstGeom>
-          <a:noFill/>
-          <a:ln/>
-        </p:spPr>
-        <p:txBody>
-          <a:bodyPr wrap="square" lIns="0" tIns="0" rIns="0" bIns="0" rtlCol="0" anchor="ctr"/>
-          <a:lstStyle/>
-          <a:p>
-            <a:pPr algn="ctr" indent="0" marL="0">
-              <a:buNone/>
-            </a:pPr>
-            <a:r>
-              <a:rPr lang="en-US" sz="1300" b="1" dirty="0">
-                <a:solidFill>
-                  <a:srgbClr val="4C1D95"/>
-                </a:solidFill>
-                <a:latin typeface="Trebuchet MS" pitchFamily="34" charset="0"/>
-                <a:ea typeface="Trebuchet MS" pitchFamily="34" charset="-122"/>
-                <a:cs typeface="Trebuchet MS" pitchFamily="34" charset="-120"/>
-              </a:rPr>
-              <a:t>can-</a:t>
-            </a:r>
-            <a:endParaRPr lang="en-US" sz="1300" dirty="0"/>
-          </a:p>
-        </p:txBody>
-      </p:sp>
-      <p:sp>
-        <p:nvSpPr>
-          <p:cNvPr id="40" name="Shape 38"/>
-          <p:cNvSpPr/>
-          <p:nvPr/>
-        </p:nvSpPr>
-        <p:spPr>
-          <a:xfrm>
-            <a:off x="3291840" y="3584448"/>
-            <a:ext cx="1645920" cy="420624"/>
-          </a:xfrm>
-          <a:prstGeom prst="rect">
-            <a:avLst/>
-          </a:prstGeom>
-          <a:solidFill>
-            <a:srgbClr val="F8FAFC"/>
-          </a:solidFill>
-          <a:ln w="12700">
-            <a:solidFill>
-              <a:srgbClr val="E5E7EB"/>
-            </a:solidFill>
-            <a:prstDash val="solid"/>
-          </a:ln>
-        </p:spPr>
-      </p:sp>
-      <p:sp>
-        <p:nvSpPr>
-          <p:cNvPr id="41" name="Shape 39"/>
-          <p:cNvSpPr/>
-          <p:nvPr/>
-        </p:nvSpPr>
-        <p:spPr>
-          <a:xfrm>
-            <a:off x="5943600" y="3584448"/>
-            <a:ext cx="1463040" cy="420624"/>
-          </a:xfrm>
-          <a:prstGeom prst="rect">
-            <a:avLst/>
-          </a:prstGeom>
-          <a:solidFill>
-            <a:srgbClr val="FCE7F3"/>
-          </a:solidFill>
-          <a:ln w="12700">
-            <a:solidFill>
-              <a:srgbClr val="E5E7EB"/>
-            </a:solidFill>
-            <a:prstDash val="solid"/>
-          </a:ln>
-        </p:spPr>
-      </p:sp>
-      <p:sp>
-        <p:nvSpPr>
-          <p:cNvPr id="42" name="Text 40"/>
-          <p:cNvSpPr/>
-          <p:nvPr/>
-        </p:nvSpPr>
-        <p:spPr>
-          <a:xfrm>
-            <a:off x="5943600" y="3584448"/>
-            <a:ext cx="1463040" cy="420624"/>
-          </a:xfrm>
-          <a:prstGeom prst="rect">
-            <a:avLst/>
-          </a:prstGeom>
-          <a:noFill/>
-          <a:ln/>
-        </p:spPr>
-        <p:txBody>
-          <a:bodyPr wrap="square" lIns="0" tIns="0" rIns="0" bIns="0" rtlCol="0" anchor="ctr"/>
-          <a:lstStyle/>
-          <a:p>
-            <a:pPr algn="ctr" indent="0" marL="0">
-              <a:buNone/>
-            </a:pPr>
-            <a:r>
-              <a:rPr lang="en-US" sz="1300" b="1" dirty="0">
-                <a:solidFill>
-                  <a:srgbClr val="9D174D"/>
-                </a:solidFill>
-                <a:latin typeface="Trebuchet MS" pitchFamily="34" charset="0"/>
-                <a:ea typeface="Trebuchet MS" pitchFamily="34" charset="-122"/>
-                <a:cs typeface="Trebuchet MS" pitchFamily="34" charset="-120"/>
-              </a:rPr>
-              <a:t>--iness</a:t>
-            </a:r>
-            <a:endParaRPr lang="en-US" sz="1300" dirty="0"/>
-          </a:p>
-        </p:txBody>
-      </p:sp>
-      <p:sp>
-        <p:nvSpPr>
-          <p:cNvPr id="43" name="Text 41"/>
-          <p:cNvSpPr/>
-          <p:nvPr/>
-        </p:nvSpPr>
-        <p:spPr>
-          <a:xfrm>
-            <a:off x="365760" y="4178808"/>
+          <p:cNvPr id="35" name="Text 33"/>
+          <p:cNvSpPr/>
+          <p:nvPr/>
+        </p:nvSpPr>
+        <p:spPr>
+          <a:xfrm>
+            <a:off x="365760" y="3721608"/>
             <a:ext cx="1097280" cy="420624"/>
           </a:xfrm>
           <a:prstGeom prst="rect">
@@ -38652,13 +37524,13 @@
       </p:sp>
       <p:sp>
         <p:nvSpPr>
-          <p:cNvPr id="44" name="Shape 42"/>
-          <p:cNvSpPr/>
-          <p:nvPr/>
-        </p:nvSpPr>
-        <p:spPr>
-          <a:xfrm>
-            <a:off x="1508760" y="4178808"/>
+          <p:cNvPr id="36" name="Shape 34"/>
+          <p:cNvSpPr/>
+          <p:nvPr/>
+        </p:nvSpPr>
+        <p:spPr>
+          <a:xfrm>
+            <a:off x="1508760" y="3721608"/>
             <a:ext cx="950976" cy="420624"/>
           </a:xfrm>
           <a:prstGeom prst="rect">
@@ -38686,13 +37558,13 @@
       </p:sp>
       <p:sp>
         <p:nvSpPr>
-          <p:cNvPr id="45" name="Text 43"/>
-          <p:cNvSpPr/>
-          <p:nvPr/>
-        </p:nvSpPr>
-        <p:spPr>
-          <a:xfrm>
-            <a:off x="1508760" y="4178808"/>
+          <p:cNvPr id="37" name="Text 35"/>
+          <p:cNvSpPr/>
+          <p:nvPr/>
+        </p:nvSpPr>
+        <p:spPr>
+          <a:xfrm>
+            <a:off x="1508760" y="3721608"/>
             <a:ext cx="950976" cy="420624"/>
           </a:xfrm>
           <a:prstGeom prst="rect">
@@ -38717,7 +37589,7 @@
                 <a:ea typeface="Trebuchet MS" pitchFamily="34" charset="-122"/>
                 <a:cs typeface="Trebuchet MS" pitchFamily="34" charset="-120"/>
               </a:rPr>
-              <a:t>lip-</a:t>
+              <a:t>non-</a:t>
             </a:r>
             <a:endParaRPr lang="en-US" sz="1300" dirty="0"/>
           </a:p>
@@ -38725,13 +37597,13 @@
       </p:sp>
       <p:sp>
         <p:nvSpPr>
-          <p:cNvPr id="46" name="Text 44"/>
-          <p:cNvSpPr/>
-          <p:nvPr/>
-        </p:nvSpPr>
-        <p:spPr>
-          <a:xfrm>
-            <a:off x="2487168" y="4178808"/>
+          <p:cNvPr id="38" name="Text 36"/>
+          <p:cNvSpPr/>
+          <p:nvPr/>
+        </p:nvSpPr>
+        <p:spPr>
+          <a:xfrm>
+            <a:off x="2487168" y="3721608"/>
             <a:ext cx="320040" cy="420624"/>
           </a:xfrm>
           <a:prstGeom prst="rect">
@@ -38764,13 +37636,13 @@
       </p:sp>
       <p:sp>
         <p:nvSpPr>
-          <p:cNvPr id="47" name="Shape 45"/>
-          <p:cNvSpPr/>
-          <p:nvPr/>
-        </p:nvSpPr>
-        <p:spPr>
-          <a:xfrm>
-            <a:off x="2834640" y="4178808"/>
+          <p:cNvPr id="39" name="Shape 37"/>
+          <p:cNvSpPr/>
+          <p:nvPr/>
+        </p:nvSpPr>
+        <p:spPr>
+          <a:xfrm>
+            <a:off x="2834640" y="3721608"/>
             <a:ext cx="1389888" cy="420624"/>
           </a:xfrm>
           <a:prstGeom prst="rect">
@@ -38798,13 +37670,13 @@
       </p:sp>
       <p:sp>
         <p:nvSpPr>
-          <p:cNvPr id="48" name="Text 46"/>
-          <p:cNvSpPr/>
-          <p:nvPr/>
-        </p:nvSpPr>
-        <p:spPr>
-          <a:xfrm>
-            <a:off x="2834640" y="4178808"/>
+          <p:cNvPr id="40" name="Text 38"/>
+          <p:cNvSpPr/>
+          <p:nvPr/>
+        </p:nvSpPr>
+        <p:spPr>
+          <a:xfrm>
+            <a:off x="2834640" y="3721608"/>
             <a:ext cx="1389888" cy="420624"/>
           </a:xfrm>
           <a:prstGeom prst="rect">
@@ -38837,13 +37709,13 @@
       </p:sp>
       <p:sp>
         <p:nvSpPr>
-          <p:cNvPr id="49" name="Text 47"/>
-          <p:cNvSpPr/>
-          <p:nvPr/>
-        </p:nvSpPr>
-        <p:spPr>
-          <a:xfrm>
-            <a:off x="4251960" y="4178808"/>
+          <p:cNvPr id="41" name="Text 39"/>
+          <p:cNvSpPr/>
+          <p:nvPr/>
+        </p:nvSpPr>
+        <p:spPr>
+          <a:xfrm>
+            <a:off x="4251960" y="3721608"/>
             <a:ext cx="320040" cy="420624"/>
           </a:xfrm>
           <a:prstGeom prst="rect">
@@ -38876,14 +37748,14 @@
       </p:sp>
       <p:sp>
         <p:nvSpPr>
-          <p:cNvPr id="50" name="Shape 48"/>
-          <p:cNvSpPr/>
-          <p:nvPr/>
-        </p:nvSpPr>
-        <p:spPr>
-          <a:xfrm>
-            <a:off x="4599432" y="4178808"/>
-            <a:ext cx="950976" cy="420624"/>
+          <p:cNvPr id="42" name="Shape 40"/>
+          <p:cNvSpPr/>
+          <p:nvPr/>
+        </p:nvSpPr>
+        <p:spPr>
+          <a:xfrm>
+            <a:off x="4599432" y="3721608"/>
+            <a:ext cx="822960" cy="420624"/>
           </a:xfrm>
           <a:prstGeom prst="rect">
             <a:avLst>
@@ -38910,14 +37782,14 @@
       </p:sp>
       <p:sp>
         <p:nvSpPr>
-          <p:cNvPr id="51" name="Text 49"/>
-          <p:cNvSpPr/>
-          <p:nvPr/>
-        </p:nvSpPr>
-        <p:spPr>
-          <a:xfrm>
-            <a:off x="4599432" y="4178808"/>
-            <a:ext cx="950976" cy="420624"/>
+          <p:cNvPr id="43" name="Text 41"/>
+          <p:cNvSpPr/>
+          <p:nvPr/>
+        </p:nvSpPr>
+        <p:spPr>
+          <a:xfrm>
+            <a:off x="4599432" y="3721608"/>
+            <a:ext cx="822960" cy="420624"/>
           </a:xfrm>
           <a:prstGeom prst="rect">
             <a:avLst/>
@@ -38941,7 +37813,7 @@
                 <a:ea typeface="Trebuchet MS" pitchFamily="34" charset="-122"/>
                 <a:cs typeface="Trebuchet MS" pitchFamily="34" charset="-120"/>
               </a:rPr>
-              <a:t>--er</a:t>
+              <a:t>-er</a:t>
             </a:r>
             <a:endParaRPr lang="en-US" sz="1300" dirty="0"/>
           </a:p>
@@ -38949,13 +37821,13 @@
       </p:sp>
       <p:sp>
         <p:nvSpPr>
-          <p:cNvPr id="52" name="Text 50"/>
-          <p:cNvSpPr/>
-          <p:nvPr/>
-        </p:nvSpPr>
-        <p:spPr>
-          <a:xfrm>
-            <a:off x="5623560" y="4178808"/>
+          <p:cNvPr id="44" name="Text 42"/>
+          <p:cNvSpPr/>
+          <p:nvPr/>
+        </p:nvSpPr>
+        <p:spPr>
+          <a:xfrm>
+            <a:off x="5495544" y="3721608"/>
             <a:ext cx="365760" cy="420624"/>
           </a:xfrm>
           <a:prstGeom prst="rect">
@@ -38988,13 +37860,13 @@
       </p:sp>
       <p:sp>
         <p:nvSpPr>
-          <p:cNvPr id="53" name="Shape 51"/>
-          <p:cNvSpPr/>
-          <p:nvPr/>
-        </p:nvSpPr>
-        <p:spPr>
-          <a:xfrm>
-            <a:off x="6035040" y="4178808"/>
+          <p:cNvPr id="45" name="Shape 43"/>
+          <p:cNvSpPr/>
+          <p:nvPr/>
+        </p:nvSpPr>
+        <p:spPr>
+          <a:xfrm>
+            <a:off x="5907024" y="3721608"/>
             <a:ext cx="2194560" cy="420624"/>
           </a:xfrm>
           <a:prstGeom prst="rect">
@@ -39015,13 +37887,13 @@
       </p:sp>
       <p:sp>
         <p:nvSpPr>
-          <p:cNvPr id="54" name="Text 52"/>
-          <p:cNvSpPr/>
-          <p:nvPr/>
-        </p:nvSpPr>
-        <p:spPr>
-          <a:xfrm>
-            <a:off x="6035040" y="4178808"/>
+          <p:cNvPr id="46" name="Text 44"/>
+          <p:cNvSpPr/>
+          <p:nvPr/>
+        </p:nvSpPr>
+        <p:spPr>
+          <a:xfrm>
+            <a:off x="5907024" y="3721608"/>
             <a:ext cx="2194560" cy="420624"/>
           </a:xfrm>
           <a:prstGeom prst="rect">
@@ -39046,7 +37918,7 @@
                 <a:ea typeface="Trebuchet MS" pitchFamily="34" charset="-122"/>
                 <a:cs typeface="Trebuchet MS" pitchFamily="34" charset="-120"/>
               </a:rPr>
-              <a:t>sticker</a:t>
+              <a:t>stick</a:t>
             </a:r>
             <a:endParaRPr lang="en-US" sz="1400" dirty="0"/>
           </a:p>
@@ -39338,7 +38210,7 @@
                 <a:ea typeface="Calibri" pitchFamily="34" charset="-122"/>
                 <a:cs typeface="Calibri" pitchFamily="34" charset="-120"/>
               </a:rPr>
-              <a:t>Word Labs  •  wordlabs.app  •  Root: 'stick' = to adhere, fasten, or pierce</a:t>
+              <a:t>Word Labs  •  wordlabs.app  •  Root: 'stick' = a thin piece of wood; to attach</a:t>
             </a:r>
             <a:endParaRPr lang="en-US" sz="800" dirty="0"/>
           </a:p>
@@ -39450,7 +38322,7 @@
                 <a:ea typeface="Trebuchet MS" pitchFamily="34" charset="-122"/>
                 <a:cs typeface="Trebuchet MS" pitchFamily="34" charset="-120"/>
               </a:rPr>
-              <a:t>sticker</a:t>
+              <a:t>stick</a:t>
             </a:r>
             <a:endParaRPr lang="en-US" sz="1200" dirty="0"/>
           </a:p>
@@ -39516,7 +38388,7 @@
                 <a:ea typeface="Calibri" pitchFamily="34" charset="-122"/>
                 <a:cs typeface="Calibri" pitchFamily="34" charset="-120"/>
               </a:rPr>
-              <a:t>Describes a pan or surface that food does not stick or cling to when cooking.</a:t>
+              <a:t>long thin pieces of wood</a:t>
             </a:r>
             <a:endParaRPr lang="en-US" sz="1200" dirty="0"/>
           </a:p>
@@ -39589,7 +38461,7 @@
                 <a:ea typeface="Trebuchet MS" pitchFamily="34" charset="-122"/>
                 <a:cs typeface="Trebuchet MS" pitchFamily="34" charset="-120"/>
               </a:rPr>
-              <a:t>sticking</a:t>
+              <a:t>sticks</a:t>
             </a:r>
             <a:endParaRPr lang="en-US" sz="1200" dirty="0"/>
           </a:p>
@@ -39655,702 +38527,7 @@
                 <a:ea typeface="Calibri" pitchFamily="34" charset="-122"/>
                 <a:cs typeface="Calibri" pitchFamily="34" charset="-120"/>
               </a:rPr>
-              <a:t>A coloured make-up product in a stick shape that people apply to their lips.</a:t>
-            </a:r>
-            <a:endParaRPr lang="en-US" sz="1200" dirty="0"/>
-          </a:p>
-        </p:txBody>
-      </p:sp>
-      <p:sp>
-        <p:nvSpPr>
-          <p:cNvPr id="19" name="Shape 17"/>
-          <p:cNvSpPr/>
-          <p:nvPr/>
-        </p:nvSpPr>
-        <p:spPr>
-          <a:xfrm>
-            <a:off x="365760" y="2249424"/>
-            <a:ext cx="2011680" cy="457200"/>
-          </a:xfrm>
-          <a:prstGeom prst="rect">
-            <a:avLst>
-              <a:gd name="adj" fmla="val 12000"/>
-            </a:avLst>
-          </a:prstGeom>
-          <a:solidFill>
-            <a:srgbClr val="EEF2FF"/>
-          </a:solidFill>
-          <a:ln w="12700">
-            <a:solidFill>
-              <a:srgbClr val="6366F1"/>
-            </a:solidFill>
-            <a:prstDash val="solid"/>
-          </a:ln>
-          <a:effectLst>
-            <a:outerShdw sx="100000" sy="100000" kx="0" ky="0" algn="bl" rotWithShape="0" blurRad="101600" dist="38100" dir="8100000">
-              <a:srgbClr val="000000">
-                <a:alpha val="12000"/>
-              </a:srgbClr>
-            </a:outerShdw>
-          </a:effectLst>
-        </p:spPr>
-      </p:sp>
-      <p:sp>
-        <p:nvSpPr>
-          <p:cNvPr id="20" name="Text 18"/>
-          <p:cNvSpPr/>
-          <p:nvPr/>
-        </p:nvSpPr>
-        <p:spPr>
-          <a:xfrm>
-            <a:off x="365760" y="2249424"/>
-            <a:ext cx="2011680" cy="457200"/>
-          </a:xfrm>
-          <a:prstGeom prst="rect">
-            <a:avLst/>
-          </a:prstGeom>
-          <a:noFill/>
-          <a:ln/>
-        </p:spPr>
-        <p:txBody>
-          <a:bodyPr wrap="square" lIns="0" tIns="0" rIns="0" bIns="0" rtlCol="0" anchor="ctr"/>
-          <a:lstStyle/>
-          <a:p>
-            <a:pPr algn="ctr" indent="0" marL="0">
-              <a:buNone/>
-            </a:pPr>
-            <a:r>
-              <a:rPr lang="en-US" sz="1200" b="1" dirty="0">
-                <a:solidFill>
-                  <a:srgbClr val="4338CA"/>
-                </a:solidFill>
-                <a:latin typeface="Trebuchet MS" pitchFamily="34" charset="0"/>
-                <a:ea typeface="Trebuchet MS" pitchFamily="34" charset="-122"/>
-                <a:cs typeface="Trebuchet MS" pitchFamily="34" charset="-120"/>
-              </a:rPr>
-              <a:t>sticky</a:t>
-            </a:r>
-            <a:endParaRPr lang="en-US" sz="1200" dirty="0"/>
-          </a:p>
-        </p:txBody>
-      </p:sp>
-      <p:sp>
-        <p:nvSpPr>
-          <p:cNvPr id="21" name="Shape 19"/>
-          <p:cNvSpPr/>
-          <p:nvPr/>
-        </p:nvSpPr>
-        <p:spPr>
-          <a:xfrm>
-            <a:off x="2514600" y="2249424"/>
-            <a:ext cx="6263640" cy="457200"/>
-          </a:xfrm>
-          <a:prstGeom prst="rect">
-            <a:avLst>
-              <a:gd name="adj" fmla="val 12000"/>
-            </a:avLst>
-          </a:prstGeom>
-          <a:solidFill>
-            <a:srgbClr val="F8FAFC"/>
-          </a:solidFill>
-          <a:ln w="12700">
-            <a:solidFill>
-              <a:srgbClr val="E2E8F0"/>
-            </a:solidFill>
-            <a:prstDash val="solid"/>
-          </a:ln>
-        </p:spPr>
-      </p:sp>
-      <p:sp>
-        <p:nvSpPr>
-          <p:cNvPr id="22" name="Text 20"/>
-          <p:cNvSpPr/>
-          <p:nvPr/>
-        </p:nvSpPr>
-        <p:spPr>
-          <a:xfrm>
-            <a:off x="2651760" y="2249424"/>
-            <a:ext cx="6035040" cy="457200"/>
-          </a:xfrm>
-          <a:prstGeom prst="rect">
-            <a:avLst/>
-          </a:prstGeom>
-          <a:noFill/>
-          <a:ln/>
-        </p:spPr>
-        <p:txBody>
-          <a:bodyPr wrap="square" rtlCol="0" anchor="ctr"/>
-          <a:lstStyle/>
-          <a:p>
-            <a:pPr algn="l" indent="0" marL="0">
-              <a:buNone/>
-            </a:pPr>
-            <a:r>
-              <a:rPr lang="en-US" sz="1200" dirty="0">
-                <a:solidFill>
-                  <a:srgbClr val="0F172A"/>
-                </a:solidFill>
-                <a:latin typeface="Calibri" pitchFamily="34" charset="0"/>
-                <a:ea typeface="Calibri" pitchFamily="34" charset="-122"/>
-                <a:cs typeface="Calibri" pitchFamily="34" charset="-120"/>
-              </a:rPr>
-              <a:t>A thin rod used to hit a drum to make music.</a:t>
-            </a:r>
-            <a:endParaRPr lang="en-US" sz="1200" dirty="0"/>
-          </a:p>
-        </p:txBody>
-      </p:sp>
-      <p:sp>
-        <p:nvSpPr>
-          <p:cNvPr id="23" name="Shape 21"/>
-          <p:cNvSpPr/>
-          <p:nvPr/>
-        </p:nvSpPr>
-        <p:spPr>
-          <a:xfrm>
-            <a:off x="365760" y="2779776"/>
-            <a:ext cx="2011680" cy="457200"/>
-          </a:xfrm>
-          <a:prstGeom prst="rect">
-            <a:avLst>
-              <a:gd name="adj" fmla="val 12000"/>
-            </a:avLst>
-          </a:prstGeom>
-          <a:solidFill>
-            <a:srgbClr val="EEF2FF"/>
-          </a:solidFill>
-          <a:ln w="12700">
-            <a:solidFill>
-              <a:srgbClr val="6366F1"/>
-            </a:solidFill>
-            <a:prstDash val="solid"/>
-          </a:ln>
-          <a:effectLst>
-            <a:outerShdw sx="100000" sy="100000" kx="0" ky="0" algn="bl" rotWithShape="0" blurRad="101600" dist="38100" dir="8100000">
-              <a:srgbClr val="000000">
-                <a:alpha val="12000"/>
-              </a:srgbClr>
-            </a:outerShdw>
-          </a:effectLst>
-        </p:spPr>
-      </p:sp>
-      <p:sp>
-        <p:nvSpPr>
-          <p:cNvPr id="24" name="Text 22"/>
-          <p:cNvSpPr/>
-          <p:nvPr/>
-        </p:nvSpPr>
-        <p:spPr>
-          <a:xfrm>
-            <a:off x="365760" y="2779776"/>
-            <a:ext cx="2011680" cy="457200"/>
-          </a:xfrm>
-          <a:prstGeom prst="rect">
-            <a:avLst/>
-          </a:prstGeom>
-          <a:noFill/>
-          <a:ln/>
-        </p:spPr>
-        <p:txBody>
-          <a:bodyPr wrap="square" lIns="0" tIns="0" rIns="0" bIns="0" rtlCol="0" anchor="ctr"/>
-          <a:lstStyle/>
-          <a:p>
-            <a:pPr algn="ctr" indent="0" marL="0">
-              <a:buNone/>
-            </a:pPr>
-            <a:r>
-              <a:rPr lang="en-US" sz="1200" b="1" dirty="0">
-                <a:solidFill>
-                  <a:srgbClr val="4338CA"/>
-                </a:solidFill>
-                <a:latin typeface="Trebuchet MS" pitchFamily="34" charset="0"/>
-                <a:ea typeface="Trebuchet MS" pitchFamily="34" charset="-122"/>
-                <a:cs typeface="Trebuchet MS" pitchFamily="34" charset="-120"/>
-              </a:rPr>
-              <a:t>drumstick</a:t>
-            </a:r>
-            <a:endParaRPr lang="en-US" sz="1200" dirty="0"/>
-          </a:p>
-        </p:txBody>
-      </p:sp>
-      <p:sp>
-        <p:nvSpPr>
-          <p:cNvPr id="25" name="Shape 23"/>
-          <p:cNvSpPr/>
-          <p:nvPr/>
-        </p:nvSpPr>
-        <p:spPr>
-          <a:xfrm>
-            <a:off x="2514600" y="2779776"/>
-            <a:ext cx="6263640" cy="457200"/>
-          </a:xfrm>
-          <a:prstGeom prst="rect">
-            <a:avLst>
-              <a:gd name="adj" fmla="val 12000"/>
-            </a:avLst>
-          </a:prstGeom>
-          <a:solidFill>
-            <a:srgbClr val="F8FAFC"/>
-          </a:solidFill>
-          <a:ln w="12700">
-            <a:solidFill>
-              <a:srgbClr val="E2E8F0"/>
-            </a:solidFill>
-            <a:prstDash val="solid"/>
-          </a:ln>
-        </p:spPr>
-      </p:sp>
-      <p:sp>
-        <p:nvSpPr>
-          <p:cNvPr id="26" name="Text 24"/>
-          <p:cNvSpPr/>
-          <p:nvPr/>
-        </p:nvSpPr>
-        <p:spPr>
-          <a:xfrm>
-            <a:off x="2651760" y="2779776"/>
-            <a:ext cx="6035040" cy="457200"/>
-          </a:xfrm>
-          <a:prstGeom prst="rect">
-            <a:avLst/>
-          </a:prstGeom>
-          <a:noFill/>
-          <a:ln/>
-        </p:spPr>
-        <p:txBody>
-          <a:bodyPr wrap="square" rtlCol="0" anchor="ctr"/>
-          <a:lstStyle/>
-          <a:p>
-            <a:pPr algn="l" indent="0" marL="0">
-              <a:buNone/>
-            </a:pPr>
-            <a:r>
-              <a:rPr lang="en-US" sz="1200" dirty="0">
-                <a:solidFill>
-                  <a:srgbClr val="0F172A"/>
-                </a:solidFill>
-                <a:latin typeface="Calibri" pitchFamily="34" charset="0"/>
-                <a:ea typeface="Calibri" pitchFamily="34" charset="-122"/>
-                <a:cs typeface="Calibri" pitchFamily="34" charset="-120"/>
-              </a:rPr>
-              <a:t>One of a pair of thin sticks used to pick up and eat food, common in Asian cultures.</a:t>
-            </a:r>
-            <a:endParaRPr lang="en-US" sz="1200" dirty="0"/>
-          </a:p>
-        </p:txBody>
-      </p:sp>
-      <p:sp>
-        <p:nvSpPr>
-          <p:cNvPr id="27" name="Shape 25"/>
-          <p:cNvSpPr/>
-          <p:nvPr/>
-        </p:nvSpPr>
-        <p:spPr>
-          <a:xfrm>
-            <a:off x="365760" y="3310128"/>
-            <a:ext cx="2011680" cy="457200"/>
-          </a:xfrm>
-          <a:prstGeom prst="rect">
-            <a:avLst>
-              <a:gd name="adj" fmla="val 12000"/>
-            </a:avLst>
-          </a:prstGeom>
-          <a:solidFill>
-            <a:srgbClr val="EEF2FF"/>
-          </a:solidFill>
-          <a:ln w="12700">
-            <a:solidFill>
-              <a:srgbClr val="6366F1"/>
-            </a:solidFill>
-            <a:prstDash val="solid"/>
-          </a:ln>
-          <a:effectLst>
-            <a:outerShdw sx="100000" sy="100000" kx="0" ky="0" algn="bl" rotWithShape="0" blurRad="101600" dist="38100" dir="8100000">
-              <a:srgbClr val="000000">
-                <a:alpha val="12000"/>
-              </a:srgbClr>
-            </a:outerShdw>
-          </a:effectLst>
-        </p:spPr>
-      </p:sp>
-      <p:sp>
-        <p:nvSpPr>
-          <p:cNvPr id="28" name="Text 26"/>
-          <p:cNvSpPr/>
-          <p:nvPr/>
-        </p:nvSpPr>
-        <p:spPr>
-          <a:xfrm>
-            <a:off x="365760" y="3310128"/>
-            <a:ext cx="2011680" cy="457200"/>
-          </a:xfrm>
-          <a:prstGeom prst="rect">
-            <a:avLst/>
-          </a:prstGeom>
-          <a:noFill/>
-          <a:ln/>
-        </p:spPr>
-        <p:txBody>
-          <a:bodyPr wrap="square" lIns="0" tIns="0" rIns="0" bIns="0" rtlCol="0" anchor="ctr"/>
-          <a:lstStyle/>
-          <a:p>
-            <a:pPr algn="ctr" indent="0" marL="0">
-              <a:buNone/>
-            </a:pPr>
-            <a:r>
-              <a:rPr lang="en-US" sz="1200" b="1" dirty="0">
-                <a:solidFill>
-                  <a:srgbClr val="4338CA"/>
-                </a:solidFill>
-                <a:latin typeface="Trebuchet MS" pitchFamily="34" charset="0"/>
-                <a:ea typeface="Trebuchet MS" pitchFamily="34" charset="-122"/>
-                <a:cs typeface="Trebuchet MS" pitchFamily="34" charset="-120"/>
-              </a:rPr>
-              <a:t>lipstick</a:t>
-            </a:r>
-            <a:endParaRPr lang="en-US" sz="1200" dirty="0"/>
-          </a:p>
-        </p:txBody>
-      </p:sp>
-      <p:sp>
-        <p:nvSpPr>
-          <p:cNvPr id="29" name="Shape 27"/>
-          <p:cNvSpPr/>
-          <p:nvPr/>
-        </p:nvSpPr>
-        <p:spPr>
-          <a:xfrm>
-            <a:off x="2514600" y="3310128"/>
-            <a:ext cx="6263640" cy="457200"/>
-          </a:xfrm>
-          <a:prstGeom prst="rect">
-            <a:avLst>
-              <a:gd name="adj" fmla="val 12000"/>
-            </a:avLst>
-          </a:prstGeom>
-          <a:solidFill>
-            <a:srgbClr val="F8FAFC"/>
-          </a:solidFill>
-          <a:ln w="12700">
-            <a:solidFill>
-              <a:srgbClr val="E2E8F0"/>
-            </a:solidFill>
-            <a:prstDash val="solid"/>
-          </a:ln>
-        </p:spPr>
-      </p:sp>
-      <p:sp>
-        <p:nvSpPr>
-          <p:cNvPr id="30" name="Text 28"/>
-          <p:cNvSpPr/>
-          <p:nvPr/>
-        </p:nvSpPr>
-        <p:spPr>
-          <a:xfrm>
-            <a:off x="2651760" y="3310128"/>
-            <a:ext cx="6035040" cy="457200"/>
-          </a:xfrm>
-          <a:prstGeom prst="rect">
-            <a:avLst/>
-          </a:prstGeom>
-          <a:noFill/>
-          <a:ln/>
-        </p:spPr>
-        <p:txBody>
-          <a:bodyPr wrap="square" rtlCol="0" anchor="ctr"/>
-          <a:lstStyle/>
-          <a:p>
-            <a:pPr algn="l" indent="0" marL="0">
-              <a:buNone/>
-            </a:pPr>
-            <a:r>
-              <a:rPr lang="en-US" sz="1200" dirty="0">
-                <a:solidFill>
-                  <a:srgbClr val="0F172A"/>
-                </a:solidFill>
-                <a:latin typeface="Calibri" pitchFamily="34" charset="0"/>
-                <a:ea typeface="Calibri" pitchFamily="34" charset="-122"/>
-                <a:cs typeface="Calibri" pitchFamily="34" charset="-120"/>
-              </a:rPr>
-              <a:t>Describes something that clings to things or leaves a gluey feeling on your fingers.</a:t>
-            </a:r>
-            <a:endParaRPr lang="en-US" sz="1200" dirty="0"/>
-          </a:p>
-        </p:txBody>
-      </p:sp>
-      <p:sp>
-        <p:nvSpPr>
-          <p:cNvPr id="31" name="Shape 29"/>
-          <p:cNvSpPr/>
-          <p:nvPr/>
-        </p:nvSpPr>
-        <p:spPr>
-          <a:xfrm>
-            <a:off x="365760" y="3840480"/>
-            <a:ext cx="2011680" cy="457200"/>
-          </a:xfrm>
-          <a:prstGeom prst="rect">
-            <a:avLst>
-              <a:gd name="adj" fmla="val 12000"/>
-            </a:avLst>
-          </a:prstGeom>
-          <a:solidFill>
-            <a:srgbClr val="EEF2FF"/>
-          </a:solidFill>
-          <a:ln w="12700">
-            <a:solidFill>
-              <a:srgbClr val="6366F1"/>
-            </a:solidFill>
-            <a:prstDash val="solid"/>
-          </a:ln>
-          <a:effectLst>
-            <a:outerShdw sx="100000" sy="100000" kx="0" ky="0" algn="bl" rotWithShape="0" blurRad="101600" dist="38100" dir="8100000">
-              <a:srgbClr val="000000">
-                <a:alpha val="12000"/>
-              </a:srgbClr>
-            </a:outerShdw>
-          </a:effectLst>
-        </p:spPr>
-      </p:sp>
-      <p:sp>
-        <p:nvSpPr>
-          <p:cNvPr id="32" name="Text 30"/>
-          <p:cNvSpPr/>
-          <p:nvPr/>
-        </p:nvSpPr>
-        <p:spPr>
-          <a:xfrm>
-            <a:off x="365760" y="3840480"/>
-            <a:ext cx="2011680" cy="457200"/>
-          </a:xfrm>
-          <a:prstGeom prst="rect">
-            <a:avLst/>
-          </a:prstGeom>
-          <a:noFill/>
-          <a:ln/>
-        </p:spPr>
-        <p:txBody>
-          <a:bodyPr wrap="square" lIns="0" tIns="0" rIns="0" bIns="0" rtlCol="0" anchor="ctr"/>
-          <a:lstStyle/>
-          <a:p>
-            <a:pPr algn="ctr" indent="0" marL="0">
-              <a:buNone/>
-            </a:pPr>
-            <a:r>
-              <a:rPr lang="en-US" sz="1200" b="1" dirty="0">
-                <a:solidFill>
-                  <a:srgbClr val="4338CA"/>
-                </a:solidFill>
-                <a:latin typeface="Trebuchet MS" pitchFamily="34" charset="0"/>
-                <a:ea typeface="Trebuchet MS" pitchFamily="34" charset="-122"/>
-                <a:cs typeface="Trebuchet MS" pitchFamily="34" charset="-120"/>
-              </a:rPr>
-              <a:t>chopstick</a:t>
-            </a:r>
-            <a:endParaRPr lang="en-US" sz="1200" dirty="0"/>
-          </a:p>
-        </p:txBody>
-      </p:sp>
-      <p:sp>
-        <p:nvSpPr>
-          <p:cNvPr id="33" name="Shape 31"/>
-          <p:cNvSpPr/>
-          <p:nvPr/>
-        </p:nvSpPr>
-        <p:spPr>
-          <a:xfrm>
-            <a:off x="2514600" y="3840480"/>
-            <a:ext cx="6263640" cy="457200"/>
-          </a:xfrm>
-          <a:prstGeom prst="rect">
-            <a:avLst>
-              <a:gd name="adj" fmla="val 12000"/>
-            </a:avLst>
-          </a:prstGeom>
-          <a:solidFill>
-            <a:srgbClr val="F8FAFC"/>
-          </a:solidFill>
-          <a:ln w="12700">
-            <a:solidFill>
-              <a:srgbClr val="E2E8F0"/>
-            </a:solidFill>
-            <a:prstDash val="solid"/>
-          </a:ln>
-        </p:spPr>
-      </p:sp>
-      <p:sp>
-        <p:nvSpPr>
-          <p:cNvPr id="34" name="Text 32"/>
-          <p:cNvSpPr/>
-          <p:nvPr/>
-        </p:nvSpPr>
-        <p:spPr>
-          <a:xfrm>
-            <a:off x="2651760" y="3840480"/>
-            <a:ext cx="6035040" cy="457200"/>
-          </a:xfrm>
-          <a:prstGeom prst="rect">
-            <a:avLst/>
-          </a:prstGeom>
-          <a:noFill/>
-          <a:ln/>
-        </p:spPr>
-        <p:txBody>
-          <a:bodyPr wrap="square" rtlCol="0" anchor="ctr"/>
-          <a:lstStyle/>
-          <a:p>
-            <a:pPr algn="l" indent="0" marL="0">
-              <a:buNone/>
-            </a:pPr>
-            <a:r>
-              <a:rPr lang="en-US" sz="1200" dirty="0">
-                <a:solidFill>
-                  <a:srgbClr val="0F172A"/>
-                </a:solidFill>
-                <a:latin typeface="Calibri" pitchFamily="34" charset="0"/>
-                <a:ea typeface="Calibri" pitchFamily="34" charset="-122"/>
-                <a:cs typeface="Calibri" pitchFamily="34" charset="-120"/>
-              </a:rPr>
-              <a:t>A small piece of paper or plastic with a sticky back that you press onto a surface.</a:t>
-            </a:r>
-            <a:endParaRPr lang="en-US" sz="1200" dirty="0"/>
-          </a:p>
-        </p:txBody>
-      </p:sp>
-      <p:sp>
-        <p:nvSpPr>
-          <p:cNvPr id="35" name="Shape 33"/>
-          <p:cNvSpPr/>
-          <p:nvPr/>
-        </p:nvSpPr>
-        <p:spPr>
-          <a:xfrm>
-            <a:off x="365760" y="4370832"/>
-            <a:ext cx="2011680" cy="457200"/>
-          </a:xfrm>
-          <a:prstGeom prst="rect">
-            <a:avLst>
-              <a:gd name="adj" fmla="val 12000"/>
-            </a:avLst>
-          </a:prstGeom>
-          <a:solidFill>
-            <a:srgbClr val="EEF2FF"/>
-          </a:solidFill>
-          <a:ln w="12700">
-            <a:solidFill>
-              <a:srgbClr val="6366F1"/>
-            </a:solidFill>
-            <a:prstDash val="solid"/>
-          </a:ln>
-          <a:effectLst>
-            <a:outerShdw sx="100000" sy="100000" kx="0" ky="0" algn="bl" rotWithShape="0" blurRad="101600" dist="38100" dir="8100000">
-              <a:srgbClr val="000000">
-                <a:alpha val="12000"/>
-              </a:srgbClr>
-            </a:outerShdw>
-          </a:effectLst>
-        </p:spPr>
-      </p:sp>
-      <p:sp>
-        <p:nvSpPr>
-          <p:cNvPr id="36" name="Text 34"/>
-          <p:cNvSpPr/>
-          <p:nvPr/>
-        </p:nvSpPr>
-        <p:spPr>
-          <a:xfrm>
-            <a:off x="365760" y="4370832"/>
-            <a:ext cx="2011680" cy="457200"/>
-          </a:xfrm>
-          <a:prstGeom prst="rect">
-            <a:avLst/>
-          </a:prstGeom>
-          <a:noFill/>
-          <a:ln/>
-        </p:spPr>
-        <p:txBody>
-          <a:bodyPr wrap="square" lIns="0" tIns="0" rIns="0" bIns="0" rtlCol="0" anchor="ctr"/>
-          <a:lstStyle/>
-          <a:p>
-            <a:pPr algn="ctr" indent="0" marL="0">
-              <a:buNone/>
-            </a:pPr>
-            <a:r>
-              <a:rPr lang="en-US" sz="1200" b="1" dirty="0">
-                <a:solidFill>
-                  <a:srgbClr val="4338CA"/>
-                </a:solidFill>
-                <a:latin typeface="Trebuchet MS" pitchFamily="34" charset="0"/>
-                <a:ea typeface="Trebuchet MS" pitchFamily="34" charset="-122"/>
-                <a:cs typeface="Trebuchet MS" pitchFamily="34" charset="-120"/>
-              </a:rPr>
-              <a:t>nonstick</a:t>
-            </a:r>
-            <a:endParaRPr lang="en-US" sz="1200" dirty="0"/>
-          </a:p>
-        </p:txBody>
-      </p:sp>
-      <p:sp>
-        <p:nvSpPr>
-          <p:cNvPr id="37" name="Shape 35"/>
-          <p:cNvSpPr/>
-          <p:nvPr/>
-        </p:nvSpPr>
-        <p:spPr>
-          <a:xfrm>
-            <a:off x="2514600" y="4370832"/>
-            <a:ext cx="6263640" cy="457200"/>
-          </a:xfrm>
-          <a:prstGeom prst="rect">
-            <a:avLst>
-              <a:gd name="adj" fmla="val 12000"/>
-            </a:avLst>
-          </a:prstGeom>
-          <a:solidFill>
-            <a:srgbClr val="F8FAFC"/>
-          </a:solidFill>
-          <a:ln w="12700">
-            <a:solidFill>
-              <a:srgbClr val="E2E8F0"/>
-            </a:solidFill>
-            <a:prstDash val="solid"/>
-          </a:ln>
-        </p:spPr>
-      </p:sp>
-      <p:sp>
-        <p:nvSpPr>
-          <p:cNvPr id="38" name="Text 36"/>
-          <p:cNvSpPr/>
-          <p:nvPr/>
-        </p:nvSpPr>
-        <p:spPr>
-          <a:xfrm>
-            <a:off x="2651760" y="4370832"/>
-            <a:ext cx="6035040" cy="457200"/>
-          </a:xfrm>
-          <a:prstGeom prst="rect">
-            <a:avLst/>
-          </a:prstGeom>
-          <a:noFill/>
-          <a:ln/>
-        </p:spPr>
-        <p:txBody>
-          <a:bodyPr wrap="square" rtlCol="0" anchor="ctr"/>
-          <a:lstStyle/>
-          <a:p>
-            <a:pPr algn="l" indent="0" marL="0">
-              <a:buNone/>
-            </a:pPr>
-            <a:r>
-              <a:rPr lang="en-US" sz="1200" dirty="0">
-                <a:solidFill>
-                  <a:srgbClr val="0F172A"/>
-                </a:solidFill>
-                <a:latin typeface="Calibri" pitchFamily="34" charset="0"/>
-                <a:ea typeface="Calibri" pitchFamily="34" charset="-122"/>
-                <a:cs typeface="Calibri" pitchFamily="34" charset="-120"/>
-              </a:rPr>
-              <a:t>When something is fastening itself to another surface or getting caught on something.</a:t>
+              <a:t>a long thin piece of wood</a:t>
             </a:r>
             <a:endParaRPr lang="en-US" sz="1200" dirty="0"/>
           </a:p>
@@ -40642,7 +38819,7 @@
                 <a:ea typeface="Calibri" pitchFamily="34" charset="-122"/>
                 <a:cs typeface="Calibri" pitchFamily="34" charset="-120"/>
               </a:rPr>
-              <a:t>Word Labs  •  wordlabs.app  •  Root: 'stick' = to adhere, fasten, or pierce</a:t>
+              <a:t>Word Labs  •  wordlabs.app  •  Root: 'stick' = a thin piece of wood; to attach</a:t>
             </a:r>
             <a:endParaRPr lang="en-US" sz="800" dirty="0"/>
           </a:p>
@@ -40845,7 +39022,7 @@
                 <a:ea typeface="Calibri" pitchFamily="34" charset="-122"/>
                 <a:cs typeface="Calibri" pitchFamily="34" charset="-120"/>
               </a:rPr>
-              <a:t>The gymnast used a nonstick grip on the bars so her hands would not slip during her routine.</a:t>
+              <a:t>The dog fetched the stick from the garden.</a:t>
             </a:r>
             <a:endParaRPr lang="en-US" sz="1500" dirty="0"/>
           </a:p>
@@ -41009,7 +39186,7 @@
                 <a:ea typeface="Calibri" pitchFamily="34" charset="-122"/>
                 <a:cs typeface="Calibri" pitchFamily="34" charset="-120"/>
               </a:rPr>
-              <a:t>Jake collected every shiny sticker he could find and filled three whole pages of his album.</a:t>
+              <a:t>We collected sticks to build a den in the woods.</a:t>
             </a:r>
             <a:endParaRPr lang="en-US" sz="1500" dirty="0"/>
           </a:p>
@@ -41173,7 +39350,7 @@
                 <a:ea typeface="Calibri" pitchFamily="34" charset="-122"/>
                 <a:cs typeface="Calibri" pitchFamily="34" charset="-120"/>
               </a:rPr>
-              <a:t>She held the candlestick carefully as she walked through the dark hallway during the power outage.</a:t>
+              <a:t>My hands were sticky after eating the toffee.</a:t>
             </a:r>
             <a:endParaRPr lang="en-US" sz="1500" dirty="0"/>
           </a:p>
